--- a/rdbms/SQL Plus/RDBMS_Sem-1/Unit-5/ch17-Transaction.pptx
+++ b/rdbms/SQL Plus/RDBMS_Sem-1/Unit-5/ch17-Transaction.pptx
@@ -5,10 +5,10 @@
     <p:sldMasterId id="2147483801" r:id="rId1"/>
   </p:sldMasterIdLst>
   <p:notesMasterIdLst>
-    <p:notesMasterId r:id="rId42"/>
+    <p:notesMasterId r:id="rId36"/>
   </p:notesMasterIdLst>
   <p:handoutMasterIdLst>
-    <p:handoutMasterId r:id="rId43"/>
+    <p:handoutMasterId r:id="rId37"/>
   </p:handoutMasterIdLst>
   <p:sldIdLst>
     <p:sldId id="320" r:id="rId2"/>
@@ -35,22 +35,16 @@
     <p:sldId id="274" r:id="rId23"/>
     <p:sldId id="275" r:id="rId24"/>
     <p:sldId id="276" r:id="rId25"/>
-    <p:sldId id="326" r:id="rId26"/>
-    <p:sldId id="329" r:id="rId27"/>
-    <p:sldId id="330" r:id="rId28"/>
-    <p:sldId id="277" r:id="rId29"/>
-    <p:sldId id="278" r:id="rId30"/>
-    <p:sldId id="279" r:id="rId31"/>
-    <p:sldId id="332" r:id="rId32"/>
-    <p:sldId id="375" r:id="rId33"/>
-    <p:sldId id="334" r:id="rId34"/>
-    <p:sldId id="341" r:id="rId35"/>
-    <p:sldId id="377" r:id="rId36"/>
-    <p:sldId id="282" r:id="rId37"/>
-    <p:sldId id="281" r:id="rId38"/>
-    <p:sldId id="378" r:id="rId39"/>
-    <p:sldId id="379" r:id="rId40"/>
-    <p:sldId id="380" r:id="rId41"/>
+    <p:sldId id="277" r:id="rId26"/>
+    <p:sldId id="278" r:id="rId27"/>
+    <p:sldId id="279" r:id="rId28"/>
+    <p:sldId id="332" r:id="rId29"/>
+    <p:sldId id="375" r:id="rId30"/>
+    <p:sldId id="341" r:id="rId31"/>
+    <p:sldId id="282" r:id="rId32"/>
+    <p:sldId id="281" r:id="rId33"/>
+    <p:sldId id="378" r:id="rId34"/>
+    <p:sldId id="379" r:id="rId35"/>
   </p:sldIdLst>
   <p:sldSz cx="9144000" cy="6858000" type="screen4x3"/>
   <p:notesSz cx="6997700" cy="9283700"/>
@@ -422,6 +416,11 @@
         </p:txBody>
       </p:sp>
     </p:spTree>
+    <p:extLst>
+      <p:ext uri="{BB962C8B-B14F-4D97-AF65-F5344CB8AC3E}">
+        <p14:creationId xmlns:p14="http://schemas.microsoft.com/office/powerpoint/2010/main" val="284336956"/>
+      </p:ext>
+    </p:extLst>
   </p:cSld>
   <p:clrMap bg1="lt1" tx1="dk1" bg2="lt2" tx2="dk2" accent1="accent1" accent2="accent2" accent3="accent3" accent4="accent4" accent5="accent5" accent6="accent6" hlink="hlink" folHlink="folHlink"/>
 </p:handoutMaster>
@@ -762,6 +761,11 @@
         </p:txBody>
       </p:sp>
     </p:spTree>
+    <p:extLst>
+      <p:ext uri="{BB962C8B-B14F-4D97-AF65-F5344CB8AC3E}">
+        <p14:creationId xmlns:p14="http://schemas.microsoft.com/office/powerpoint/2010/main" val="2362124589"/>
+      </p:ext>
+    </p:extLst>
   </p:cSld>
   <p:clrMap bg1="lt1" tx1="dk1" bg2="lt2" tx2="dk2" accent1="accent1" accent2="accent2" accent3="accent3" accent4="accent4" accent5="accent5" accent6="accent6" hlink="hlink" folHlink="folHlink"/>
   <p:notesStyle>
@@ -1120,6 +1124,11 @@
         </p:txBody>
       </p:sp>
     </p:spTree>
+    <p:extLst>
+      <p:ext uri="{BB962C8B-B14F-4D97-AF65-F5344CB8AC3E}">
+        <p14:creationId xmlns:p14="http://schemas.microsoft.com/office/powerpoint/2010/main" val="3737412021"/>
+      </p:ext>
+    </p:extLst>
   </p:cSld>
   <p:clrMapOvr>
     <a:masterClrMapping/>
@@ -1358,6 +1367,11 @@
         </p:txBody>
       </p:sp>
     </p:spTree>
+    <p:extLst>
+      <p:ext uri="{BB962C8B-B14F-4D97-AF65-F5344CB8AC3E}">
+        <p14:creationId xmlns:p14="http://schemas.microsoft.com/office/powerpoint/2010/main" val="1973313500"/>
+      </p:ext>
+    </p:extLst>
   </p:cSld>
   <p:clrMapOvr>
     <a:masterClrMapping/>
@@ -1596,6 +1610,11 @@
         </p:txBody>
       </p:sp>
     </p:spTree>
+    <p:extLst>
+      <p:ext uri="{BB962C8B-B14F-4D97-AF65-F5344CB8AC3E}">
+        <p14:creationId xmlns:p14="http://schemas.microsoft.com/office/powerpoint/2010/main" val="1850938556"/>
+      </p:ext>
+    </p:extLst>
   </p:cSld>
   <p:clrMapOvr>
     <a:masterClrMapping/>
@@ -1834,6 +1853,11 @@
         </p:txBody>
       </p:sp>
     </p:spTree>
+    <p:extLst>
+      <p:ext uri="{BB962C8B-B14F-4D97-AF65-F5344CB8AC3E}">
+        <p14:creationId xmlns:p14="http://schemas.microsoft.com/office/powerpoint/2010/main" val="4035926499"/>
+      </p:ext>
+    </p:extLst>
   </p:cSld>
   <p:clrMapOvr>
     <a:masterClrMapping/>
@@ -2072,6 +2096,11 @@
         </p:txBody>
       </p:sp>
     </p:spTree>
+    <p:extLst>
+      <p:ext uri="{BB962C8B-B14F-4D97-AF65-F5344CB8AC3E}">
+        <p14:creationId xmlns:p14="http://schemas.microsoft.com/office/powerpoint/2010/main" val="2147540163"/>
+      </p:ext>
+    </p:extLst>
   </p:cSld>
   <p:clrMapOvr>
     <a:masterClrMapping/>
@@ -2310,6 +2339,11 @@
         </p:txBody>
       </p:sp>
     </p:spTree>
+    <p:extLst>
+      <p:ext uri="{BB962C8B-B14F-4D97-AF65-F5344CB8AC3E}">
+        <p14:creationId xmlns:p14="http://schemas.microsoft.com/office/powerpoint/2010/main" val="3440048360"/>
+      </p:ext>
+    </p:extLst>
   </p:cSld>
   <p:clrMapOvr>
     <a:masterClrMapping/>
@@ -2548,6 +2582,11 @@
         </p:txBody>
       </p:sp>
     </p:spTree>
+    <p:extLst>
+      <p:ext uri="{BB962C8B-B14F-4D97-AF65-F5344CB8AC3E}">
+        <p14:creationId xmlns:p14="http://schemas.microsoft.com/office/powerpoint/2010/main" val="197095373"/>
+      </p:ext>
+    </p:extLst>
   </p:cSld>
   <p:clrMapOvr>
     <a:masterClrMapping/>
@@ -2786,6 +2825,11 @@
         </p:txBody>
       </p:sp>
     </p:spTree>
+    <p:extLst>
+      <p:ext uri="{BB962C8B-B14F-4D97-AF65-F5344CB8AC3E}">
+        <p14:creationId xmlns:p14="http://schemas.microsoft.com/office/powerpoint/2010/main" val="3533484656"/>
+      </p:ext>
+    </p:extLst>
   </p:cSld>
   <p:clrMapOvr>
     <a:masterClrMapping/>
@@ -3024,6 +3068,11 @@
         </p:txBody>
       </p:sp>
     </p:spTree>
+    <p:extLst>
+      <p:ext uri="{BB962C8B-B14F-4D97-AF65-F5344CB8AC3E}">
+        <p14:creationId xmlns:p14="http://schemas.microsoft.com/office/powerpoint/2010/main" val="2214482027"/>
+      </p:ext>
+    </p:extLst>
   </p:cSld>
   <p:clrMapOvr>
     <a:masterClrMapping/>
@@ -3262,6 +3311,11 @@
         </p:txBody>
       </p:sp>
     </p:spTree>
+    <p:extLst>
+      <p:ext uri="{BB962C8B-B14F-4D97-AF65-F5344CB8AC3E}">
+        <p14:creationId xmlns:p14="http://schemas.microsoft.com/office/powerpoint/2010/main" val="3403518698"/>
+      </p:ext>
+    </p:extLst>
   </p:cSld>
   <p:clrMapOvr>
     <a:masterClrMapping/>
@@ -3500,6 +3554,11 @@
         </p:txBody>
       </p:sp>
     </p:spTree>
+    <p:extLst>
+      <p:ext uri="{BB962C8B-B14F-4D97-AF65-F5344CB8AC3E}">
+        <p14:creationId xmlns:p14="http://schemas.microsoft.com/office/powerpoint/2010/main" val="956519999"/>
+      </p:ext>
+    </p:extLst>
   </p:cSld>
   <p:clrMapOvr>
     <a:masterClrMapping/>
@@ -3738,6 +3797,11 @@
         </p:txBody>
       </p:sp>
     </p:spTree>
+    <p:extLst>
+      <p:ext uri="{BB962C8B-B14F-4D97-AF65-F5344CB8AC3E}">
+        <p14:creationId xmlns:p14="http://schemas.microsoft.com/office/powerpoint/2010/main" val="106590462"/>
+      </p:ext>
+    </p:extLst>
   </p:cSld>
   <p:clrMapOvr>
     <a:masterClrMapping/>
@@ -3976,6 +4040,11 @@
         </p:txBody>
       </p:sp>
     </p:spTree>
+    <p:extLst>
+      <p:ext uri="{BB962C8B-B14F-4D97-AF65-F5344CB8AC3E}">
+        <p14:creationId xmlns:p14="http://schemas.microsoft.com/office/powerpoint/2010/main" val="3367383309"/>
+      </p:ext>
+    </p:extLst>
   </p:cSld>
   <p:clrMapOvr>
     <a:masterClrMapping/>
@@ -4214,6 +4283,11 @@
         </p:txBody>
       </p:sp>
     </p:spTree>
+    <p:extLst>
+      <p:ext uri="{BB962C8B-B14F-4D97-AF65-F5344CB8AC3E}">
+        <p14:creationId xmlns:p14="http://schemas.microsoft.com/office/powerpoint/2010/main" val="1834820231"/>
+      </p:ext>
+    </p:extLst>
   </p:cSld>
   <p:clrMapOvr>
     <a:masterClrMapping/>
@@ -4452,6 +4526,11 @@
         </p:txBody>
       </p:sp>
     </p:spTree>
+    <p:extLst>
+      <p:ext uri="{BB962C8B-B14F-4D97-AF65-F5344CB8AC3E}">
+        <p14:creationId xmlns:p14="http://schemas.microsoft.com/office/powerpoint/2010/main" val="2389166266"/>
+      </p:ext>
+    </p:extLst>
   </p:cSld>
   <p:clrMapOvr>
     <a:masterClrMapping/>
@@ -4690,6 +4769,11 @@
         </p:txBody>
       </p:sp>
     </p:spTree>
+    <p:extLst>
+      <p:ext uri="{BB962C8B-B14F-4D97-AF65-F5344CB8AC3E}">
+        <p14:creationId xmlns:p14="http://schemas.microsoft.com/office/powerpoint/2010/main" val="1136033431"/>
+      </p:ext>
+    </p:extLst>
   </p:cSld>
   <p:clrMapOvr>
     <a:masterClrMapping/>
@@ -4928,6 +5012,11 @@
         </p:txBody>
       </p:sp>
     </p:spTree>
+    <p:extLst>
+      <p:ext uri="{BB962C8B-B14F-4D97-AF65-F5344CB8AC3E}">
+        <p14:creationId xmlns:p14="http://schemas.microsoft.com/office/powerpoint/2010/main" val="595914752"/>
+      </p:ext>
+    </p:extLst>
   </p:cSld>
   <p:clrMapOvr>
     <a:masterClrMapping/>
@@ -4936,720 +5025,6 @@
 </file>
 
 <file path=ppt/notesSlides/notesSlide25.xml><?xml version="1.0" encoding="utf-8"?>
-<p:notes xmlns:a="http://schemas.openxmlformats.org/drawingml/2006/main" xmlns:r="http://schemas.openxmlformats.org/officeDocument/2006/relationships" xmlns:p="http://schemas.openxmlformats.org/presentationml/2006/main">
-  <p:cSld>
-    <p:spTree>
-      <p:nvGrpSpPr>
-        <p:cNvPr id="1" name=""/>
-        <p:cNvGrpSpPr/>
-        <p:nvPr/>
-      </p:nvGrpSpPr>
-      <p:grpSpPr>
-        <a:xfrm>
-          <a:off x="0" y="0"/>
-          <a:ext cx="0" cy="0"/>
-          <a:chOff x="0" y="0"/>
-          <a:chExt cx="0" cy="0"/>
-        </a:xfrm>
-      </p:grpSpPr>
-      <p:sp>
-        <p:nvSpPr>
-          <p:cNvPr id="68610" name="Rectangle 7"/>
-          <p:cNvSpPr>
-            <a:spLocks noGrp="1" noChangeArrowheads="1"/>
-          </p:cNvSpPr>
-          <p:nvPr>
-            <p:ph type="sldNum" sz="quarter" idx="5"/>
-          </p:nvPr>
-        </p:nvSpPr>
-        <p:spPr>
-          <a:noFill/>
-          <a:ln/>
-          <a:extLst>
-            <a:ext uri="{909E8E84-426E-40DD-AFC4-6F175D3DCCD1}">
-              <a14:hiddenFill xmlns:a14="http://schemas.microsoft.com/office/drawing/2010/main">
-                <a:solidFill>
-                  <a:srgbClr val="FFFFFF"/>
-                </a:solidFill>
-              </a14:hiddenFill>
-            </a:ext>
-            <a:ext uri="{91240B29-F687-4F45-9708-019B960494DF}">
-              <a14:hiddenLine xmlns:a14="http://schemas.microsoft.com/office/drawing/2010/main" w="9525">
-                <a:solidFill>
-                  <a:srgbClr val="000000"/>
-                </a:solidFill>
-                <a:miter lim="800000"/>
-                <a:headEnd/>
-                <a:tailEnd/>
-              </a14:hiddenLine>
-            </a:ext>
-          </a:extLst>
-        </p:spPr>
-        <p:txBody>
-          <a:bodyPr/>
-          <a:lstStyle>
-            <a:lvl1pPr defTabSz="930275">
-              <a:defRPr sz="1600">
-                <a:solidFill>
-                  <a:schemeClr val="tx1"/>
-                </a:solidFill>
-                <a:latin typeface="Helvetica" panose="020B0604020202020204" pitchFamily="34" charset="0"/>
-                <a:ea typeface="MS PGothic" panose="020B0600070205080204" pitchFamily="34" charset="-128"/>
-              </a:defRPr>
-            </a:lvl1pPr>
-            <a:lvl2pPr marL="742950" indent="-285750" defTabSz="930275">
-              <a:defRPr sz="1600">
-                <a:solidFill>
-                  <a:schemeClr val="tx1"/>
-                </a:solidFill>
-                <a:latin typeface="Helvetica" panose="020B0604020202020204" pitchFamily="34" charset="0"/>
-                <a:ea typeface="MS PGothic" panose="020B0600070205080204" pitchFamily="34" charset="-128"/>
-              </a:defRPr>
-            </a:lvl2pPr>
-            <a:lvl3pPr marL="1143000" indent="-228600" defTabSz="930275">
-              <a:defRPr sz="1600">
-                <a:solidFill>
-                  <a:schemeClr val="tx1"/>
-                </a:solidFill>
-                <a:latin typeface="Helvetica" panose="020B0604020202020204" pitchFamily="34" charset="0"/>
-                <a:ea typeface="MS PGothic" panose="020B0600070205080204" pitchFamily="34" charset="-128"/>
-              </a:defRPr>
-            </a:lvl3pPr>
-            <a:lvl4pPr marL="1600200" indent="-228600" defTabSz="930275">
-              <a:defRPr sz="1600">
-                <a:solidFill>
-                  <a:schemeClr val="tx1"/>
-                </a:solidFill>
-                <a:latin typeface="Helvetica" panose="020B0604020202020204" pitchFamily="34" charset="0"/>
-                <a:ea typeface="MS PGothic" panose="020B0600070205080204" pitchFamily="34" charset="-128"/>
-              </a:defRPr>
-            </a:lvl4pPr>
-            <a:lvl5pPr marL="2057400" indent="-228600" defTabSz="930275">
-              <a:defRPr sz="1600">
-                <a:solidFill>
-                  <a:schemeClr val="tx1"/>
-                </a:solidFill>
-                <a:latin typeface="Helvetica" panose="020B0604020202020204" pitchFamily="34" charset="0"/>
-                <a:ea typeface="MS PGothic" panose="020B0600070205080204" pitchFamily="34" charset="-128"/>
-              </a:defRPr>
-            </a:lvl5pPr>
-            <a:lvl6pPr marL="2514600" indent="-228600" defTabSz="930275" eaLnBrk="0" fontAlgn="base" hangingPunct="0">
-              <a:spcBef>
-                <a:spcPct val="0"/>
-              </a:spcBef>
-              <a:spcAft>
-                <a:spcPct val="0"/>
-              </a:spcAft>
-              <a:defRPr sz="1600">
-                <a:solidFill>
-                  <a:schemeClr val="tx1"/>
-                </a:solidFill>
-                <a:latin typeface="Helvetica" panose="020B0604020202020204" pitchFamily="34" charset="0"/>
-                <a:ea typeface="MS PGothic" panose="020B0600070205080204" pitchFamily="34" charset="-128"/>
-              </a:defRPr>
-            </a:lvl6pPr>
-            <a:lvl7pPr marL="2971800" indent="-228600" defTabSz="930275" eaLnBrk="0" fontAlgn="base" hangingPunct="0">
-              <a:spcBef>
-                <a:spcPct val="0"/>
-              </a:spcBef>
-              <a:spcAft>
-                <a:spcPct val="0"/>
-              </a:spcAft>
-              <a:defRPr sz="1600">
-                <a:solidFill>
-                  <a:schemeClr val="tx1"/>
-                </a:solidFill>
-                <a:latin typeface="Helvetica" panose="020B0604020202020204" pitchFamily="34" charset="0"/>
-                <a:ea typeface="MS PGothic" panose="020B0600070205080204" pitchFamily="34" charset="-128"/>
-              </a:defRPr>
-            </a:lvl7pPr>
-            <a:lvl8pPr marL="3429000" indent="-228600" defTabSz="930275" eaLnBrk="0" fontAlgn="base" hangingPunct="0">
-              <a:spcBef>
-                <a:spcPct val="0"/>
-              </a:spcBef>
-              <a:spcAft>
-                <a:spcPct val="0"/>
-              </a:spcAft>
-              <a:defRPr sz="1600">
-                <a:solidFill>
-                  <a:schemeClr val="tx1"/>
-                </a:solidFill>
-                <a:latin typeface="Helvetica" panose="020B0604020202020204" pitchFamily="34" charset="0"/>
-                <a:ea typeface="MS PGothic" panose="020B0600070205080204" pitchFamily="34" charset="-128"/>
-              </a:defRPr>
-            </a:lvl8pPr>
-            <a:lvl9pPr marL="3886200" indent="-228600" defTabSz="930275" eaLnBrk="0" fontAlgn="base" hangingPunct="0">
-              <a:spcBef>
-                <a:spcPct val="0"/>
-              </a:spcBef>
-              <a:spcAft>
-                <a:spcPct val="0"/>
-              </a:spcAft>
-              <a:defRPr sz="1600">
-                <a:solidFill>
-                  <a:schemeClr val="tx1"/>
-                </a:solidFill>
-                <a:latin typeface="Helvetica" panose="020B0604020202020204" pitchFamily="34" charset="0"/>
-                <a:ea typeface="MS PGothic" panose="020B0600070205080204" pitchFamily="34" charset="-128"/>
-              </a:defRPr>
-            </a:lvl9pPr>
-          </a:lstStyle>
-          <a:p>
-            <a:fld id="{09AF8D3E-D4BC-4C85-BC46-168123D4B1D3}" type="slidenum">
-              <a:rPr lang="en-US" altLang="en-US" sz="1300">
-                <a:latin typeface="Times New Roman" panose="02020603050405020304" pitchFamily="18" charset="0"/>
-              </a:rPr>
-              <a:pPr/>
-              <a:t>25</a:t>
-            </a:fld>
-            <a:endParaRPr lang="en-US" altLang="en-US" sz="1300">
-              <a:latin typeface="Times New Roman" panose="02020603050405020304" pitchFamily="18" charset="0"/>
-            </a:endParaRPr>
-          </a:p>
-        </p:txBody>
-      </p:sp>
-      <p:sp>
-        <p:nvSpPr>
-          <p:cNvPr id="68611" name="Rectangle 2"/>
-          <p:cNvSpPr>
-            <a:spLocks noGrp="1" noRot="1" noChangeAspect="1" noChangeArrowheads="1" noTextEdit="1"/>
-          </p:cNvSpPr>
-          <p:nvPr>
-            <p:ph type="sldImg"/>
-          </p:nvPr>
-        </p:nvSpPr>
-        <p:spPr>
-          <a:ln/>
-        </p:spPr>
-      </p:sp>
-      <p:sp>
-        <p:nvSpPr>
-          <p:cNvPr id="68612" name="Rectangle 3"/>
-          <p:cNvSpPr>
-            <a:spLocks noGrp="1" noChangeArrowheads="1"/>
-          </p:cNvSpPr>
-          <p:nvPr>
-            <p:ph type="body" idx="1"/>
-          </p:nvPr>
-        </p:nvSpPr>
-        <p:spPr>
-          <a:noFill/>
-          <a:ln/>
-          <a:extLst>
-            <a:ext uri="{909E8E84-426E-40DD-AFC4-6F175D3DCCD1}">
-              <a14:hiddenFill xmlns:a14="http://schemas.microsoft.com/office/drawing/2010/main">
-                <a:solidFill>
-                  <a:srgbClr val="FFFFFF"/>
-                </a:solidFill>
-              </a14:hiddenFill>
-            </a:ext>
-            <a:ext uri="{91240B29-F687-4F45-9708-019B960494DF}">
-              <a14:hiddenLine xmlns:a14="http://schemas.microsoft.com/office/drawing/2010/main" w="9525">
-                <a:solidFill>
-                  <a:srgbClr val="000000"/>
-                </a:solidFill>
-                <a:miter lim="800000"/>
-                <a:headEnd/>
-                <a:tailEnd/>
-              </a14:hiddenLine>
-            </a:ext>
-          </a:extLst>
-        </p:spPr>
-        <p:txBody>
-          <a:bodyPr/>
-          <a:lstStyle/>
-          <a:p>
-            <a:endParaRPr lang="en-US" altLang="en-US">
-              <a:latin typeface="Times New Roman" panose="02020603050405020304" pitchFamily="18" charset="0"/>
-            </a:endParaRPr>
-          </a:p>
-        </p:txBody>
-      </p:sp>
-    </p:spTree>
-  </p:cSld>
-  <p:clrMapOvr>
-    <a:masterClrMapping/>
-  </p:clrMapOvr>
-</p:notes>
-</file>
-
-<file path=ppt/notesSlides/notesSlide26.xml><?xml version="1.0" encoding="utf-8"?>
-<p:notes xmlns:a="http://schemas.openxmlformats.org/drawingml/2006/main" xmlns:r="http://schemas.openxmlformats.org/officeDocument/2006/relationships" xmlns:p="http://schemas.openxmlformats.org/presentationml/2006/main">
-  <p:cSld>
-    <p:spTree>
-      <p:nvGrpSpPr>
-        <p:cNvPr id="1" name=""/>
-        <p:cNvGrpSpPr/>
-        <p:nvPr/>
-      </p:nvGrpSpPr>
-      <p:grpSpPr>
-        <a:xfrm>
-          <a:off x="0" y="0"/>
-          <a:ext cx="0" cy="0"/>
-          <a:chOff x="0" y="0"/>
-          <a:chExt cx="0" cy="0"/>
-        </a:xfrm>
-      </p:grpSpPr>
-      <p:sp>
-        <p:nvSpPr>
-          <p:cNvPr id="69634" name="Rectangle 7"/>
-          <p:cNvSpPr>
-            <a:spLocks noGrp="1" noChangeArrowheads="1"/>
-          </p:cNvSpPr>
-          <p:nvPr>
-            <p:ph type="sldNum" sz="quarter" idx="5"/>
-          </p:nvPr>
-        </p:nvSpPr>
-        <p:spPr>
-          <a:noFill/>
-          <a:ln/>
-          <a:extLst>
-            <a:ext uri="{909E8E84-426E-40DD-AFC4-6F175D3DCCD1}">
-              <a14:hiddenFill xmlns:a14="http://schemas.microsoft.com/office/drawing/2010/main">
-                <a:solidFill>
-                  <a:srgbClr val="FFFFFF"/>
-                </a:solidFill>
-              </a14:hiddenFill>
-            </a:ext>
-            <a:ext uri="{91240B29-F687-4F45-9708-019B960494DF}">
-              <a14:hiddenLine xmlns:a14="http://schemas.microsoft.com/office/drawing/2010/main" w="9525">
-                <a:solidFill>
-                  <a:srgbClr val="000000"/>
-                </a:solidFill>
-                <a:miter lim="800000"/>
-                <a:headEnd/>
-                <a:tailEnd/>
-              </a14:hiddenLine>
-            </a:ext>
-          </a:extLst>
-        </p:spPr>
-        <p:txBody>
-          <a:bodyPr/>
-          <a:lstStyle>
-            <a:lvl1pPr defTabSz="930275">
-              <a:defRPr sz="1600">
-                <a:solidFill>
-                  <a:schemeClr val="tx1"/>
-                </a:solidFill>
-                <a:latin typeface="Helvetica" panose="020B0604020202020204" pitchFamily="34" charset="0"/>
-                <a:ea typeface="MS PGothic" panose="020B0600070205080204" pitchFamily="34" charset="-128"/>
-              </a:defRPr>
-            </a:lvl1pPr>
-            <a:lvl2pPr marL="742950" indent="-285750" defTabSz="930275">
-              <a:defRPr sz="1600">
-                <a:solidFill>
-                  <a:schemeClr val="tx1"/>
-                </a:solidFill>
-                <a:latin typeface="Helvetica" panose="020B0604020202020204" pitchFamily="34" charset="0"/>
-                <a:ea typeface="MS PGothic" panose="020B0600070205080204" pitchFamily="34" charset="-128"/>
-              </a:defRPr>
-            </a:lvl2pPr>
-            <a:lvl3pPr marL="1143000" indent="-228600" defTabSz="930275">
-              <a:defRPr sz="1600">
-                <a:solidFill>
-                  <a:schemeClr val="tx1"/>
-                </a:solidFill>
-                <a:latin typeface="Helvetica" panose="020B0604020202020204" pitchFamily="34" charset="0"/>
-                <a:ea typeface="MS PGothic" panose="020B0600070205080204" pitchFamily="34" charset="-128"/>
-              </a:defRPr>
-            </a:lvl3pPr>
-            <a:lvl4pPr marL="1600200" indent="-228600" defTabSz="930275">
-              <a:defRPr sz="1600">
-                <a:solidFill>
-                  <a:schemeClr val="tx1"/>
-                </a:solidFill>
-                <a:latin typeface="Helvetica" panose="020B0604020202020204" pitchFamily="34" charset="0"/>
-                <a:ea typeface="MS PGothic" panose="020B0600070205080204" pitchFamily="34" charset="-128"/>
-              </a:defRPr>
-            </a:lvl4pPr>
-            <a:lvl5pPr marL="2057400" indent="-228600" defTabSz="930275">
-              <a:defRPr sz="1600">
-                <a:solidFill>
-                  <a:schemeClr val="tx1"/>
-                </a:solidFill>
-                <a:latin typeface="Helvetica" panose="020B0604020202020204" pitchFamily="34" charset="0"/>
-                <a:ea typeface="MS PGothic" panose="020B0600070205080204" pitchFamily="34" charset="-128"/>
-              </a:defRPr>
-            </a:lvl5pPr>
-            <a:lvl6pPr marL="2514600" indent="-228600" defTabSz="930275" eaLnBrk="0" fontAlgn="base" hangingPunct="0">
-              <a:spcBef>
-                <a:spcPct val="0"/>
-              </a:spcBef>
-              <a:spcAft>
-                <a:spcPct val="0"/>
-              </a:spcAft>
-              <a:defRPr sz="1600">
-                <a:solidFill>
-                  <a:schemeClr val="tx1"/>
-                </a:solidFill>
-                <a:latin typeface="Helvetica" panose="020B0604020202020204" pitchFamily="34" charset="0"/>
-                <a:ea typeface="MS PGothic" panose="020B0600070205080204" pitchFamily="34" charset="-128"/>
-              </a:defRPr>
-            </a:lvl6pPr>
-            <a:lvl7pPr marL="2971800" indent="-228600" defTabSz="930275" eaLnBrk="0" fontAlgn="base" hangingPunct="0">
-              <a:spcBef>
-                <a:spcPct val="0"/>
-              </a:spcBef>
-              <a:spcAft>
-                <a:spcPct val="0"/>
-              </a:spcAft>
-              <a:defRPr sz="1600">
-                <a:solidFill>
-                  <a:schemeClr val="tx1"/>
-                </a:solidFill>
-                <a:latin typeface="Helvetica" panose="020B0604020202020204" pitchFamily="34" charset="0"/>
-                <a:ea typeface="MS PGothic" panose="020B0600070205080204" pitchFamily="34" charset="-128"/>
-              </a:defRPr>
-            </a:lvl7pPr>
-            <a:lvl8pPr marL="3429000" indent="-228600" defTabSz="930275" eaLnBrk="0" fontAlgn="base" hangingPunct="0">
-              <a:spcBef>
-                <a:spcPct val="0"/>
-              </a:spcBef>
-              <a:spcAft>
-                <a:spcPct val="0"/>
-              </a:spcAft>
-              <a:defRPr sz="1600">
-                <a:solidFill>
-                  <a:schemeClr val="tx1"/>
-                </a:solidFill>
-                <a:latin typeface="Helvetica" panose="020B0604020202020204" pitchFamily="34" charset="0"/>
-                <a:ea typeface="MS PGothic" panose="020B0600070205080204" pitchFamily="34" charset="-128"/>
-              </a:defRPr>
-            </a:lvl8pPr>
-            <a:lvl9pPr marL="3886200" indent="-228600" defTabSz="930275" eaLnBrk="0" fontAlgn="base" hangingPunct="0">
-              <a:spcBef>
-                <a:spcPct val="0"/>
-              </a:spcBef>
-              <a:spcAft>
-                <a:spcPct val="0"/>
-              </a:spcAft>
-              <a:defRPr sz="1600">
-                <a:solidFill>
-                  <a:schemeClr val="tx1"/>
-                </a:solidFill>
-                <a:latin typeface="Helvetica" panose="020B0604020202020204" pitchFamily="34" charset="0"/>
-                <a:ea typeface="MS PGothic" panose="020B0600070205080204" pitchFamily="34" charset="-128"/>
-              </a:defRPr>
-            </a:lvl9pPr>
-          </a:lstStyle>
-          <a:p>
-            <a:fld id="{2589F052-F191-428D-AF67-B65E8960DD5C}" type="slidenum">
-              <a:rPr lang="en-US" altLang="en-US" sz="1300">
-                <a:latin typeface="Times New Roman" panose="02020603050405020304" pitchFamily="18" charset="0"/>
-              </a:rPr>
-              <a:pPr/>
-              <a:t>26</a:t>
-            </a:fld>
-            <a:endParaRPr lang="en-US" altLang="en-US" sz="1300">
-              <a:latin typeface="Times New Roman" panose="02020603050405020304" pitchFamily="18" charset="0"/>
-            </a:endParaRPr>
-          </a:p>
-        </p:txBody>
-      </p:sp>
-      <p:sp>
-        <p:nvSpPr>
-          <p:cNvPr id="69635" name="Rectangle 2"/>
-          <p:cNvSpPr>
-            <a:spLocks noGrp="1" noRot="1" noChangeAspect="1" noChangeArrowheads="1" noTextEdit="1"/>
-          </p:cNvSpPr>
-          <p:nvPr>
-            <p:ph type="sldImg"/>
-          </p:nvPr>
-        </p:nvSpPr>
-        <p:spPr>
-          <a:ln/>
-        </p:spPr>
-      </p:sp>
-      <p:sp>
-        <p:nvSpPr>
-          <p:cNvPr id="69636" name="Rectangle 3"/>
-          <p:cNvSpPr>
-            <a:spLocks noGrp="1" noChangeArrowheads="1"/>
-          </p:cNvSpPr>
-          <p:nvPr>
-            <p:ph type="body" idx="1"/>
-          </p:nvPr>
-        </p:nvSpPr>
-        <p:spPr>
-          <a:noFill/>
-          <a:ln/>
-          <a:extLst>
-            <a:ext uri="{909E8E84-426E-40DD-AFC4-6F175D3DCCD1}">
-              <a14:hiddenFill xmlns:a14="http://schemas.microsoft.com/office/drawing/2010/main">
-                <a:solidFill>
-                  <a:srgbClr val="FFFFFF"/>
-                </a:solidFill>
-              </a14:hiddenFill>
-            </a:ext>
-            <a:ext uri="{91240B29-F687-4F45-9708-019B960494DF}">
-              <a14:hiddenLine xmlns:a14="http://schemas.microsoft.com/office/drawing/2010/main" w="9525">
-                <a:solidFill>
-                  <a:srgbClr val="000000"/>
-                </a:solidFill>
-                <a:miter lim="800000"/>
-                <a:headEnd/>
-                <a:tailEnd/>
-              </a14:hiddenLine>
-            </a:ext>
-          </a:extLst>
-        </p:spPr>
-        <p:txBody>
-          <a:bodyPr/>
-          <a:lstStyle/>
-          <a:p>
-            <a:endParaRPr lang="en-US" altLang="en-US">
-              <a:latin typeface="Times New Roman" panose="02020603050405020304" pitchFamily="18" charset="0"/>
-            </a:endParaRPr>
-          </a:p>
-        </p:txBody>
-      </p:sp>
-    </p:spTree>
-  </p:cSld>
-  <p:clrMapOvr>
-    <a:masterClrMapping/>
-  </p:clrMapOvr>
-</p:notes>
-</file>
-
-<file path=ppt/notesSlides/notesSlide27.xml><?xml version="1.0" encoding="utf-8"?>
-<p:notes xmlns:a="http://schemas.openxmlformats.org/drawingml/2006/main" xmlns:r="http://schemas.openxmlformats.org/officeDocument/2006/relationships" xmlns:p="http://schemas.openxmlformats.org/presentationml/2006/main">
-  <p:cSld>
-    <p:spTree>
-      <p:nvGrpSpPr>
-        <p:cNvPr id="1" name=""/>
-        <p:cNvGrpSpPr/>
-        <p:nvPr/>
-      </p:nvGrpSpPr>
-      <p:grpSpPr>
-        <a:xfrm>
-          <a:off x="0" y="0"/>
-          <a:ext cx="0" cy="0"/>
-          <a:chOff x="0" y="0"/>
-          <a:chExt cx="0" cy="0"/>
-        </a:xfrm>
-      </p:grpSpPr>
-      <p:sp>
-        <p:nvSpPr>
-          <p:cNvPr id="70658" name="Rectangle 7"/>
-          <p:cNvSpPr>
-            <a:spLocks noGrp="1" noChangeArrowheads="1"/>
-          </p:cNvSpPr>
-          <p:nvPr>
-            <p:ph type="sldNum" sz="quarter" idx="5"/>
-          </p:nvPr>
-        </p:nvSpPr>
-        <p:spPr>
-          <a:noFill/>
-          <a:ln/>
-          <a:extLst>
-            <a:ext uri="{909E8E84-426E-40DD-AFC4-6F175D3DCCD1}">
-              <a14:hiddenFill xmlns:a14="http://schemas.microsoft.com/office/drawing/2010/main">
-                <a:solidFill>
-                  <a:srgbClr val="FFFFFF"/>
-                </a:solidFill>
-              </a14:hiddenFill>
-            </a:ext>
-            <a:ext uri="{91240B29-F687-4F45-9708-019B960494DF}">
-              <a14:hiddenLine xmlns:a14="http://schemas.microsoft.com/office/drawing/2010/main" w="9525">
-                <a:solidFill>
-                  <a:srgbClr val="000000"/>
-                </a:solidFill>
-                <a:miter lim="800000"/>
-                <a:headEnd/>
-                <a:tailEnd/>
-              </a14:hiddenLine>
-            </a:ext>
-          </a:extLst>
-        </p:spPr>
-        <p:txBody>
-          <a:bodyPr/>
-          <a:lstStyle>
-            <a:lvl1pPr defTabSz="930275">
-              <a:defRPr sz="1600">
-                <a:solidFill>
-                  <a:schemeClr val="tx1"/>
-                </a:solidFill>
-                <a:latin typeface="Helvetica" panose="020B0604020202020204" pitchFamily="34" charset="0"/>
-                <a:ea typeface="MS PGothic" panose="020B0600070205080204" pitchFamily="34" charset="-128"/>
-              </a:defRPr>
-            </a:lvl1pPr>
-            <a:lvl2pPr marL="742950" indent="-285750" defTabSz="930275">
-              <a:defRPr sz="1600">
-                <a:solidFill>
-                  <a:schemeClr val="tx1"/>
-                </a:solidFill>
-                <a:latin typeface="Helvetica" panose="020B0604020202020204" pitchFamily="34" charset="0"/>
-                <a:ea typeface="MS PGothic" panose="020B0600070205080204" pitchFamily="34" charset="-128"/>
-              </a:defRPr>
-            </a:lvl2pPr>
-            <a:lvl3pPr marL="1143000" indent="-228600" defTabSz="930275">
-              <a:defRPr sz="1600">
-                <a:solidFill>
-                  <a:schemeClr val="tx1"/>
-                </a:solidFill>
-                <a:latin typeface="Helvetica" panose="020B0604020202020204" pitchFamily="34" charset="0"/>
-                <a:ea typeface="MS PGothic" panose="020B0600070205080204" pitchFamily="34" charset="-128"/>
-              </a:defRPr>
-            </a:lvl3pPr>
-            <a:lvl4pPr marL="1600200" indent="-228600" defTabSz="930275">
-              <a:defRPr sz="1600">
-                <a:solidFill>
-                  <a:schemeClr val="tx1"/>
-                </a:solidFill>
-                <a:latin typeface="Helvetica" panose="020B0604020202020204" pitchFamily="34" charset="0"/>
-                <a:ea typeface="MS PGothic" panose="020B0600070205080204" pitchFamily="34" charset="-128"/>
-              </a:defRPr>
-            </a:lvl4pPr>
-            <a:lvl5pPr marL="2057400" indent="-228600" defTabSz="930275">
-              <a:defRPr sz="1600">
-                <a:solidFill>
-                  <a:schemeClr val="tx1"/>
-                </a:solidFill>
-                <a:latin typeface="Helvetica" panose="020B0604020202020204" pitchFamily="34" charset="0"/>
-                <a:ea typeface="MS PGothic" panose="020B0600070205080204" pitchFamily="34" charset="-128"/>
-              </a:defRPr>
-            </a:lvl5pPr>
-            <a:lvl6pPr marL="2514600" indent="-228600" defTabSz="930275" eaLnBrk="0" fontAlgn="base" hangingPunct="0">
-              <a:spcBef>
-                <a:spcPct val="0"/>
-              </a:spcBef>
-              <a:spcAft>
-                <a:spcPct val="0"/>
-              </a:spcAft>
-              <a:defRPr sz="1600">
-                <a:solidFill>
-                  <a:schemeClr val="tx1"/>
-                </a:solidFill>
-                <a:latin typeface="Helvetica" panose="020B0604020202020204" pitchFamily="34" charset="0"/>
-                <a:ea typeface="MS PGothic" panose="020B0600070205080204" pitchFamily="34" charset="-128"/>
-              </a:defRPr>
-            </a:lvl6pPr>
-            <a:lvl7pPr marL="2971800" indent="-228600" defTabSz="930275" eaLnBrk="0" fontAlgn="base" hangingPunct="0">
-              <a:spcBef>
-                <a:spcPct val="0"/>
-              </a:spcBef>
-              <a:spcAft>
-                <a:spcPct val="0"/>
-              </a:spcAft>
-              <a:defRPr sz="1600">
-                <a:solidFill>
-                  <a:schemeClr val="tx1"/>
-                </a:solidFill>
-                <a:latin typeface="Helvetica" panose="020B0604020202020204" pitchFamily="34" charset="0"/>
-                <a:ea typeface="MS PGothic" panose="020B0600070205080204" pitchFamily="34" charset="-128"/>
-              </a:defRPr>
-            </a:lvl7pPr>
-            <a:lvl8pPr marL="3429000" indent="-228600" defTabSz="930275" eaLnBrk="0" fontAlgn="base" hangingPunct="0">
-              <a:spcBef>
-                <a:spcPct val="0"/>
-              </a:spcBef>
-              <a:spcAft>
-                <a:spcPct val="0"/>
-              </a:spcAft>
-              <a:defRPr sz="1600">
-                <a:solidFill>
-                  <a:schemeClr val="tx1"/>
-                </a:solidFill>
-                <a:latin typeface="Helvetica" panose="020B0604020202020204" pitchFamily="34" charset="0"/>
-                <a:ea typeface="MS PGothic" panose="020B0600070205080204" pitchFamily="34" charset="-128"/>
-              </a:defRPr>
-            </a:lvl8pPr>
-            <a:lvl9pPr marL="3886200" indent="-228600" defTabSz="930275" eaLnBrk="0" fontAlgn="base" hangingPunct="0">
-              <a:spcBef>
-                <a:spcPct val="0"/>
-              </a:spcBef>
-              <a:spcAft>
-                <a:spcPct val="0"/>
-              </a:spcAft>
-              <a:defRPr sz="1600">
-                <a:solidFill>
-                  <a:schemeClr val="tx1"/>
-                </a:solidFill>
-                <a:latin typeface="Helvetica" panose="020B0604020202020204" pitchFamily="34" charset="0"/>
-                <a:ea typeface="MS PGothic" panose="020B0600070205080204" pitchFamily="34" charset="-128"/>
-              </a:defRPr>
-            </a:lvl9pPr>
-          </a:lstStyle>
-          <a:p>
-            <a:fld id="{9DD8D6FB-95B3-4852-BB48-80936A26FC18}" type="slidenum">
-              <a:rPr lang="en-US" altLang="en-US" sz="1300">
-                <a:latin typeface="Times New Roman" panose="02020603050405020304" pitchFamily="18" charset="0"/>
-              </a:rPr>
-              <a:pPr/>
-              <a:t>27</a:t>
-            </a:fld>
-            <a:endParaRPr lang="en-US" altLang="en-US" sz="1300">
-              <a:latin typeface="Times New Roman" panose="02020603050405020304" pitchFamily="18" charset="0"/>
-            </a:endParaRPr>
-          </a:p>
-        </p:txBody>
-      </p:sp>
-      <p:sp>
-        <p:nvSpPr>
-          <p:cNvPr id="70659" name="Rectangle 2"/>
-          <p:cNvSpPr>
-            <a:spLocks noGrp="1" noRot="1" noChangeAspect="1" noChangeArrowheads="1" noTextEdit="1"/>
-          </p:cNvSpPr>
-          <p:nvPr>
-            <p:ph type="sldImg"/>
-          </p:nvPr>
-        </p:nvSpPr>
-        <p:spPr>
-          <a:ln/>
-        </p:spPr>
-      </p:sp>
-      <p:sp>
-        <p:nvSpPr>
-          <p:cNvPr id="70660" name="Rectangle 3"/>
-          <p:cNvSpPr>
-            <a:spLocks noGrp="1" noChangeArrowheads="1"/>
-          </p:cNvSpPr>
-          <p:nvPr>
-            <p:ph type="body" idx="1"/>
-          </p:nvPr>
-        </p:nvSpPr>
-        <p:spPr>
-          <a:noFill/>
-          <a:ln/>
-          <a:extLst>
-            <a:ext uri="{909E8E84-426E-40DD-AFC4-6F175D3DCCD1}">
-              <a14:hiddenFill xmlns:a14="http://schemas.microsoft.com/office/drawing/2010/main">
-                <a:solidFill>
-                  <a:srgbClr val="FFFFFF"/>
-                </a:solidFill>
-              </a14:hiddenFill>
-            </a:ext>
-            <a:ext uri="{91240B29-F687-4F45-9708-019B960494DF}">
-              <a14:hiddenLine xmlns:a14="http://schemas.microsoft.com/office/drawing/2010/main" w="9525">
-                <a:solidFill>
-                  <a:srgbClr val="000000"/>
-                </a:solidFill>
-                <a:miter lim="800000"/>
-                <a:headEnd/>
-                <a:tailEnd/>
-              </a14:hiddenLine>
-            </a:ext>
-          </a:extLst>
-        </p:spPr>
-        <p:txBody>
-          <a:bodyPr/>
-          <a:lstStyle/>
-          <a:p>
-            <a:endParaRPr lang="en-US" altLang="en-US">
-              <a:latin typeface="Times New Roman" panose="02020603050405020304" pitchFamily="18" charset="0"/>
-            </a:endParaRPr>
-          </a:p>
-        </p:txBody>
-      </p:sp>
-    </p:spTree>
-  </p:cSld>
-  <p:clrMapOvr>
-    <a:masterClrMapping/>
-  </p:clrMapOvr>
-</p:notes>
-</file>
-
-<file path=ppt/notesSlides/notesSlide28.xml><?xml version="1.0" encoding="utf-8"?>
 <p:notes xmlns:a="http://schemas.openxmlformats.org/drawingml/2006/main" xmlns:r="http://schemas.openxmlformats.org/officeDocument/2006/relationships" xmlns:p="http://schemas.openxmlformats.org/presentationml/2006/main">
   <p:cSld>
     <p:spTree>
@@ -5814,7 +5189,7 @@
                 <a:latin typeface="Times New Roman" panose="02020603050405020304" pitchFamily="18" charset="0"/>
               </a:rPr>
               <a:pPr/>
-              <a:t>28</a:t>
+              <a:t>25</a:t>
             </a:fld>
             <a:endParaRPr lang="en-US" altLang="en-US" sz="1300">
               <a:latin typeface="Times New Roman" panose="02020603050405020304" pitchFamily="18" charset="0"/>
@@ -5880,6 +5255,11 @@
         </p:txBody>
       </p:sp>
     </p:spTree>
+    <p:extLst>
+      <p:ext uri="{BB962C8B-B14F-4D97-AF65-F5344CB8AC3E}">
+        <p14:creationId xmlns:p14="http://schemas.microsoft.com/office/powerpoint/2010/main" val="3776842989"/>
+      </p:ext>
+    </p:extLst>
   </p:cSld>
   <p:clrMapOvr>
     <a:masterClrMapping/>
@@ -5887,7 +5267,7 @@
 </p:notes>
 </file>
 
-<file path=ppt/notesSlides/notesSlide29.xml><?xml version="1.0" encoding="utf-8"?>
+<file path=ppt/notesSlides/notesSlide26.xml><?xml version="1.0" encoding="utf-8"?>
 <p:notes xmlns:a="http://schemas.openxmlformats.org/drawingml/2006/main" xmlns:r="http://schemas.openxmlformats.org/officeDocument/2006/relationships" xmlns:p="http://schemas.openxmlformats.org/presentationml/2006/main">
   <p:cSld>
     <p:spTree>
@@ -6052,7 +5432,7 @@
                 <a:latin typeface="Times New Roman" panose="02020603050405020304" pitchFamily="18" charset="0"/>
               </a:rPr>
               <a:pPr/>
-              <a:t>29</a:t>
+              <a:t>26</a:t>
             </a:fld>
             <a:endParaRPr lang="en-US" altLang="en-US" sz="1300">
               <a:latin typeface="Times New Roman" panose="02020603050405020304" pitchFamily="18" charset="0"/>
@@ -6118,6 +5498,740 @@
         </p:txBody>
       </p:sp>
     </p:spTree>
+    <p:extLst>
+      <p:ext uri="{BB962C8B-B14F-4D97-AF65-F5344CB8AC3E}">
+        <p14:creationId xmlns:p14="http://schemas.microsoft.com/office/powerpoint/2010/main" val="396474623"/>
+      </p:ext>
+    </p:extLst>
+  </p:cSld>
+  <p:clrMapOvr>
+    <a:masterClrMapping/>
+  </p:clrMapOvr>
+</p:notes>
+</file>
+
+<file path=ppt/notesSlides/notesSlide27.xml><?xml version="1.0" encoding="utf-8"?>
+<p:notes xmlns:a="http://schemas.openxmlformats.org/drawingml/2006/main" xmlns:r="http://schemas.openxmlformats.org/officeDocument/2006/relationships" xmlns:p="http://schemas.openxmlformats.org/presentationml/2006/main">
+  <p:cSld>
+    <p:spTree>
+      <p:nvGrpSpPr>
+        <p:cNvPr id="1" name=""/>
+        <p:cNvGrpSpPr/>
+        <p:nvPr/>
+      </p:nvGrpSpPr>
+      <p:grpSpPr>
+        <a:xfrm>
+          <a:off x="0" y="0"/>
+          <a:ext cx="0" cy="0"/>
+          <a:chOff x="0" y="0"/>
+          <a:chExt cx="0" cy="0"/>
+        </a:xfrm>
+      </p:grpSpPr>
+      <p:sp>
+        <p:nvSpPr>
+          <p:cNvPr id="73730" name="Rectangle 7"/>
+          <p:cNvSpPr>
+            <a:spLocks noGrp="1" noChangeArrowheads="1"/>
+          </p:cNvSpPr>
+          <p:nvPr>
+            <p:ph type="sldNum" sz="quarter" idx="5"/>
+          </p:nvPr>
+        </p:nvSpPr>
+        <p:spPr>
+          <a:noFill/>
+          <a:ln/>
+          <a:extLst>
+            <a:ext uri="{909E8E84-426E-40DD-AFC4-6F175D3DCCD1}">
+              <a14:hiddenFill xmlns:a14="http://schemas.microsoft.com/office/drawing/2010/main">
+                <a:solidFill>
+                  <a:srgbClr val="FFFFFF"/>
+                </a:solidFill>
+              </a14:hiddenFill>
+            </a:ext>
+            <a:ext uri="{91240B29-F687-4F45-9708-019B960494DF}">
+              <a14:hiddenLine xmlns:a14="http://schemas.microsoft.com/office/drawing/2010/main" w="9525">
+                <a:solidFill>
+                  <a:srgbClr val="000000"/>
+                </a:solidFill>
+                <a:miter lim="800000"/>
+                <a:headEnd/>
+                <a:tailEnd/>
+              </a14:hiddenLine>
+            </a:ext>
+          </a:extLst>
+        </p:spPr>
+        <p:txBody>
+          <a:bodyPr/>
+          <a:lstStyle>
+            <a:lvl1pPr defTabSz="930275">
+              <a:defRPr sz="1600">
+                <a:solidFill>
+                  <a:schemeClr val="tx1"/>
+                </a:solidFill>
+                <a:latin typeface="Helvetica" panose="020B0604020202020204" pitchFamily="34" charset="0"/>
+                <a:ea typeface="MS PGothic" panose="020B0600070205080204" pitchFamily="34" charset="-128"/>
+              </a:defRPr>
+            </a:lvl1pPr>
+            <a:lvl2pPr marL="742950" indent="-285750" defTabSz="930275">
+              <a:defRPr sz="1600">
+                <a:solidFill>
+                  <a:schemeClr val="tx1"/>
+                </a:solidFill>
+                <a:latin typeface="Helvetica" panose="020B0604020202020204" pitchFamily="34" charset="0"/>
+                <a:ea typeface="MS PGothic" panose="020B0600070205080204" pitchFamily="34" charset="-128"/>
+              </a:defRPr>
+            </a:lvl2pPr>
+            <a:lvl3pPr marL="1143000" indent="-228600" defTabSz="930275">
+              <a:defRPr sz="1600">
+                <a:solidFill>
+                  <a:schemeClr val="tx1"/>
+                </a:solidFill>
+                <a:latin typeface="Helvetica" panose="020B0604020202020204" pitchFamily="34" charset="0"/>
+                <a:ea typeface="MS PGothic" panose="020B0600070205080204" pitchFamily="34" charset="-128"/>
+              </a:defRPr>
+            </a:lvl3pPr>
+            <a:lvl4pPr marL="1600200" indent="-228600" defTabSz="930275">
+              <a:defRPr sz="1600">
+                <a:solidFill>
+                  <a:schemeClr val="tx1"/>
+                </a:solidFill>
+                <a:latin typeface="Helvetica" panose="020B0604020202020204" pitchFamily="34" charset="0"/>
+                <a:ea typeface="MS PGothic" panose="020B0600070205080204" pitchFamily="34" charset="-128"/>
+              </a:defRPr>
+            </a:lvl4pPr>
+            <a:lvl5pPr marL="2057400" indent="-228600" defTabSz="930275">
+              <a:defRPr sz="1600">
+                <a:solidFill>
+                  <a:schemeClr val="tx1"/>
+                </a:solidFill>
+                <a:latin typeface="Helvetica" panose="020B0604020202020204" pitchFamily="34" charset="0"/>
+                <a:ea typeface="MS PGothic" panose="020B0600070205080204" pitchFamily="34" charset="-128"/>
+              </a:defRPr>
+            </a:lvl5pPr>
+            <a:lvl6pPr marL="2514600" indent="-228600" defTabSz="930275" eaLnBrk="0" fontAlgn="base" hangingPunct="0">
+              <a:spcBef>
+                <a:spcPct val="0"/>
+              </a:spcBef>
+              <a:spcAft>
+                <a:spcPct val="0"/>
+              </a:spcAft>
+              <a:defRPr sz="1600">
+                <a:solidFill>
+                  <a:schemeClr val="tx1"/>
+                </a:solidFill>
+                <a:latin typeface="Helvetica" panose="020B0604020202020204" pitchFamily="34" charset="0"/>
+                <a:ea typeface="MS PGothic" panose="020B0600070205080204" pitchFamily="34" charset="-128"/>
+              </a:defRPr>
+            </a:lvl6pPr>
+            <a:lvl7pPr marL="2971800" indent="-228600" defTabSz="930275" eaLnBrk="0" fontAlgn="base" hangingPunct="0">
+              <a:spcBef>
+                <a:spcPct val="0"/>
+              </a:spcBef>
+              <a:spcAft>
+                <a:spcPct val="0"/>
+              </a:spcAft>
+              <a:defRPr sz="1600">
+                <a:solidFill>
+                  <a:schemeClr val="tx1"/>
+                </a:solidFill>
+                <a:latin typeface="Helvetica" panose="020B0604020202020204" pitchFamily="34" charset="0"/>
+                <a:ea typeface="MS PGothic" panose="020B0600070205080204" pitchFamily="34" charset="-128"/>
+              </a:defRPr>
+            </a:lvl7pPr>
+            <a:lvl8pPr marL="3429000" indent="-228600" defTabSz="930275" eaLnBrk="0" fontAlgn="base" hangingPunct="0">
+              <a:spcBef>
+                <a:spcPct val="0"/>
+              </a:spcBef>
+              <a:spcAft>
+                <a:spcPct val="0"/>
+              </a:spcAft>
+              <a:defRPr sz="1600">
+                <a:solidFill>
+                  <a:schemeClr val="tx1"/>
+                </a:solidFill>
+                <a:latin typeface="Helvetica" panose="020B0604020202020204" pitchFamily="34" charset="0"/>
+                <a:ea typeface="MS PGothic" panose="020B0600070205080204" pitchFamily="34" charset="-128"/>
+              </a:defRPr>
+            </a:lvl8pPr>
+            <a:lvl9pPr marL="3886200" indent="-228600" defTabSz="930275" eaLnBrk="0" fontAlgn="base" hangingPunct="0">
+              <a:spcBef>
+                <a:spcPct val="0"/>
+              </a:spcBef>
+              <a:spcAft>
+                <a:spcPct val="0"/>
+              </a:spcAft>
+              <a:defRPr sz="1600">
+                <a:solidFill>
+                  <a:schemeClr val="tx1"/>
+                </a:solidFill>
+                <a:latin typeface="Helvetica" panose="020B0604020202020204" pitchFamily="34" charset="0"/>
+                <a:ea typeface="MS PGothic" panose="020B0600070205080204" pitchFamily="34" charset="-128"/>
+              </a:defRPr>
+            </a:lvl9pPr>
+          </a:lstStyle>
+          <a:p>
+            <a:fld id="{18F6C2F6-402D-422C-BB49-ADCD5F850701}" type="slidenum">
+              <a:rPr lang="en-US" altLang="en-US" sz="1300">
+                <a:latin typeface="Times New Roman" panose="02020603050405020304" pitchFamily="18" charset="0"/>
+              </a:rPr>
+              <a:pPr/>
+              <a:t>27</a:t>
+            </a:fld>
+            <a:endParaRPr lang="en-US" altLang="en-US" sz="1300">
+              <a:latin typeface="Times New Roman" panose="02020603050405020304" pitchFamily="18" charset="0"/>
+            </a:endParaRPr>
+          </a:p>
+        </p:txBody>
+      </p:sp>
+      <p:sp>
+        <p:nvSpPr>
+          <p:cNvPr id="73731" name="Rectangle 2"/>
+          <p:cNvSpPr>
+            <a:spLocks noGrp="1" noRot="1" noChangeAspect="1" noChangeArrowheads="1" noTextEdit="1"/>
+          </p:cNvSpPr>
+          <p:nvPr>
+            <p:ph type="sldImg"/>
+          </p:nvPr>
+        </p:nvSpPr>
+        <p:spPr>
+          <a:ln/>
+        </p:spPr>
+      </p:sp>
+      <p:sp>
+        <p:nvSpPr>
+          <p:cNvPr id="73732" name="Rectangle 3"/>
+          <p:cNvSpPr>
+            <a:spLocks noGrp="1" noChangeArrowheads="1"/>
+          </p:cNvSpPr>
+          <p:nvPr>
+            <p:ph type="body" idx="1"/>
+          </p:nvPr>
+        </p:nvSpPr>
+        <p:spPr>
+          <a:noFill/>
+          <a:ln/>
+          <a:extLst>
+            <a:ext uri="{909E8E84-426E-40DD-AFC4-6F175D3DCCD1}">
+              <a14:hiddenFill xmlns:a14="http://schemas.microsoft.com/office/drawing/2010/main">
+                <a:solidFill>
+                  <a:srgbClr val="FFFFFF"/>
+                </a:solidFill>
+              </a14:hiddenFill>
+            </a:ext>
+            <a:ext uri="{91240B29-F687-4F45-9708-019B960494DF}">
+              <a14:hiddenLine xmlns:a14="http://schemas.microsoft.com/office/drawing/2010/main" w="9525">
+                <a:solidFill>
+                  <a:srgbClr val="000000"/>
+                </a:solidFill>
+                <a:miter lim="800000"/>
+                <a:headEnd/>
+                <a:tailEnd/>
+              </a14:hiddenLine>
+            </a:ext>
+          </a:extLst>
+        </p:spPr>
+        <p:txBody>
+          <a:bodyPr/>
+          <a:lstStyle/>
+          <a:p>
+            <a:endParaRPr lang="en-US" altLang="en-US">
+              <a:latin typeface="Times New Roman" panose="02020603050405020304" pitchFamily="18" charset="0"/>
+            </a:endParaRPr>
+          </a:p>
+        </p:txBody>
+      </p:sp>
+    </p:spTree>
+    <p:extLst>
+      <p:ext uri="{BB962C8B-B14F-4D97-AF65-F5344CB8AC3E}">
+        <p14:creationId xmlns:p14="http://schemas.microsoft.com/office/powerpoint/2010/main" val="2588732606"/>
+      </p:ext>
+    </p:extLst>
+  </p:cSld>
+  <p:clrMapOvr>
+    <a:masterClrMapping/>
+  </p:clrMapOvr>
+</p:notes>
+</file>
+
+<file path=ppt/notesSlides/notesSlide28.xml><?xml version="1.0" encoding="utf-8"?>
+<p:notes xmlns:a="http://schemas.openxmlformats.org/drawingml/2006/main" xmlns:r="http://schemas.openxmlformats.org/officeDocument/2006/relationships" xmlns:p="http://schemas.openxmlformats.org/presentationml/2006/main">
+  <p:cSld>
+    <p:spTree>
+      <p:nvGrpSpPr>
+        <p:cNvPr id="1" name=""/>
+        <p:cNvGrpSpPr/>
+        <p:nvPr/>
+      </p:nvGrpSpPr>
+      <p:grpSpPr>
+        <a:xfrm>
+          <a:off x="0" y="0"/>
+          <a:ext cx="0" cy="0"/>
+          <a:chOff x="0" y="0"/>
+          <a:chExt cx="0" cy="0"/>
+        </a:xfrm>
+      </p:grpSpPr>
+      <p:sp>
+        <p:nvSpPr>
+          <p:cNvPr id="74754" name="Rectangle 7"/>
+          <p:cNvSpPr>
+            <a:spLocks noGrp="1" noChangeArrowheads="1"/>
+          </p:cNvSpPr>
+          <p:nvPr>
+            <p:ph type="sldNum" sz="quarter" idx="5"/>
+          </p:nvPr>
+        </p:nvSpPr>
+        <p:spPr>
+          <a:noFill/>
+          <a:ln/>
+          <a:extLst>
+            <a:ext uri="{909E8E84-426E-40DD-AFC4-6F175D3DCCD1}">
+              <a14:hiddenFill xmlns:a14="http://schemas.microsoft.com/office/drawing/2010/main">
+                <a:solidFill>
+                  <a:srgbClr val="FFFFFF"/>
+                </a:solidFill>
+              </a14:hiddenFill>
+            </a:ext>
+            <a:ext uri="{91240B29-F687-4F45-9708-019B960494DF}">
+              <a14:hiddenLine xmlns:a14="http://schemas.microsoft.com/office/drawing/2010/main" w="9525">
+                <a:solidFill>
+                  <a:srgbClr val="000000"/>
+                </a:solidFill>
+                <a:miter lim="800000"/>
+                <a:headEnd/>
+                <a:tailEnd/>
+              </a14:hiddenLine>
+            </a:ext>
+          </a:extLst>
+        </p:spPr>
+        <p:txBody>
+          <a:bodyPr/>
+          <a:lstStyle>
+            <a:lvl1pPr defTabSz="930275">
+              <a:defRPr sz="1600">
+                <a:solidFill>
+                  <a:schemeClr val="tx1"/>
+                </a:solidFill>
+                <a:latin typeface="Helvetica" panose="020B0604020202020204" pitchFamily="34" charset="0"/>
+                <a:ea typeface="MS PGothic" panose="020B0600070205080204" pitchFamily="34" charset="-128"/>
+              </a:defRPr>
+            </a:lvl1pPr>
+            <a:lvl2pPr marL="742950" indent="-285750" defTabSz="930275">
+              <a:defRPr sz="1600">
+                <a:solidFill>
+                  <a:schemeClr val="tx1"/>
+                </a:solidFill>
+                <a:latin typeface="Helvetica" panose="020B0604020202020204" pitchFamily="34" charset="0"/>
+                <a:ea typeface="MS PGothic" panose="020B0600070205080204" pitchFamily="34" charset="-128"/>
+              </a:defRPr>
+            </a:lvl2pPr>
+            <a:lvl3pPr marL="1143000" indent="-228600" defTabSz="930275">
+              <a:defRPr sz="1600">
+                <a:solidFill>
+                  <a:schemeClr val="tx1"/>
+                </a:solidFill>
+                <a:latin typeface="Helvetica" panose="020B0604020202020204" pitchFamily="34" charset="0"/>
+                <a:ea typeface="MS PGothic" panose="020B0600070205080204" pitchFamily="34" charset="-128"/>
+              </a:defRPr>
+            </a:lvl3pPr>
+            <a:lvl4pPr marL="1600200" indent="-228600" defTabSz="930275">
+              <a:defRPr sz="1600">
+                <a:solidFill>
+                  <a:schemeClr val="tx1"/>
+                </a:solidFill>
+                <a:latin typeface="Helvetica" panose="020B0604020202020204" pitchFamily="34" charset="0"/>
+                <a:ea typeface="MS PGothic" panose="020B0600070205080204" pitchFamily="34" charset="-128"/>
+              </a:defRPr>
+            </a:lvl4pPr>
+            <a:lvl5pPr marL="2057400" indent="-228600" defTabSz="930275">
+              <a:defRPr sz="1600">
+                <a:solidFill>
+                  <a:schemeClr val="tx1"/>
+                </a:solidFill>
+                <a:latin typeface="Helvetica" panose="020B0604020202020204" pitchFamily="34" charset="0"/>
+                <a:ea typeface="MS PGothic" panose="020B0600070205080204" pitchFamily="34" charset="-128"/>
+              </a:defRPr>
+            </a:lvl5pPr>
+            <a:lvl6pPr marL="2514600" indent="-228600" defTabSz="930275" eaLnBrk="0" fontAlgn="base" hangingPunct="0">
+              <a:spcBef>
+                <a:spcPct val="0"/>
+              </a:spcBef>
+              <a:spcAft>
+                <a:spcPct val="0"/>
+              </a:spcAft>
+              <a:defRPr sz="1600">
+                <a:solidFill>
+                  <a:schemeClr val="tx1"/>
+                </a:solidFill>
+                <a:latin typeface="Helvetica" panose="020B0604020202020204" pitchFamily="34" charset="0"/>
+                <a:ea typeface="MS PGothic" panose="020B0600070205080204" pitchFamily="34" charset="-128"/>
+              </a:defRPr>
+            </a:lvl6pPr>
+            <a:lvl7pPr marL="2971800" indent="-228600" defTabSz="930275" eaLnBrk="0" fontAlgn="base" hangingPunct="0">
+              <a:spcBef>
+                <a:spcPct val="0"/>
+              </a:spcBef>
+              <a:spcAft>
+                <a:spcPct val="0"/>
+              </a:spcAft>
+              <a:defRPr sz="1600">
+                <a:solidFill>
+                  <a:schemeClr val="tx1"/>
+                </a:solidFill>
+                <a:latin typeface="Helvetica" panose="020B0604020202020204" pitchFamily="34" charset="0"/>
+                <a:ea typeface="MS PGothic" panose="020B0600070205080204" pitchFamily="34" charset="-128"/>
+              </a:defRPr>
+            </a:lvl7pPr>
+            <a:lvl8pPr marL="3429000" indent="-228600" defTabSz="930275" eaLnBrk="0" fontAlgn="base" hangingPunct="0">
+              <a:spcBef>
+                <a:spcPct val="0"/>
+              </a:spcBef>
+              <a:spcAft>
+                <a:spcPct val="0"/>
+              </a:spcAft>
+              <a:defRPr sz="1600">
+                <a:solidFill>
+                  <a:schemeClr val="tx1"/>
+                </a:solidFill>
+                <a:latin typeface="Helvetica" panose="020B0604020202020204" pitchFamily="34" charset="0"/>
+                <a:ea typeface="MS PGothic" panose="020B0600070205080204" pitchFamily="34" charset="-128"/>
+              </a:defRPr>
+            </a:lvl8pPr>
+            <a:lvl9pPr marL="3886200" indent="-228600" defTabSz="930275" eaLnBrk="0" fontAlgn="base" hangingPunct="0">
+              <a:spcBef>
+                <a:spcPct val="0"/>
+              </a:spcBef>
+              <a:spcAft>
+                <a:spcPct val="0"/>
+              </a:spcAft>
+              <a:defRPr sz="1600">
+                <a:solidFill>
+                  <a:schemeClr val="tx1"/>
+                </a:solidFill>
+                <a:latin typeface="Helvetica" panose="020B0604020202020204" pitchFamily="34" charset="0"/>
+                <a:ea typeface="MS PGothic" panose="020B0600070205080204" pitchFamily="34" charset="-128"/>
+              </a:defRPr>
+            </a:lvl9pPr>
+          </a:lstStyle>
+          <a:p>
+            <a:fld id="{E6C7905A-2CC2-4593-BC50-F4A9103CA5F9}" type="slidenum">
+              <a:rPr lang="en-US" altLang="en-US" sz="1300">
+                <a:latin typeface="Times New Roman" panose="02020603050405020304" pitchFamily="18" charset="0"/>
+              </a:rPr>
+              <a:pPr/>
+              <a:t>28</a:t>
+            </a:fld>
+            <a:endParaRPr lang="en-US" altLang="en-US" sz="1300">
+              <a:latin typeface="Times New Roman" panose="02020603050405020304" pitchFamily="18" charset="0"/>
+            </a:endParaRPr>
+          </a:p>
+        </p:txBody>
+      </p:sp>
+      <p:sp>
+        <p:nvSpPr>
+          <p:cNvPr id="74755" name="Rectangle 2"/>
+          <p:cNvSpPr>
+            <a:spLocks noGrp="1" noRot="1" noChangeAspect="1" noChangeArrowheads="1" noTextEdit="1"/>
+          </p:cNvSpPr>
+          <p:nvPr>
+            <p:ph type="sldImg"/>
+          </p:nvPr>
+        </p:nvSpPr>
+        <p:spPr>
+          <a:ln/>
+        </p:spPr>
+      </p:sp>
+      <p:sp>
+        <p:nvSpPr>
+          <p:cNvPr id="74756" name="Rectangle 3"/>
+          <p:cNvSpPr>
+            <a:spLocks noGrp="1" noChangeArrowheads="1"/>
+          </p:cNvSpPr>
+          <p:nvPr>
+            <p:ph type="body" idx="1"/>
+          </p:nvPr>
+        </p:nvSpPr>
+        <p:spPr>
+          <a:noFill/>
+          <a:ln/>
+          <a:extLst>
+            <a:ext uri="{909E8E84-426E-40DD-AFC4-6F175D3DCCD1}">
+              <a14:hiddenFill xmlns:a14="http://schemas.microsoft.com/office/drawing/2010/main">
+                <a:solidFill>
+                  <a:srgbClr val="FFFFFF"/>
+                </a:solidFill>
+              </a14:hiddenFill>
+            </a:ext>
+            <a:ext uri="{91240B29-F687-4F45-9708-019B960494DF}">
+              <a14:hiddenLine xmlns:a14="http://schemas.microsoft.com/office/drawing/2010/main" w="9525">
+                <a:solidFill>
+                  <a:srgbClr val="000000"/>
+                </a:solidFill>
+                <a:miter lim="800000"/>
+                <a:headEnd/>
+                <a:tailEnd/>
+              </a14:hiddenLine>
+            </a:ext>
+          </a:extLst>
+        </p:spPr>
+        <p:txBody>
+          <a:bodyPr/>
+          <a:lstStyle/>
+          <a:p>
+            <a:endParaRPr lang="en-US" altLang="en-US">
+              <a:latin typeface="Times New Roman" panose="02020603050405020304" pitchFamily="18" charset="0"/>
+            </a:endParaRPr>
+          </a:p>
+        </p:txBody>
+      </p:sp>
+    </p:spTree>
+    <p:extLst>
+      <p:ext uri="{BB962C8B-B14F-4D97-AF65-F5344CB8AC3E}">
+        <p14:creationId xmlns:p14="http://schemas.microsoft.com/office/powerpoint/2010/main" val="2355499925"/>
+      </p:ext>
+    </p:extLst>
+  </p:cSld>
+  <p:clrMapOvr>
+    <a:masterClrMapping/>
+  </p:clrMapOvr>
+</p:notes>
+</file>
+
+<file path=ppt/notesSlides/notesSlide29.xml><?xml version="1.0" encoding="utf-8"?>
+<p:notes xmlns:a="http://schemas.openxmlformats.org/drawingml/2006/main" xmlns:r="http://schemas.openxmlformats.org/officeDocument/2006/relationships" xmlns:p="http://schemas.openxmlformats.org/presentationml/2006/main">
+  <p:cSld>
+    <p:spTree>
+      <p:nvGrpSpPr>
+        <p:cNvPr id="1" name=""/>
+        <p:cNvGrpSpPr/>
+        <p:nvPr/>
+      </p:nvGrpSpPr>
+      <p:grpSpPr>
+        <a:xfrm>
+          <a:off x="0" y="0"/>
+          <a:ext cx="0" cy="0"/>
+          <a:chOff x="0" y="0"/>
+          <a:chExt cx="0" cy="0"/>
+        </a:xfrm>
+      </p:grpSpPr>
+      <p:sp>
+        <p:nvSpPr>
+          <p:cNvPr id="75778" name="Rectangle 7"/>
+          <p:cNvSpPr>
+            <a:spLocks noGrp="1" noChangeArrowheads="1"/>
+          </p:cNvSpPr>
+          <p:nvPr>
+            <p:ph type="sldNum" sz="quarter" idx="5"/>
+          </p:nvPr>
+        </p:nvSpPr>
+        <p:spPr>
+          <a:noFill/>
+          <a:ln/>
+          <a:extLst>
+            <a:ext uri="{909E8E84-426E-40DD-AFC4-6F175D3DCCD1}">
+              <a14:hiddenFill xmlns:a14="http://schemas.microsoft.com/office/drawing/2010/main">
+                <a:solidFill>
+                  <a:srgbClr val="FFFFFF"/>
+                </a:solidFill>
+              </a14:hiddenFill>
+            </a:ext>
+            <a:ext uri="{91240B29-F687-4F45-9708-019B960494DF}">
+              <a14:hiddenLine xmlns:a14="http://schemas.microsoft.com/office/drawing/2010/main" w="9525">
+                <a:solidFill>
+                  <a:srgbClr val="000000"/>
+                </a:solidFill>
+                <a:miter lim="800000"/>
+                <a:headEnd/>
+                <a:tailEnd/>
+              </a14:hiddenLine>
+            </a:ext>
+          </a:extLst>
+        </p:spPr>
+        <p:txBody>
+          <a:bodyPr/>
+          <a:lstStyle>
+            <a:lvl1pPr defTabSz="930275">
+              <a:defRPr sz="1600">
+                <a:solidFill>
+                  <a:schemeClr val="tx1"/>
+                </a:solidFill>
+                <a:latin typeface="Helvetica" panose="020B0604020202020204" pitchFamily="34" charset="0"/>
+                <a:ea typeface="MS PGothic" panose="020B0600070205080204" pitchFamily="34" charset="-128"/>
+              </a:defRPr>
+            </a:lvl1pPr>
+            <a:lvl2pPr marL="742950" indent="-285750" defTabSz="930275">
+              <a:defRPr sz="1600">
+                <a:solidFill>
+                  <a:schemeClr val="tx1"/>
+                </a:solidFill>
+                <a:latin typeface="Helvetica" panose="020B0604020202020204" pitchFamily="34" charset="0"/>
+                <a:ea typeface="MS PGothic" panose="020B0600070205080204" pitchFamily="34" charset="-128"/>
+              </a:defRPr>
+            </a:lvl2pPr>
+            <a:lvl3pPr marL="1143000" indent="-228600" defTabSz="930275">
+              <a:defRPr sz="1600">
+                <a:solidFill>
+                  <a:schemeClr val="tx1"/>
+                </a:solidFill>
+                <a:latin typeface="Helvetica" panose="020B0604020202020204" pitchFamily="34" charset="0"/>
+                <a:ea typeface="MS PGothic" panose="020B0600070205080204" pitchFamily="34" charset="-128"/>
+              </a:defRPr>
+            </a:lvl3pPr>
+            <a:lvl4pPr marL="1600200" indent="-228600" defTabSz="930275">
+              <a:defRPr sz="1600">
+                <a:solidFill>
+                  <a:schemeClr val="tx1"/>
+                </a:solidFill>
+                <a:latin typeface="Helvetica" panose="020B0604020202020204" pitchFamily="34" charset="0"/>
+                <a:ea typeface="MS PGothic" panose="020B0600070205080204" pitchFamily="34" charset="-128"/>
+              </a:defRPr>
+            </a:lvl4pPr>
+            <a:lvl5pPr marL="2057400" indent="-228600" defTabSz="930275">
+              <a:defRPr sz="1600">
+                <a:solidFill>
+                  <a:schemeClr val="tx1"/>
+                </a:solidFill>
+                <a:latin typeface="Helvetica" panose="020B0604020202020204" pitchFamily="34" charset="0"/>
+                <a:ea typeface="MS PGothic" panose="020B0600070205080204" pitchFamily="34" charset="-128"/>
+              </a:defRPr>
+            </a:lvl5pPr>
+            <a:lvl6pPr marL="2514600" indent="-228600" defTabSz="930275" eaLnBrk="0" fontAlgn="base" hangingPunct="0">
+              <a:spcBef>
+                <a:spcPct val="0"/>
+              </a:spcBef>
+              <a:spcAft>
+                <a:spcPct val="0"/>
+              </a:spcAft>
+              <a:defRPr sz="1600">
+                <a:solidFill>
+                  <a:schemeClr val="tx1"/>
+                </a:solidFill>
+                <a:latin typeface="Helvetica" panose="020B0604020202020204" pitchFamily="34" charset="0"/>
+                <a:ea typeface="MS PGothic" panose="020B0600070205080204" pitchFamily="34" charset="-128"/>
+              </a:defRPr>
+            </a:lvl6pPr>
+            <a:lvl7pPr marL="2971800" indent="-228600" defTabSz="930275" eaLnBrk="0" fontAlgn="base" hangingPunct="0">
+              <a:spcBef>
+                <a:spcPct val="0"/>
+              </a:spcBef>
+              <a:spcAft>
+                <a:spcPct val="0"/>
+              </a:spcAft>
+              <a:defRPr sz="1600">
+                <a:solidFill>
+                  <a:schemeClr val="tx1"/>
+                </a:solidFill>
+                <a:latin typeface="Helvetica" panose="020B0604020202020204" pitchFamily="34" charset="0"/>
+                <a:ea typeface="MS PGothic" panose="020B0600070205080204" pitchFamily="34" charset="-128"/>
+              </a:defRPr>
+            </a:lvl7pPr>
+            <a:lvl8pPr marL="3429000" indent="-228600" defTabSz="930275" eaLnBrk="0" fontAlgn="base" hangingPunct="0">
+              <a:spcBef>
+                <a:spcPct val="0"/>
+              </a:spcBef>
+              <a:spcAft>
+                <a:spcPct val="0"/>
+              </a:spcAft>
+              <a:defRPr sz="1600">
+                <a:solidFill>
+                  <a:schemeClr val="tx1"/>
+                </a:solidFill>
+                <a:latin typeface="Helvetica" panose="020B0604020202020204" pitchFamily="34" charset="0"/>
+                <a:ea typeface="MS PGothic" panose="020B0600070205080204" pitchFamily="34" charset="-128"/>
+              </a:defRPr>
+            </a:lvl8pPr>
+            <a:lvl9pPr marL="3886200" indent="-228600" defTabSz="930275" eaLnBrk="0" fontAlgn="base" hangingPunct="0">
+              <a:spcBef>
+                <a:spcPct val="0"/>
+              </a:spcBef>
+              <a:spcAft>
+                <a:spcPct val="0"/>
+              </a:spcAft>
+              <a:defRPr sz="1600">
+                <a:solidFill>
+                  <a:schemeClr val="tx1"/>
+                </a:solidFill>
+                <a:latin typeface="Helvetica" panose="020B0604020202020204" pitchFamily="34" charset="0"/>
+                <a:ea typeface="MS PGothic" panose="020B0600070205080204" pitchFamily="34" charset="-128"/>
+              </a:defRPr>
+            </a:lvl9pPr>
+          </a:lstStyle>
+          <a:p>
+            <a:fld id="{DB47C592-32BF-47BB-9678-D5FB42722EAA}" type="slidenum">
+              <a:rPr lang="en-US" altLang="en-US" sz="1300">
+                <a:latin typeface="Times New Roman" panose="02020603050405020304" pitchFamily="18" charset="0"/>
+              </a:rPr>
+              <a:pPr/>
+              <a:t>29</a:t>
+            </a:fld>
+            <a:endParaRPr lang="en-US" altLang="en-US" sz="1300">
+              <a:latin typeface="Times New Roman" panose="02020603050405020304" pitchFamily="18" charset="0"/>
+            </a:endParaRPr>
+          </a:p>
+        </p:txBody>
+      </p:sp>
+      <p:sp>
+        <p:nvSpPr>
+          <p:cNvPr id="75779" name="Rectangle 2"/>
+          <p:cNvSpPr>
+            <a:spLocks noGrp="1" noRot="1" noChangeAspect="1" noChangeArrowheads="1" noTextEdit="1"/>
+          </p:cNvSpPr>
+          <p:nvPr>
+            <p:ph type="sldImg"/>
+          </p:nvPr>
+        </p:nvSpPr>
+        <p:spPr>
+          <a:ln/>
+        </p:spPr>
+      </p:sp>
+      <p:sp>
+        <p:nvSpPr>
+          <p:cNvPr id="75780" name="Rectangle 3"/>
+          <p:cNvSpPr>
+            <a:spLocks noGrp="1" noChangeArrowheads="1"/>
+          </p:cNvSpPr>
+          <p:nvPr>
+            <p:ph type="body" idx="1"/>
+          </p:nvPr>
+        </p:nvSpPr>
+        <p:spPr>
+          <a:noFill/>
+          <a:ln/>
+          <a:extLst>
+            <a:ext uri="{909E8E84-426E-40DD-AFC4-6F175D3DCCD1}">
+              <a14:hiddenFill xmlns:a14="http://schemas.microsoft.com/office/drawing/2010/main">
+                <a:solidFill>
+                  <a:srgbClr val="FFFFFF"/>
+                </a:solidFill>
+              </a14:hiddenFill>
+            </a:ext>
+            <a:ext uri="{91240B29-F687-4F45-9708-019B960494DF}">
+              <a14:hiddenLine xmlns:a14="http://schemas.microsoft.com/office/drawing/2010/main" w="9525">
+                <a:solidFill>
+                  <a:srgbClr val="000000"/>
+                </a:solidFill>
+                <a:miter lim="800000"/>
+                <a:headEnd/>
+                <a:tailEnd/>
+              </a14:hiddenLine>
+            </a:ext>
+          </a:extLst>
+        </p:spPr>
+        <p:txBody>
+          <a:bodyPr/>
+          <a:lstStyle/>
+          <a:p>
+            <a:endParaRPr lang="en-US" altLang="en-US">
+              <a:latin typeface="Times New Roman" panose="02020603050405020304" pitchFamily="18" charset="0"/>
+            </a:endParaRPr>
+          </a:p>
+        </p:txBody>
+      </p:sp>
+    </p:spTree>
+    <p:extLst>
+      <p:ext uri="{BB962C8B-B14F-4D97-AF65-F5344CB8AC3E}">
+        <p14:creationId xmlns:p14="http://schemas.microsoft.com/office/powerpoint/2010/main" val="1929176043"/>
+      </p:ext>
+    </p:extLst>
   </p:cSld>
   <p:clrMapOvr>
     <a:masterClrMapping/>
@@ -6356,6 +6470,11 @@
         </p:txBody>
       </p:sp>
     </p:spTree>
+    <p:extLst>
+      <p:ext uri="{BB962C8B-B14F-4D97-AF65-F5344CB8AC3E}">
+        <p14:creationId xmlns:p14="http://schemas.microsoft.com/office/powerpoint/2010/main" val="244310355"/>
+      </p:ext>
+    </p:extLst>
   </p:cSld>
   <p:clrMapOvr>
     <a:masterClrMapping/>
@@ -6364,958 +6483,6 @@
 </file>
 
 <file path=ppt/notesSlides/notesSlide30.xml><?xml version="1.0" encoding="utf-8"?>
-<p:notes xmlns:a="http://schemas.openxmlformats.org/drawingml/2006/main" xmlns:r="http://schemas.openxmlformats.org/officeDocument/2006/relationships" xmlns:p="http://schemas.openxmlformats.org/presentationml/2006/main">
-  <p:cSld>
-    <p:spTree>
-      <p:nvGrpSpPr>
-        <p:cNvPr id="1" name=""/>
-        <p:cNvGrpSpPr/>
-        <p:nvPr/>
-      </p:nvGrpSpPr>
-      <p:grpSpPr>
-        <a:xfrm>
-          <a:off x="0" y="0"/>
-          <a:ext cx="0" cy="0"/>
-          <a:chOff x="0" y="0"/>
-          <a:chExt cx="0" cy="0"/>
-        </a:xfrm>
-      </p:grpSpPr>
-      <p:sp>
-        <p:nvSpPr>
-          <p:cNvPr id="73730" name="Rectangle 7"/>
-          <p:cNvSpPr>
-            <a:spLocks noGrp="1" noChangeArrowheads="1"/>
-          </p:cNvSpPr>
-          <p:nvPr>
-            <p:ph type="sldNum" sz="quarter" idx="5"/>
-          </p:nvPr>
-        </p:nvSpPr>
-        <p:spPr>
-          <a:noFill/>
-          <a:ln/>
-          <a:extLst>
-            <a:ext uri="{909E8E84-426E-40DD-AFC4-6F175D3DCCD1}">
-              <a14:hiddenFill xmlns:a14="http://schemas.microsoft.com/office/drawing/2010/main">
-                <a:solidFill>
-                  <a:srgbClr val="FFFFFF"/>
-                </a:solidFill>
-              </a14:hiddenFill>
-            </a:ext>
-            <a:ext uri="{91240B29-F687-4F45-9708-019B960494DF}">
-              <a14:hiddenLine xmlns:a14="http://schemas.microsoft.com/office/drawing/2010/main" w="9525">
-                <a:solidFill>
-                  <a:srgbClr val="000000"/>
-                </a:solidFill>
-                <a:miter lim="800000"/>
-                <a:headEnd/>
-                <a:tailEnd/>
-              </a14:hiddenLine>
-            </a:ext>
-          </a:extLst>
-        </p:spPr>
-        <p:txBody>
-          <a:bodyPr/>
-          <a:lstStyle>
-            <a:lvl1pPr defTabSz="930275">
-              <a:defRPr sz="1600">
-                <a:solidFill>
-                  <a:schemeClr val="tx1"/>
-                </a:solidFill>
-                <a:latin typeface="Helvetica" panose="020B0604020202020204" pitchFamily="34" charset="0"/>
-                <a:ea typeface="MS PGothic" panose="020B0600070205080204" pitchFamily="34" charset="-128"/>
-              </a:defRPr>
-            </a:lvl1pPr>
-            <a:lvl2pPr marL="742950" indent="-285750" defTabSz="930275">
-              <a:defRPr sz="1600">
-                <a:solidFill>
-                  <a:schemeClr val="tx1"/>
-                </a:solidFill>
-                <a:latin typeface="Helvetica" panose="020B0604020202020204" pitchFamily="34" charset="0"/>
-                <a:ea typeface="MS PGothic" panose="020B0600070205080204" pitchFamily="34" charset="-128"/>
-              </a:defRPr>
-            </a:lvl2pPr>
-            <a:lvl3pPr marL="1143000" indent="-228600" defTabSz="930275">
-              <a:defRPr sz="1600">
-                <a:solidFill>
-                  <a:schemeClr val="tx1"/>
-                </a:solidFill>
-                <a:latin typeface="Helvetica" panose="020B0604020202020204" pitchFamily="34" charset="0"/>
-                <a:ea typeface="MS PGothic" panose="020B0600070205080204" pitchFamily="34" charset="-128"/>
-              </a:defRPr>
-            </a:lvl3pPr>
-            <a:lvl4pPr marL="1600200" indent="-228600" defTabSz="930275">
-              <a:defRPr sz="1600">
-                <a:solidFill>
-                  <a:schemeClr val="tx1"/>
-                </a:solidFill>
-                <a:latin typeface="Helvetica" panose="020B0604020202020204" pitchFamily="34" charset="0"/>
-                <a:ea typeface="MS PGothic" panose="020B0600070205080204" pitchFamily="34" charset="-128"/>
-              </a:defRPr>
-            </a:lvl4pPr>
-            <a:lvl5pPr marL="2057400" indent="-228600" defTabSz="930275">
-              <a:defRPr sz="1600">
-                <a:solidFill>
-                  <a:schemeClr val="tx1"/>
-                </a:solidFill>
-                <a:latin typeface="Helvetica" panose="020B0604020202020204" pitchFamily="34" charset="0"/>
-                <a:ea typeface="MS PGothic" panose="020B0600070205080204" pitchFamily="34" charset="-128"/>
-              </a:defRPr>
-            </a:lvl5pPr>
-            <a:lvl6pPr marL="2514600" indent="-228600" defTabSz="930275" eaLnBrk="0" fontAlgn="base" hangingPunct="0">
-              <a:spcBef>
-                <a:spcPct val="0"/>
-              </a:spcBef>
-              <a:spcAft>
-                <a:spcPct val="0"/>
-              </a:spcAft>
-              <a:defRPr sz="1600">
-                <a:solidFill>
-                  <a:schemeClr val="tx1"/>
-                </a:solidFill>
-                <a:latin typeface="Helvetica" panose="020B0604020202020204" pitchFamily="34" charset="0"/>
-                <a:ea typeface="MS PGothic" panose="020B0600070205080204" pitchFamily="34" charset="-128"/>
-              </a:defRPr>
-            </a:lvl6pPr>
-            <a:lvl7pPr marL="2971800" indent="-228600" defTabSz="930275" eaLnBrk="0" fontAlgn="base" hangingPunct="0">
-              <a:spcBef>
-                <a:spcPct val="0"/>
-              </a:spcBef>
-              <a:spcAft>
-                <a:spcPct val="0"/>
-              </a:spcAft>
-              <a:defRPr sz="1600">
-                <a:solidFill>
-                  <a:schemeClr val="tx1"/>
-                </a:solidFill>
-                <a:latin typeface="Helvetica" panose="020B0604020202020204" pitchFamily="34" charset="0"/>
-                <a:ea typeface="MS PGothic" panose="020B0600070205080204" pitchFamily="34" charset="-128"/>
-              </a:defRPr>
-            </a:lvl7pPr>
-            <a:lvl8pPr marL="3429000" indent="-228600" defTabSz="930275" eaLnBrk="0" fontAlgn="base" hangingPunct="0">
-              <a:spcBef>
-                <a:spcPct val="0"/>
-              </a:spcBef>
-              <a:spcAft>
-                <a:spcPct val="0"/>
-              </a:spcAft>
-              <a:defRPr sz="1600">
-                <a:solidFill>
-                  <a:schemeClr val="tx1"/>
-                </a:solidFill>
-                <a:latin typeface="Helvetica" panose="020B0604020202020204" pitchFamily="34" charset="0"/>
-                <a:ea typeface="MS PGothic" panose="020B0600070205080204" pitchFamily="34" charset="-128"/>
-              </a:defRPr>
-            </a:lvl8pPr>
-            <a:lvl9pPr marL="3886200" indent="-228600" defTabSz="930275" eaLnBrk="0" fontAlgn="base" hangingPunct="0">
-              <a:spcBef>
-                <a:spcPct val="0"/>
-              </a:spcBef>
-              <a:spcAft>
-                <a:spcPct val="0"/>
-              </a:spcAft>
-              <a:defRPr sz="1600">
-                <a:solidFill>
-                  <a:schemeClr val="tx1"/>
-                </a:solidFill>
-                <a:latin typeface="Helvetica" panose="020B0604020202020204" pitchFamily="34" charset="0"/>
-                <a:ea typeface="MS PGothic" panose="020B0600070205080204" pitchFamily="34" charset="-128"/>
-              </a:defRPr>
-            </a:lvl9pPr>
-          </a:lstStyle>
-          <a:p>
-            <a:fld id="{18F6C2F6-402D-422C-BB49-ADCD5F850701}" type="slidenum">
-              <a:rPr lang="en-US" altLang="en-US" sz="1300">
-                <a:latin typeface="Times New Roman" panose="02020603050405020304" pitchFamily="18" charset="0"/>
-              </a:rPr>
-              <a:pPr/>
-              <a:t>30</a:t>
-            </a:fld>
-            <a:endParaRPr lang="en-US" altLang="en-US" sz="1300">
-              <a:latin typeface="Times New Roman" panose="02020603050405020304" pitchFamily="18" charset="0"/>
-            </a:endParaRPr>
-          </a:p>
-        </p:txBody>
-      </p:sp>
-      <p:sp>
-        <p:nvSpPr>
-          <p:cNvPr id="73731" name="Rectangle 2"/>
-          <p:cNvSpPr>
-            <a:spLocks noGrp="1" noRot="1" noChangeAspect="1" noChangeArrowheads="1" noTextEdit="1"/>
-          </p:cNvSpPr>
-          <p:nvPr>
-            <p:ph type="sldImg"/>
-          </p:nvPr>
-        </p:nvSpPr>
-        <p:spPr>
-          <a:ln/>
-        </p:spPr>
-      </p:sp>
-      <p:sp>
-        <p:nvSpPr>
-          <p:cNvPr id="73732" name="Rectangle 3"/>
-          <p:cNvSpPr>
-            <a:spLocks noGrp="1" noChangeArrowheads="1"/>
-          </p:cNvSpPr>
-          <p:nvPr>
-            <p:ph type="body" idx="1"/>
-          </p:nvPr>
-        </p:nvSpPr>
-        <p:spPr>
-          <a:noFill/>
-          <a:ln/>
-          <a:extLst>
-            <a:ext uri="{909E8E84-426E-40DD-AFC4-6F175D3DCCD1}">
-              <a14:hiddenFill xmlns:a14="http://schemas.microsoft.com/office/drawing/2010/main">
-                <a:solidFill>
-                  <a:srgbClr val="FFFFFF"/>
-                </a:solidFill>
-              </a14:hiddenFill>
-            </a:ext>
-            <a:ext uri="{91240B29-F687-4F45-9708-019B960494DF}">
-              <a14:hiddenLine xmlns:a14="http://schemas.microsoft.com/office/drawing/2010/main" w="9525">
-                <a:solidFill>
-                  <a:srgbClr val="000000"/>
-                </a:solidFill>
-                <a:miter lim="800000"/>
-                <a:headEnd/>
-                <a:tailEnd/>
-              </a14:hiddenLine>
-            </a:ext>
-          </a:extLst>
-        </p:spPr>
-        <p:txBody>
-          <a:bodyPr/>
-          <a:lstStyle/>
-          <a:p>
-            <a:endParaRPr lang="en-US" altLang="en-US">
-              <a:latin typeface="Times New Roman" panose="02020603050405020304" pitchFamily="18" charset="0"/>
-            </a:endParaRPr>
-          </a:p>
-        </p:txBody>
-      </p:sp>
-    </p:spTree>
-  </p:cSld>
-  <p:clrMapOvr>
-    <a:masterClrMapping/>
-  </p:clrMapOvr>
-</p:notes>
-</file>
-
-<file path=ppt/notesSlides/notesSlide31.xml><?xml version="1.0" encoding="utf-8"?>
-<p:notes xmlns:a="http://schemas.openxmlformats.org/drawingml/2006/main" xmlns:r="http://schemas.openxmlformats.org/officeDocument/2006/relationships" xmlns:p="http://schemas.openxmlformats.org/presentationml/2006/main">
-  <p:cSld>
-    <p:spTree>
-      <p:nvGrpSpPr>
-        <p:cNvPr id="1" name=""/>
-        <p:cNvGrpSpPr/>
-        <p:nvPr/>
-      </p:nvGrpSpPr>
-      <p:grpSpPr>
-        <a:xfrm>
-          <a:off x="0" y="0"/>
-          <a:ext cx="0" cy="0"/>
-          <a:chOff x="0" y="0"/>
-          <a:chExt cx="0" cy="0"/>
-        </a:xfrm>
-      </p:grpSpPr>
-      <p:sp>
-        <p:nvSpPr>
-          <p:cNvPr id="74754" name="Rectangle 7"/>
-          <p:cNvSpPr>
-            <a:spLocks noGrp="1" noChangeArrowheads="1"/>
-          </p:cNvSpPr>
-          <p:nvPr>
-            <p:ph type="sldNum" sz="quarter" idx="5"/>
-          </p:nvPr>
-        </p:nvSpPr>
-        <p:spPr>
-          <a:noFill/>
-          <a:ln/>
-          <a:extLst>
-            <a:ext uri="{909E8E84-426E-40DD-AFC4-6F175D3DCCD1}">
-              <a14:hiddenFill xmlns:a14="http://schemas.microsoft.com/office/drawing/2010/main">
-                <a:solidFill>
-                  <a:srgbClr val="FFFFFF"/>
-                </a:solidFill>
-              </a14:hiddenFill>
-            </a:ext>
-            <a:ext uri="{91240B29-F687-4F45-9708-019B960494DF}">
-              <a14:hiddenLine xmlns:a14="http://schemas.microsoft.com/office/drawing/2010/main" w="9525">
-                <a:solidFill>
-                  <a:srgbClr val="000000"/>
-                </a:solidFill>
-                <a:miter lim="800000"/>
-                <a:headEnd/>
-                <a:tailEnd/>
-              </a14:hiddenLine>
-            </a:ext>
-          </a:extLst>
-        </p:spPr>
-        <p:txBody>
-          <a:bodyPr/>
-          <a:lstStyle>
-            <a:lvl1pPr defTabSz="930275">
-              <a:defRPr sz="1600">
-                <a:solidFill>
-                  <a:schemeClr val="tx1"/>
-                </a:solidFill>
-                <a:latin typeface="Helvetica" panose="020B0604020202020204" pitchFamily="34" charset="0"/>
-                <a:ea typeface="MS PGothic" panose="020B0600070205080204" pitchFamily="34" charset="-128"/>
-              </a:defRPr>
-            </a:lvl1pPr>
-            <a:lvl2pPr marL="742950" indent="-285750" defTabSz="930275">
-              <a:defRPr sz="1600">
-                <a:solidFill>
-                  <a:schemeClr val="tx1"/>
-                </a:solidFill>
-                <a:latin typeface="Helvetica" panose="020B0604020202020204" pitchFamily="34" charset="0"/>
-                <a:ea typeface="MS PGothic" panose="020B0600070205080204" pitchFamily="34" charset="-128"/>
-              </a:defRPr>
-            </a:lvl2pPr>
-            <a:lvl3pPr marL="1143000" indent="-228600" defTabSz="930275">
-              <a:defRPr sz="1600">
-                <a:solidFill>
-                  <a:schemeClr val="tx1"/>
-                </a:solidFill>
-                <a:latin typeface="Helvetica" panose="020B0604020202020204" pitchFamily="34" charset="0"/>
-                <a:ea typeface="MS PGothic" panose="020B0600070205080204" pitchFamily="34" charset="-128"/>
-              </a:defRPr>
-            </a:lvl3pPr>
-            <a:lvl4pPr marL="1600200" indent="-228600" defTabSz="930275">
-              <a:defRPr sz="1600">
-                <a:solidFill>
-                  <a:schemeClr val="tx1"/>
-                </a:solidFill>
-                <a:latin typeface="Helvetica" panose="020B0604020202020204" pitchFamily="34" charset="0"/>
-                <a:ea typeface="MS PGothic" panose="020B0600070205080204" pitchFamily="34" charset="-128"/>
-              </a:defRPr>
-            </a:lvl4pPr>
-            <a:lvl5pPr marL="2057400" indent="-228600" defTabSz="930275">
-              <a:defRPr sz="1600">
-                <a:solidFill>
-                  <a:schemeClr val="tx1"/>
-                </a:solidFill>
-                <a:latin typeface="Helvetica" panose="020B0604020202020204" pitchFamily="34" charset="0"/>
-                <a:ea typeface="MS PGothic" panose="020B0600070205080204" pitchFamily="34" charset="-128"/>
-              </a:defRPr>
-            </a:lvl5pPr>
-            <a:lvl6pPr marL="2514600" indent="-228600" defTabSz="930275" eaLnBrk="0" fontAlgn="base" hangingPunct="0">
-              <a:spcBef>
-                <a:spcPct val="0"/>
-              </a:spcBef>
-              <a:spcAft>
-                <a:spcPct val="0"/>
-              </a:spcAft>
-              <a:defRPr sz="1600">
-                <a:solidFill>
-                  <a:schemeClr val="tx1"/>
-                </a:solidFill>
-                <a:latin typeface="Helvetica" panose="020B0604020202020204" pitchFamily="34" charset="0"/>
-                <a:ea typeface="MS PGothic" panose="020B0600070205080204" pitchFamily="34" charset="-128"/>
-              </a:defRPr>
-            </a:lvl6pPr>
-            <a:lvl7pPr marL="2971800" indent="-228600" defTabSz="930275" eaLnBrk="0" fontAlgn="base" hangingPunct="0">
-              <a:spcBef>
-                <a:spcPct val="0"/>
-              </a:spcBef>
-              <a:spcAft>
-                <a:spcPct val="0"/>
-              </a:spcAft>
-              <a:defRPr sz="1600">
-                <a:solidFill>
-                  <a:schemeClr val="tx1"/>
-                </a:solidFill>
-                <a:latin typeface="Helvetica" panose="020B0604020202020204" pitchFamily="34" charset="0"/>
-                <a:ea typeface="MS PGothic" panose="020B0600070205080204" pitchFamily="34" charset="-128"/>
-              </a:defRPr>
-            </a:lvl7pPr>
-            <a:lvl8pPr marL="3429000" indent="-228600" defTabSz="930275" eaLnBrk="0" fontAlgn="base" hangingPunct="0">
-              <a:spcBef>
-                <a:spcPct val="0"/>
-              </a:spcBef>
-              <a:spcAft>
-                <a:spcPct val="0"/>
-              </a:spcAft>
-              <a:defRPr sz="1600">
-                <a:solidFill>
-                  <a:schemeClr val="tx1"/>
-                </a:solidFill>
-                <a:latin typeface="Helvetica" panose="020B0604020202020204" pitchFamily="34" charset="0"/>
-                <a:ea typeface="MS PGothic" panose="020B0600070205080204" pitchFamily="34" charset="-128"/>
-              </a:defRPr>
-            </a:lvl8pPr>
-            <a:lvl9pPr marL="3886200" indent="-228600" defTabSz="930275" eaLnBrk="0" fontAlgn="base" hangingPunct="0">
-              <a:spcBef>
-                <a:spcPct val="0"/>
-              </a:spcBef>
-              <a:spcAft>
-                <a:spcPct val="0"/>
-              </a:spcAft>
-              <a:defRPr sz="1600">
-                <a:solidFill>
-                  <a:schemeClr val="tx1"/>
-                </a:solidFill>
-                <a:latin typeface="Helvetica" panose="020B0604020202020204" pitchFamily="34" charset="0"/>
-                <a:ea typeface="MS PGothic" panose="020B0600070205080204" pitchFamily="34" charset="-128"/>
-              </a:defRPr>
-            </a:lvl9pPr>
-          </a:lstStyle>
-          <a:p>
-            <a:fld id="{E6C7905A-2CC2-4593-BC50-F4A9103CA5F9}" type="slidenum">
-              <a:rPr lang="en-US" altLang="en-US" sz="1300">
-                <a:latin typeface="Times New Roman" panose="02020603050405020304" pitchFamily="18" charset="0"/>
-              </a:rPr>
-              <a:pPr/>
-              <a:t>31</a:t>
-            </a:fld>
-            <a:endParaRPr lang="en-US" altLang="en-US" sz="1300">
-              <a:latin typeface="Times New Roman" panose="02020603050405020304" pitchFamily="18" charset="0"/>
-            </a:endParaRPr>
-          </a:p>
-        </p:txBody>
-      </p:sp>
-      <p:sp>
-        <p:nvSpPr>
-          <p:cNvPr id="74755" name="Rectangle 2"/>
-          <p:cNvSpPr>
-            <a:spLocks noGrp="1" noRot="1" noChangeAspect="1" noChangeArrowheads="1" noTextEdit="1"/>
-          </p:cNvSpPr>
-          <p:nvPr>
-            <p:ph type="sldImg"/>
-          </p:nvPr>
-        </p:nvSpPr>
-        <p:spPr>
-          <a:ln/>
-        </p:spPr>
-      </p:sp>
-      <p:sp>
-        <p:nvSpPr>
-          <p:cNvPr id="74756" name="Rectangle 3"/>
-          <p:cNvSpPr>
-            <a:spLocks noGrp="1" noChangeArrowheads="1"/>
-          </p:cNvSpPr>
-          <p:nvPr>
-            <p:ph type="body" idx="1"/>
-          </p:nvPr>
-        </p:nvSpPr>
-        <p:spPr>
-          <a:noFill/>
-          <a:ln/>
-          <a:extLst>
-            <a:ext uri="{909E8E84-426E-40DD-AFC4-6F175D3DCCD1}">
-              <a14:hiddenFill xmlns:a14="http://schemas.microsoft.com/office/drawing/2010/main">
-                <a:solidFill>
-                  <a:srgbClr val="FFFFFF"/>
-                </a:solidFill>
-              </a14:hiddenFill>
-            </a:ext>
-            <a:ext uri="{91240B29-F687-4F45-9708-019B960494DF}">
-              <a14:hiddenLine xmlns:a14="http://schemas.microsoft.com/office/drawing/2010/main" w="9525">
-                <a:solidFill>
-                  <a:srgbClr val="000000"/>
-                </a:solidFill>
-                <a:miter lim="800000"/>
-                <a:headEnd/>
-                <a:tailEnd/>
-              </a14:hiddenLine>
-            </a:ext>
-          </a:extLst>
-        </p:spPr>
-        <p:txBody>
-          <a:bodyPr/>
-          <a:lstStyle/>
-          <a:p>
-            <a:endParaRPr lang="en-US" altLang="en-US">
-              <a:latin typeface="Times New Roman" panose="02020603050405020304" pitchFamily="18" charset="0"/>
-            </a:endParaRPr>
-          </a:p>
-        </p:txBody>
-      </p:sp>
-    </p:spTree>
-  </p:cSld>
-  <p:clrMapOvr>
-    <a:masterClrMapping/>
-  </p:clrMapOvr>
-</p:notes>
-</file>
-
-<file path=ppt/notesSlides/notesSlide32.xml><?xml version="1.0" encoding="utf-8"?>
-<p:notes xmlns:a="http://schemas.openxmlformats.org/drawingml/2006/main" xmlns:r="http://schemas.openxmlformats.org/officeDocument/2006/relationships" xmlns:p="http://schemas.openxmlformats.org/presentationml/2006/main">
-  <p:cSld>
-    <p:spTree>
-      <p:nvGrpSpPr>
-        <p:cNvPr id="1" name=""/>
-        <p:cNvGrpSpPr/>
-        <p:nvPr/>
-      </p:nvGrpSpPr>
-      <p:grpSpPr>
-        <a:xfrm>
-          <a:off x="0" y="0"/>
-          <a:ext cx="0" cy="0"/>
-          <a:chOff x="0" y="0"/>
-          <a:chExt cx="0" cy="0"/>
-        </a:xfrm>
-      </p:grpSpPr>
-      <p:sp>
-        <p:nvSpPr>
-          <p:cNvPr id="75778" name="Rectangle 7"/>
-          <p:cNvSpPr>
-            <a:spLocks noGrp="1" noChangeArrowheads="1"/>
-          </p:cNvSpPr>
-          <p:nvPr>
-            <p:ph type="sldNum" sz="quarter" idx="5"/>
-          </p:nvPr>
-        </p:nvSpPr>
-        <p:spPr>
-          <a:noFill/>
-          <a:ln/>
-          <a:extLst>
-            <a:ext uri="{909E8E84-426E-40DD-AFC4-6F175D3DCCD1}">
-              <a14:hiddenFill xmlns:a14="http://schemas.microsoft.com/office/drawing/2010/main">
-                <a:solidFill>
-                  <a:srgbClr val="FFFFFF"/>
-                </a:solidFill>
-              </a14:hiddenFill>
-            </a:ext>
-            <a:ext uri="{91240B29-F687-4F45-9708-019B960494DF}">
-              <a14:hiddenLine xmlns:a14="http://schemas.microsoft.com/office/drawing/2010/main" w="9525">
-                <a:solidFill>
-                  <a:srgbClr val="000000"/>
-                </a:solidFill>
-                <a:miter lim="800000"/>
-                <a:headEnd/>
-                <a:tailEnd/>
-              </a14:hiddenLine>
-            </a:ext>
-          </a:extLst>
-        </p:spPr>
-        <p:txBody>
-          <a:bodyPr/>
-          <a:lstStyle>
-            <a:lvl1pPr defTabSz="930275">
-              <a:defRPr sz="1600">
-                <a:solidFill>
-                  <a:schemeClr val="tx1"/>
-                </a:solidFill>
-                <a:latin typeface="Helvetica" panose="020B0604020202020204" pitchFamily="34" charset="0"/>
-                <a:ea typeface="MS PGothic" panose="020B0600070205080204" pitchFamily="34" charset="-128"/>
-              </a:defRPr>
-            </a:lvl1pPr>
-            <a:lvl2pPr marL="742950" indent="-285750" defTabSz="930275">
-              <a:defRPr sz="1600">
-                <a:solidFill>
-                  <a:schemeClr val="tx1"/>
-                </a:solidFill>
-                <a:latin typeface="Helvetica" panose="020B0604020202020204" pitchFamily="34" charset="0"/>
-                <a:ea typeface="MS PGothic" panose="020B0600070205080204" pitchFamily="34" charset="-128"/>
-              </a:defRPr>
-            </a:lvl2pPr>
-            <a:lvl3pPr marL="1143000" indent="-228600" defTabSz="930275">
-              <a:defRPr sz="1600">
-                <a:solidFill>
-                  <a:schemeClr val="tx1"/>
-                </a:solidFill>
-                <a:latin typeface="Helvetica" panose="020B0604020202020204" pitchFamily="34" charset="0"/>
-                <a:ea typeface="MS PGothic" panose="020B0600070205080204" pitchFamily="34" charset="-128"/>
-              </a:defRPr>
-            </a:lvl3pPr>
-            <a:lvl4pPr marL="1600200" indent="-228600" defTabSz="930275">
-              <a:defRPr sz="1600">
-                <a:solidFill>
-                  <a:schemeClr val="tx1"/>
-                </a:solidFill>
-                <a:latin typeface="Helvetica" panose="020B0604020202020204" pitchFamily="34" charset="0"/>
-                <a:ea typeface="MS PGothic" panose="020B0600070205080204" pitchFamily="34" charset="-128"/>
-              </a:defRPr>
-            </a:lvl4pPr>
-            <a:lvl5pPr marL="2057400" indent="-228600" defTabSz="930275">
-              <a:defRPr sz="1600">
-                <a:solidFill>
-                  <a:schemeClr val="tx1"/>
-                </a:solidFill>
-                <a:latin typeface="Helvetica" panose="020B0604020202020204" pitchFamily="34" charset="0"/>
-                <a:ea typeface="MS PGothic" panose="020B0600070205080204" pitchFamily="34" charset="-128"/>
-              </a:defRPr>
-            </a:lvl5pPr>
-            <a:lvl6pPr marL="2514600" indent="-228600" defTabSz="930275" eaLnBrk="0" fontAlgn="base" hangingPunct="0">
-              <a:spcBef>
-                <a:spcPct val="0"/>
-              </a:spcBef>
-              <a:spcAft>
-                <a:spcPct val="0"/>
-              </a:spcAft>
-              <a:defRPr sz="1600">
-                <a:solidFill>
-                  <a:schemeClr val="tx1"/>
-                </a:solidFill>
-                <a:latin typeface="Helvetica" panose="020B0604020202020204" pitchFamily="34" charset="0"/>
-                <a:ea typeface="MS PGothic" panose="020B0600070205080204" pitchFamily="34" charset="-128"/>
-              </a:defRPr>
-            </a:lvl6pPr>
-            <a:lvl7pPr marL="2971800" indent="-228600" defTabSz="930275" eaLnBrk="0" fontAlgn="base" hangingPunct="0">
-              <a:spcBef>
-                <a:spcPct val="0"/>
-              </a:spcBef>
-              <a:spcAft>
-                <a:spcPct val="0"/>
-              </a:spcAft>
-              <a:defRPr sz="1600">
-                <a:solidFill>
-                  <a:schemeClr val="tx1"/>
-                </a:solidFill>
-                <a:latin typeface="Helvetica" panose="020B0604020202020204" pitchFamily="34" charset="0"/>
-                <a:ea typeface="MS PGothic" panose="020B0600070205080204" pitchFamily="34" charset="-128"/>
-              </a:defRPr>
-            </a:lvl7pPr>
-            <a:lvl8pPr marL="3429000" indent="-228600" defTabSz="930275" eaLnBrk="0" fontAlgn="base" hangingPunct="0">
-              <a:spcBef>
-                <a:spcPct val="0"/>
-              </a:spcBef>
-              <a:spcAft>
-                <a:spcPct val="0"/>
-              </a:spcAft>
-              <a:defRPr sz="1600">
-                <a:solidFill>
-                  <a:schemeClr val="tx1"/>
-                </a:solidFill>
-                <a:latin typeface="Helvetica" panose="020B0604020202020204" pitchFamily="34" charset="0"/>
-                <a:ea typeface="MS PGothic" panose="020B0600070205080204" pitchFamily="34" charset="-128"/>
-              </a:defRPr>
-            </a:lvl8pPr>
-            <a:lvl9pPr marL="3886200" indent="-228600" defTabSz="930275" eaLnBrk="0" fontAlgn="base" hangingPunct="0">
-              <a:spcBef>
-                <a:spcPct val="0"/>
-              </a:spcBef>
-              <a:spcAft>
-                <a:spcPct val="0"/>
-              </a:spcAft>
-              <a:defRPr sz="1600">
-                <a:solidFill>
-                  <a:schemeClr val="tx1"/>
-                </a:solidFill>
-                <a:latin typeface="Helvetica" panose="020B0604020202020204" pitchFamily="34" charset="0"/>
-                <a:ea typeface="MS PGothic" panose="020B0600070205080204" pitchFamily="34" charset="-128"/>
-              </a:defRPr>
-            </a:lvl9pPr>
-          </a:lstStyle>
-          <a:p>
-            <a:fld id="{DB47C592-32BF-47BB-9678-D5FB42722EAA}" type="slidenum">
-              <a:rPr lang="en-US" altLang="en-US" sz="1300">
-                <a:latin typeface="Times New Roman" panose="02020603050405020304" pitchFamily="18" charset="0"/>
-              </a:rPr>
-              <a:pPr/>
-              <a:t>32</a:t>
-            </a:fld>
-            <a:endParaRPr lang="en-US" altLang="en-US" sz="1300">
-              <a:latin typeface="Times New Roman" panose="02020603050405020304" pitchFamily="18" charset="0"/>
-            </a:endParaRPr>
-          </a:p>
-        </p:txBody>
-      </p:sp>
-      <p:sp>
-        <p:nvSpPr>
-          <p:cNvPr id="75779" name="Rectangle 2"/>
-          <p:cNvSpPr>
-            <a:spLocks noGrp="1" noRot="1" noChangeAspect="1" noChangeArrowheads="1" noTextEdit="1"/>
-          </p:cNvSpPr>
-          <p:nvPr>
-            <p:ph type="sldImg"/>
-          </p:nvPr>
-        </p:nvSpPr>
-        <p:spPr>
-          <a:ln/>
-        </p:spPr>
-      </p:sp>
-      <p:sp>
-        <p:nvSpPr>
-          <p:cNvPr id="75780" name="Rectangle 3"/>
-          <p:cNvSpPr>
-            <a:spLocks noGrp="1" noChangeArrowheads="1"/>
-          </p:cNvSpPr>
-          <p:nvPr>
-            <p:ph type="body" idx="1"/>
-          </p:nvPr>
-        </p:nvSpPr>
-        <p:spPr>
-          <a:noFill/>
-          <a:ln/>
-          <a:extLst>
-            <a:ext uri="{909E8E84-426E-40DD-AFC4-6F175D3DCCD1}">
-              <a14:hiddenFill xmlns:a14="http://schemas.microsoft.com/office/drawing/2010/main">
-                <a:solidFill>
-                  <a:srgbClr val="FFFFFF"/>
-                </a:solidFill>
-              </a14:hiddenFill>
-            </a:ext>
-            <a:ext uri="{91240B29-F687-4F45-9708-019B960494DF}">
-              <a14:hiddenLine xmlns:a14="http://schemas.microsoft.com/office/drawing/2010/main" w="9525">
-                <a:solidFill>
-                  <a:srgbClr val="000000"/>
-                </a:solidFill>
-                <a:miter lim="800000"/>
-                <a:headEnd/>
-                <a:tailEnd/>
-              </a14:hiddenLine>
-            </a:ext>
-          </a:extLst>
-        </p:spPr>
-        <p:txBody>
-          <a:bodyPr/>
-          <a:lstStyle/>
-          <a:p>
-            <a:endParaRPr lang="en-US" altLang="en-US">
-              <a:latin typeface="Times New Roman" panose="02020603050405020304" pitchFamily="18" charset="0"/>
-            </a:endParaRPr>
-          </a:p>
-        </p:txBody>
-      </p:sp>
-    </p:spTree>
-  </p:cSld>
-  <p:clrMapOvr>
-    <a:masterClrMapping/>
-  </p:clrMapOvr>
-</p:notes>
-</file>
-
-<file path=ppt/notesSlides/notesSlide33.xml><?xml version="1.0" encoding="utf-8"?>
-<p:notes xmlns:a="http://schemas.openxmlformats.org/drawingml/2006/main" xmlns:r="http://schemas.openxmlformats.org/officeDocument/2006/relationships" xmlns:p="http://schemas.openxmlformats.org/presentationml/2006/main">
-  <p:cSld>
-    <p:spTree>
-      <p:nvGrpSpPr>
-        <p:cNvPr id="1" name=""/>
-        <p:cNvGrpSpPr/>
-        <p:nvPr/>
-      </p:nvGrpSpPr>
-      <p:grpSpPr>
-        <a:xfrm>
-          <a:off x="0" y="0"/>
-          <a:ext cx="0" cy="0"/>
-          <a:chOff x="0" y="0"/>
-          <a:chExt cx="0" cy="0"/>
-        </a:xfrm>
-      </p:grpSpPr>
-      <p:sp>
-        <p:nvSpPr>
-          <p:cNvPr id="76802" name="Rectangle 7"/>
-          <p:cNvSpPr>
-            <a:spLocks noGrp="1" noChangeArrowheads="1"/>
-          </p:cNvSpPr>
-          <p:nvPr>
-            <p:ph type="sldNum" sz="quarter" idx="5"/>
-          </p:nvPr>
-        </p:nvSpPr>
-        <p:spPr>
-          <a:noFill/>
-          <a:ln/>
-          <a:extLst>
-            <a:ext uri="{909E8E84-426E-40DD-AFC4-6F175D3DCCD1}">
-              <a14:hiddenFill xmlns:a14="http://schemas.microsoft.com/office/drawing/2010/main">
-                <a:solidFill>
-                  <a:srgbClr val="FFFFFF"/>
-                </a:solidFill>
-              </a14:hiddenFill>
-            </a:ext>
-            <a:ext uri="{91240B29-F687-4F45-9708-019B960494DF}">
-              <a14:hiddenLine xmlns:a14="http://schemas.microsoft.com/office/drawing/2010/main" w="9525">
-                <a:solidFill>
-                  <a:srgbClr val="000000"/>
-                </a:solidFill>
-                <a:miter lim="800000"/>
-                <a:headEnd/>
-                <a:tailEnd/>
-              </a14:hiddenLine>
-            </a:ext>
-          </a:extLst>
-        </p:spPr>
-        <p:txBody>
-          <a:bodyPr/>
-          <a:lstStyle>
-            <a:lvl1pPr defTabSz="930275">
-              <a:defRPr sz="1600">
-                <a:solidFill>
-                  <a:schemeClr val="tx1"/>
-                </a:solidFill>
-                <a:latin typeface="Helvetica" panose="020B0604020202020204" pitchFamily="34" charset="0"/>
-                <a:ea typeface="MS PGothic" panose="020B0600070205080204" pitchFamily="34" charset="-128"/>
-              </a:defRPr>
-            </a:lvl1pPr>
-            <a:lvl2pPr marL="742950" indent="-285750" defTabSz="930275">
-              <a:defRPr sz="1600">
-                <a:solidFill>
-                  <a:schemeClr val="tx1"/>
-                </a:solidFill>
-                <a:latin typeface="Helvetica" panose="020B0604020202020204" pitchFamily="34" charset="0"/>
-                <a:ea typeface="MS PGothic" panose="020B0600070205080204" pitchFamily="34" charset="-128"/>
-              </a:defRPr>
-            </a:lvl2pPr>
-            <a:lvl3pPr marL="1143000" indent="-228600" defTabSz="930275">
-              <a:defRPr sz="1600">
-                <a:solidFill>
-                  <a:schemeClr val="tx1"/>
-                </a:solidFill>
-                <a:latin typeface="Helvetica" panose="020B0604020202020204" pitchFamily="34" charset="0"/>
-                <a:ea typeface="MS PGothic" panose="020B0600070205080204" pitchFamily="34" charset="-128"/>
-              </a:defRPr>
-            </a:lvl3pPr>
-            <a:lvl4pPr marL="1600200" indent="-228600" defTabSz="930275">
-              <a:defRPr sz="1600">
-                <a:solidFill>
-                  <a:schemeClr val="tx1"/>
-                </a:solidFill>
-                <a:latin typeface="Helvetica" panose="020B0604020202020204" pitchFamily="34" charset="0"/>
-                <a:ea typeface="MS PGothic" panose="020B0600070205080204" pitchFamily="34" charset="-128"/>
-              </a:defRPr>
-            </a:lvl4pPr>
-            <a:lvl5pPr marL="2057400" indent="-228600" defTabSz="930275">
-              <a:defRPr sz="1600">
-                <a:solidFill>
-                  <a:schemeClr val="tx1"/>
-                </a:solidFill>
-                <a:latin typeface="Helvetica" panose="020B0604020202020204" pitchFamily="34" charset="0"/>
-                <a:ea typeface="MS PGothic" panose="020B0600070205080204" pitchFamily="34" charset="-128"/>
-              </a:defRPr>
-            </a:lvl5pPr>
-            <a:lvl6pPr marL="2514600" indent="-228600" defTabSz="930275" eaLnBrk="0" fontAlgn="base" hangingPunct="0">
-              <a:spcBef>
-                <a:spcPct val="0"/>
-              </a:spcBef>
-              <a:spcAft>
-                <a:spcPct val="0"/>
-              </a:spcAft>
-              <a:defRPr sz="1600">
-                <a:solidFill>
-                  <a:schemeClr val="tx1"/>
-                </a:solidFill>
-                <a:latin typeface="Helvetica" panose="020B0604020202020204" pitchFamily="34" charset="0"/>
-                <a:ea typeface="MS PGothic" panose="020B0600070205080204" pitchFamily="34" charset="-128"/>
-              </a:defRPr>
-            </a:lvl6pPr>
-            <a:lvl7pPr marL="2971800" indent="-228600" defTabSz="930275" eaLnBrk="0" fontAlgn="base" hangingPunct="0">
-              <a:spcBef>
-                <a:spcPct val="0"/>
-              </a:spcBef>
-              <a:spcAft>
-                <a:spcPct val="0"/>
-              </a:spcAft>
-              <a:defRPr sz="1600">
-                <a:solidFill>
-                  <a:schemeClr val="tx1"/>
-                </a:solidFill>
-                <a:latin typeface="Helvetica" panose="020B0604020202020204" pitchFamily="34" charset="0"/>
-                <a:ea typeface="MS PGothic" panose="020B0600070205080204" pitchFamily="34" charset="-128"/>
-              </a:defRPr>
-            </a:lvl7pPr>
-            <a:lvl8pPr marL="3429000" indent="-228600" defTabSz="930275" eaLnBrk="0" fontAlgn="base" hangingPunct="0">
-              <a:spcBef>
-                <a:spcPct val="0"/>
-              </a:spcBef>
-              <a:spcAft>
-                <a:spcPct val="0"/>
-              </a:spcAft>
-              <a:defRPr sz="1600">
-                <a:solidFill>
-                  <a:schemeClr val="tx1"/>
-                </a:solidFill>
-                <a:latin typeface="Helvetica" panose="020B0604020202020204" pitchFamily="34" charset="0"/>
-                <a:ea typeface="MS PGothic" panose="020B0600070205080204" pitchFamily="34" charset="-128"/>
-              </a:defRPr>
-            </a:lvl8pPr>
-            <a:lvl9pPr marL="3886200" indent="-228600" defTabSz="930275" eaLnBrk="0" fontAlgn="base" hangingPunct="0">
-              <a:spcBef>
-                <a:spcPct val="0"/>
-              </a:spcBef>
-              <a:spcAft>
-                <a:spcPct val="0"/>
-              </a:spcAft>
-              <a:defRPr sz="1600">
-                <a:solidFill>
-                  <a:schemeClr val="tx1"/>
-                </a:solidFill>
-                <a:latin typeface="Helvetica" panose="020B0604020202020204" pitchFamily="34" charset="0"/>
-                <a:ea typeface="MS PGothic" panose="020B0600070205080204" pitchFamily="34" charset="-128"/>
-              </a:defRPr>
-            </a:lvl9pPr>
-          </a:lstStyle>
-          <a:p>
-            <a:fld id="{9955DDF8-1267-474D-9F61-95CB06392C59}" type="slidenum">
-              <a:rPr lang="en-US" altLang="en-US" sz="1300">
-                <a:latin typeface="Times New Roman" panose="02020603050405020304" pitchFamily="18" charset="0"/>
-              </a:rPr>
-              <a:pPr/>
-              <a:t>33</a:t>
-            </a:fld>
-            <a:endParaRPr lang="en-US" altLang="en-US" sz="1300">
-              <a:latin typeface="Times New Roman" panose="02020603050405020304" pitchFamily="18" charset="0"/>
-            </a:endParaRPr>
-          </a:p>
-        </p:txBody>
-      </p:sp>
-      <p:sp>
-        <p:nvSpPr>
-          <p:cNvPr id="76803" name="Rectangle 2"/>
-          <p:cNvSpPr>
-            <a:spLocks noGrp="1" noRot="1" noChangeAspect="1" noChangeArrowheads="1" noTextEdit="1"/>
-          </p:cNvSpPr>
-          <p:nvPr>
-            <p:ph type="sldImg"/>
-          </p:nvPr>
-        </p:nvSpPr>
-        <p:spPr>
-          <a:ln/>
-        </p:spPr>
-      </p:sp>
-      <p:sp>
-        <p:nvSpPr>
-          <p:cNvPr id="76804" name="Rectangle 3"/>
-          <p:cNvSpPr>
-            <a:spLocks noGrp="1" noChangeArrowheads="1"/>
-          </p:cNvSpPr>
-          <p:nvPr>
-            <p:ph type="body" idx="1"/>
-          </p:nvPr>
-        </p:nvSpPr>
-        <p:spPr>
-          <a:noFill/>
-          <a:ln/>
-          <a:extLst>
-            <a:ext uri="{909E8E84-426E-40DD-AFC4-6F175D3DCCD1}">
-              <a14:hiddenFill xmlns:a14="http://schemas.microsoft.com/office/drawing/2010/main">
-                <a:solidFill>
-                  <a:srgbClr val="FFFFFF"/>
-                </a:solidFill>
-              </a14:hiddenFill>
-            </a:ext>
-            <a:ext uri="{91240B29-F687-4F45-9708-019B960494DF}">
-              <a14:hiddenLine xmlns:a14="http://schemas.microsoft.com/office/drawing/2010/main" w="9525">
-                <a:solidFill>
-                  <a:srgbClr val="000000"/>
-                </a:solidFill>
-                <a:miter lim="800000"/>
-                <a:headEnd/>
-                <a:tailEnd/>
-              </a14:hiddenLine>
-            </a:ext>
-          </a:extLst>
-        </p:spPr>
-        <p:txBody>
-          <a:bodyPr/>
-          <a:lstStyle/>
-          <a:p>
-            <a:endParaRPr lang="en-US" altLang="en-US">
-              <a:latin typeface="Times New Roman" panose="02020603050405020304" pitchFamily="18" charset="0"/>
-            </a:endParaRPr>
-          </a:p>
-        </p:txBody>
-      </p:sp>
-    </p:spTree>
-  </p:cSld>
-  <p:clrMapOvr>
-    <a:masterClrMapping/>
-  </p:clrMapOvr>
-</p:notes>
-</file>
-
-<file path=ppt/notesSlides/notesSlide34.xml><?xml version="1.0" encoding="utf-8"?>
 <p:notes xmlns:a="http://schemas.openxmlformats.org/drawingml/2006/main" xmlns:r="http://schemas.openxmlformats.org/officeDocument/2006/relationships" xmlns:p="http://schemas.openxmlformats.org/presentationml/2006/main">
   <p:cSld>
     <p:spTree>
@@ -7480,7 +6647,7 @@
                 <a:latin typeface="Times New Roman" panose="02020603050405020304" pitchFamily="18" charset="0"/>
               </a:rPr>
               <a:pPr/>
-              <a:t>34</a:t>
+              <a:t>30</a:t>
             </a:fld>
             <a:endParaRPr lang="en-US" altLang="en-US" sz="1300">
               <a:latin typeface="Times New Roman" panose="02020603050405020304" pitchFamily="18" charset="0"/>
@@ -7546,6 +6713,11 @@
         </p:txBody>
       </p:sp>
     </p:spTree>
+    <p:extLst>
+      <p:ext uri="{BB962C8B-B14F-4D97-AF65-F5344CB8AC3E}">
+        <p14:creationId xmlns:p14="http://schemas.microsoft.com/office/powerpoint/2010/main" val="2011185925"/>
+      </p:ext>
+    </p:extLst>
   </p:cSld>
   <p:clrMapOvr>
     <a:masterClrMapping/>
@@ -7553,245 +6725,7 @@
 </p:notes>
 </file>
 
-<file path=ppt/notesSlides/notesSlide35.xml><?xml version="1.0" encoding="utf-8"?>
-<p:notes xmlns:a="http://schemas.openxmlformats.org/drawingml/2006/main" xmlns:r="http://schemas.openxmlformats.org/officeDocument/2006/relationships" xmlns:p="http://schemas.openxmlformats.org/presentationml/2006/main">
-  <p:cSld>
-    <p:spTree>
-      <p:nvGrpSpPr>
-        <p:cNvPr id="1" name=""/>
-        <p:cNvGrpSpPr/>
-        <p:nvPr/>
-      </p:nvGrpSpPr>
-      <p:grpSpPr>
-        <a:xfrm>
-          <a:off x="0" y="0"/>
-          <a:ext cx="0" cy="0"/>
-          <a:chOff x="0" y="0"/>
-          <a:chExt cx="0" cy="0"/>
-        </a:xfrm>
-      </p:grpSpPr>
-      <p:sp>
-        <p:nvSpPr>
-          <p:cNvPr id="78850" name="Rectangle 7"/>
-          <p:cNvSpPr>
-            <a:spLocks noGrp="1" noChangeArrowheads="1"/>
-          </p:cNvSpPr>
-          <p:nvPr>
-            <p:ph type="sldNum" sz="quarter" idx="5"/>
-          </p:nvPr>
-        </p:nvSpPr>
-        <p:spPr>
-          <a:noFill/>
-          <a:ln/>
-          <a:extLst>
-            <a:ext uri="{909E8E84-426E-40DD-AFC4-6F175D3DCCD1}">
-              <a14:hiddenFill xmlns:a14="http://schemas.microsoft.com/office/drawing/2010/main">
-                <a:solidFill>
-                  <a:srgbClr val="FFFFFF"/>
-                </a:solidFill>
-              </a14:hiddenFill>
-            </a:ext>
-            <a:ext uri="{91240B29-F687-4F45-9708-019B960494DF}">
-              <a14:hiddenLine xmlns:a14="http://schemas.microsoft.com/office/drawing/2010/main" w="9525">
-                <a:solidFill>
-                  <a:srgbClr val="000000"/>
-                </a:solidFill>
-                <a:miter lim="800000"/>
-                <a:headEnd/>
-                <a:tailEnd/>
-              </a14:hiddenLine>
-            </a:ext>
-          </a:extLst>
-        </p:spPr>
-        <p:txBody>
-          <a:bodyPr/>
-          <a:lstStyle>
-            <a:lvl1pPr defTabSz="930275">
-              <a:defRPr sz="1600">
-                <a:solidFill>
-                  <a:schemeClr val="tx1"/>
-                </a:solidFill>
-                <a:latin typeface="Helvetica" panose="020B0604020202020204" pitchFamily="34" charset="0"/>
-                <a:ea typeface="MS PGothic" panose="020B0600070205080204" pitchFamily="34" charset="-128"/>
-              </a:defRPr>
-            </a:lvl1pPr>
-            <a:lvl2pPr marL="742950" indent="-285750" defTabSz="930275">
-              <a:defRPr sz="1600">
-                <a:solidFill>
-                  <a:schemeClr val="tx1"/>
-                </a:solidFill>
-                <a:latin typeface="Helvetica" panose="020B0604020202020204" pitchFamily="34" charset="0"/>
-                <a:ea typeface="MS PGothic" panose="020B0600070205080204" pitchFamily="34" charset="-128"/>
-              </a:defRPr>
-            </a:lvl2pPr>
-            <a:lvl3pPr marL="1143000" indent="-228600" defTabSz="930275">
-              <a:defRPr sz="1600">
-                <a:solidFill>
-                  <a:schemeClr val="tx1"/>
-                </a:solidFill>
-                <a:latin typeface="Helvetica" panose="020B0604020202020204" pitchFamily="34" charset="0"/>
-                <a:ea typeface="MS PGothic" panose="020B0600070205080204" pitchFamily="34" charset="-128"/>
-              </a:defRPr>
-            </a:lvl3pPr>
-            <a:lvl4pPr marL="1600200" indent="-228600" defTabSz="930275">
-              <a:defRPr sz="1600">
-                <a:solidFill>
-                  <a:schemeClr val="tx1"/>
-                </a:solidFill>
-                <a:latin typeface="Helvetica" panose="020B0604020202020204" pitchFamily="34" charset="0"/>
-                <a:ea typeface="MS PGothic" panose="020B0600070205080204" pitchFamily="34" charset="-128"/>
-              </a:defRPr>
-            </a:lvl4pPr>
-            <a:lvl5pPr marL="2057400" indent="-228600" defTabSz="930275">
-              <a:defRPr sz="1600">
-                <a:solidFill>
-                  <a:schemeClr val="tx1"/>
-                </a:solidFill>
-                <a:latin typeface="Helvetica" panose="020B0604020202020204" pitchFamily="34" charset="0"/>
-                <a:ea typeface="MS PGothic" panose="020B0600070205080204" pitchFamily="34" charset="-128"/>
-              </a:defRPr>
-            </a:lvl5pPr>
-            <a:lvl6pPr marL="2514600" indent="-228600" defTabSz="930275" eaLnBrk="0" fontAlgn="base" hangingPunct="0">
-              <a:spcBef>
-                <a:spcPct val="0"/>
-              </a:spcBef>
-              <a:spcAft>
-                <a:spcPct val="0"/>
-              </a:spcAft>
-              <a:defRPr sz="1600">
-                <a:solidFill>
-                  <a:schemeClr val="tx1"/>
-                </a:solidFill>
-                <a:latin typeface="Helvetica" panose="020B0604020202020204" pitchFamily="34" charset="0"/>
-                <a:ea typeface="MS PGothic" panose="020B0600070205080204" pitchFamily="34" charset="-128"/>
-              </a:defRPr>
-            </a:lvl6pPr>
-            <a:lvl7pPr marL="2971800" indent="-228600" defTabSz="930275" eaLnBrk="0" fontAlgn="base" hangingPunct="0">
-              <a:spcBef>
-                <a:spcPct val="0"/>
-              </a:spcBef>
-              <a:spcAft>
-                <a:spcPct val="0"/>
-              </a:spcAft>
-              <a:defRPr sz="1600">
-                <a:solidFill>
-                  <a:schemeClr val="tx1"/>
-                </a:solidFill>
-                <a:latin typeface="Helvetica" panose="020B0604020202020204" pitchFamily="34" charset="0"/>
-                <a:ea typeface="MS PGothic" panose="020B0600070205080204" pitchFamily="34" charset="-128"/>
-              </a:defRPr>
-            </a:lvl7pPr>
-            <a:lvl8pPr marL="3429000" indent="-228600" defTabSz="930275" eaLnBrk="0" fontAlgn="base" hangingPunct="0">
-              <a:spcBef>
-                <a:spcPct val="0"/>
-              </a:spcBef>
-              <a:spcAft>
-                <a:spcPct val="0"/>
-              </a:spcAft>
-              <a:defRPr sz="1600">
-                <a:solidFill>
-                  <a:schemeClr val="tx1"/>
-                </a:solidFill>
-                <a:latin typeface="Helvetica" panose="020B0604020202020204" pitchFamily="34" charset="0"/>
-                <a:ea typeface="MS PGothic" panose="020B0600070205080204" pitchFamily="34" charset="-128"/>
-              </a:defRPr>
-            </a:lvl8pPr>
-            <a:lvl9pPr marL="3886200" indent="-228600" defTabSz="930275" eaLnBrk="0" fontAlgn="base" hangingPunct="0">
-              <a:spcBef>
-                <a:spcPct val="0"/>
-              </a:spcBef>
-              <a:spcAft>
-                <a:spcPct val="0"/>
-              </a:spcAft>
-              <a:defRPr sz="1600">
-                <a:solidFill>
-                  <a:schemeClr val="tx1"/>
-                </a:solidFill>
-                <a:latin typeface="Helvetica" panose="020B0604020202020204" pitchFamily="34" charset="0"/>
-                <a:ea typeface="MS PGothic" panose="020B0600070205080204" pitchFamily="34" charset="-128"/>
-              </a:defRPr>
-            </a:lvl9pPr>
-          </a:lstStyle>
-          <a:p>
-            <a:fld id="{07114055-A8AE-4C05-AC7A-46A0B6A29489}" type="slidenum">
-              <a:rPr lang="en-US" altLang="en-US" sz="1300">
-                <a:latin typeface="Times New Roman" panose="02020603050405020304" pitchFamily="18" charset="0"/>
-              </a:rPr>
-              <a:pPr/>
-              <a:t>35</a:t>
-            </a:fld>
-            <a:endParaRPr lang="en-US" altLang="en-US" sz="1300">
-              <a:latin typeface="Times New Roman" panose="02020603050405020304" pitchFamily="18" charset="0"/>
-            </a:endParaRPr>
-          </a:p>
-        </p:txBody>
-      </p:sp>
-      <p:sp>
-        <p:nvSpPr>
-          <p:cNvPr id="78851" name="Rectangle 2"/>
-          <p:cNvSpPr>
-            <a:spLocks noGrp="1" noRot="1" noChangeAspect="1" noChangeArrowheads="1" noTextEdit="1"/>
-          </p:cNvSpPr>
-          <p:nvPr>
-            <p:ph type="sldImg"/>
-          </p:nvPr>
-        </p:nvSpPr>
-        <p:spPr>
-          <a:ln/>
-        </p:spPr>
-      </p:sp>
-      <p:sp>
-        <p:nvSpPr>
-          <p:cNvPr id="78852" name="Rectangle 3"/>
-          <p:cNvSpPr>
-            <a:spLocks noGrp="1" noChangeArrowheads="1"/>
-          </p:cNvSpPr>
-          <p:nvPr>
-            <p:ph type="body" idx="1"/>
-          </p:nvPr>
-        </p:nvSpPr>
-        <p:spPr>
-          <a:noFill/>
-          <a:ln/>
-          <a:extLst>
-            <a:ext uri="{909E8E84-426E-40DD-AFC4-6F175D3DCCD1}">
-              <a14:hiddenFill xmlns:a14="http://schemas.microsoft.com/office/drawing/2010/main">
-                <a:solidFill>
-                  <a:srgbClr val="FFFFFF"/>
-                </a:solidFill>
-              </a14:hiddenFill>
-            </a:ext>
-            <a:ext uri="{91240B29-F687-4F45-9708-019B960494DF}">
-              <a14:hiddenLine xmlns:a14="http://schemas.microsoft.com/office/drawing/2010/main" w="9525">
-                <a:solidFill>
-                  <a:srgbClr val="000000"/>
-                </a:solidFill>
-                <a:miter lim="800000"/>
-                <a:headEnd/>
-                <a:tailEnd/>
-              </a14:hiddenLine>
-            </a:ext>
-          </a:extLst>
-        </p:spPr>
-        <p:txBody>
-          <a:bodyPr/>
-          <a:lstStyle/>
-          <a:p>
-            <a:endParaRPr lang="en-US" altLang="en-US">
-              <a:latin typeface="Times New Roman" panose="02020603050405020304" pitchFamily="18" charset="0"/>
-            </a:endParaRPr>
-          </a:p>
-        </p:txBody>
-      </p:sp>
-    </p:spTree>
-  </p:cSld>
-  <p:clrMapOvr>
-    <a:masterClrMapping/>
-  </p:clrMapOvr>
-</p:notes>
-</file>
-
-<file path=ppt/notesSlides/notesSlide36.xml><?xml version="1.0" encoding="utf-8"?>
+<file path=ppt/notesSlides/notesSlide31.xml><?xml version="1.0" encoding="utf-8"?>
 <p:notes xmlns:a="http://schemas.openxmlformats.org/drawingml/2006/main" xmlns:r="http://schemas.openxmlformats.org/officeDocument/2006/relationships" xmlns:p="http://schemas.openxmlformats.org/presentationml/2006/main">
   <p:cSld>
     <p:spTree>
@@ -7956,7 +6890,7 @@
                 <a:latin typeface="Times New Roman" panose="02020603050405020304" pitchFamily="18" charset="0"/>
               </a:rPr>
               <a:pPr/>
-              <a:t>36</a:t>
+              <a:t>31</a:t>
             </a:fld>
             <a:endParaRPr lang="en-US" altLang="en-US" sz="1300">
               <a:latin typeface="Times New Roman" panose="02020603050405020304" pitchFamily="18" charset="0"/>
@@ -8022,6 +6956,11 @@
         </p:txBody>
       </p:sp>
     </p:spTree>
+    <p:extLst>
+      <p:ext uri="{BB962C8B-B14F-4D97-AF65-F5344CB8AC3E}">
+        <p14:creationId xmlns:p14="http://schemas.microsoft.com/office/powerpoint/2010/main" val="967807386"/>
+      </p:ext>
+    </p:extLst>
   </p:cSld>
   <p:clrMapOvr>
     <a:masterClrMapping/>
@@ -8029,7 +6968,7 @@
 </p:notes>
 </file>
 
-<file path=ppt/notesSlides/notesSlide37.xml><?xml version="1.0" encoding="utf-8"?>
+<file path=ppt/notesSlides/notesSlide32.xml><?xml version="1.0" encoding="utf-8"?>
 <p:notes xmlns:a="http://schemas.openxmlformats.org/drawingml/2006/main" xmlns:r="http://schemas.openxmlformats.org/officeDocument/2006/relationships" xmlns:p="http://schemas.openxmlformats.org/presentationml/2006/main">
   <p:cSld>
     <p:spTree>
@@ -8194,7 +7133,7 @@
                 <a:latin typeface="Times New Roman" panose="02020603050405020304" pitchFamily="18" charset="0"/>
               </a:rPr>
               <a:pPr/>
-              <a:t>37</a:t>
+              <a:t>32</a:t>
             </a:fld>
             <a:endParaRPr lang="en-US" altLang="en-US" sz="1300">
               <a:latin typeface="Times New Roman" panose="02020603050405020304" pitchFamily="18" charset="0"/>
@@ -8260,6 +7199,11 @@
         </p:txBody>
       </p:sp>
     </p:spTree>
+    <p:extLst>
+      <p:ext uri="{BB962C8B-B14F-4D97-AF65-F5344CB8AC3E}">
+        <p14:creationId xmlns:p14="http://schemas.microsoft.com/office/powerpoint/2010/main" val="1315332477"/>
+      </p:ext>
+    </p:extLst>
   </p:cSld>
   <p:clrMapOvr>
     <a:masterClrMapping/>
@@ -8498,6 +7442,11 @@
         </p:txBody>
       </p:sp>
     </p:spTree>
+    <p:extLst>
+      <p:ext uri="{BB962C8B-B14F-4D97-AF65-F5344CB8AC3E}">
+        <p14:creationId xmlns:p14="http://schemas.microsoft.com/office/powerpoint/2010/main" val="4171299101"/>
+      </p:ext>
+    </p:extLst>
   </p:cSld>
   <p:clrMapOvr>
     <a:masterClrMapping/>
@@ -8736,6 +7685,11 @@
         </p:txBody>
       </p:sp>
     </p:spTree>
+    <p:extLst>
+      <p:ext uri="{BB962C8B-B14F-4D97-AF65-F5344CB8AC3E}">
+        <p14:creationId xmlns:p14="http://schemas.microsoft.com/office/powerpoint/2010/main" val="3257980980"/>
+      </p:ext>
+    </p:extLst>
   </p:cSld>
   <p:clrMapOvr>
     <a:masterClrMapping/>
@@ -8974,6 +7928,11 @@
         </p:txBody>
       </p:sp>
     </p:spTree>
+    <p:extLst>
+      <p:ext uri="{BB962C8B-B14F-4D97-AF65-F5344CB8AC3E}">
+        <p14:creationId xmlns:p14="http://schemas.microsoft.com/office/powerpoint/2010/main" val="3353765016"/>
+      </p:ext>
+    </p:extLst>
   </p:cSld>
   <p:clrMapOvr>
     <a:masterClrMapping/>
@@ -9212,6 +8171,11 @@
         </p:txBody>
       </p:sp>
     </p:spTree>
+    <p:extLst>
+      <p:ext uri="{BB962C8B-B14F-4D97-AF65-F5344CB8AC3E}">
+        <p14:creationId xmlns:p14="http://schemas.microsoft.com/office/powerpoint/2010/main" val="2667549091"/>
+      </p:ext>
+    </p:extLst>
   </p:cSld>
   <p:clrMapOvr>
     <a:masterClrMapping/>
@@ -9450,6 +8414,11 @@
         </p:txBody>
       </p:sp>
     </p:spTree>
+    <p:extLst>
+      <p:ext uri="{BB962C8B-B14F-4D97-AF65-F5344CB8AC3E}">
+        <p14:creationId xmlns:p14="http://schemas.microsoft.com/office/powerpoint/2010/main" val="3789998075"/>
+      </p:ext>
+    </p:extLst>
   </p:cSld>
   <p:clrMapOvr>
     <a:masterClrMapping/>
@@ -9688,6 +8657,11 @@
         </p:txBody>
       </p:sp>
     </p:spTree>
+    <p:extLst>
+      <p:ext uri="{BB962C8B-B14F-4D97-AF65-F5344CB8AC3E}">
+        <p14:creationId xmlns:p14="http://schemas.microsoft.com/office/powerpoint/2010/main" val="3493654851"/>
+      </p:ext>
+    </p:extLst>
   </p:cSld>
   <p:clrMapOvr>
     <a:masterClrMapping/>
@@ -9717,7 +8691,7 @@
           <p:cNvPr id="5" name="Text Box 7">
             <a:extLst>
               <a:ext uri="{FF2B5EF4-FFF2-40B4-BE49-F238E27FC236}">
-                <a16:creationId xmlns:a16="http://schemas.microsoft.com/office/drawing/2014/main" id="{6AB433D2-BE84-467A-82DB-DBFCF9F936A3}"/>
+                <a16:creationId xmlns:a16="http://schemas.microsoft.com/office/drawing/2014/main" xmlns="" id="{6AB433D2-BE84-467A-82DB-DBFCF9F936A3}"/>
               </a:ext>
             </a:extLst>
           </p:cNvPr>
@@ -9985,7 +8959,7 @@
           <p:cNvPr id="8" name="Rectangle 5">
             <a:extLst>
               <a:ext uri="{FF2B5EF4-FFF2-40B4-BE49-F238E27FC236}">
-                <a16:creationId xmlns:a16="http://schemas.microsoft.com/office/drawing/2014/main" id="{E5B7FE48-B4A0-4404-A94E-2D4837BDADF1}"/>
+                <a16:creationId xmlns:a16="http://schemas.microsoft.com/office/drawing/2014/main" xmlns="" id="{E5B7FE48-B4A0-4404-A94E-2D4837BDADF1}"/>
               </a:ext>
             </a:extLst>
           </p:cNvPr>
@@ -10075,7 +9049,7 @@
           <p:cNvPr id="10" name="Picture 9" descr="Cover-6Ed">
             <a:extLst>
               <a:ext uri="{FF2B5EF4-FFF2-40B4-BE49-F238E27FC236}">
-                <a16:creationId xmlns:a16="http://schemas.microsoft.com/office/drawing/2014/main" id="{77026798-0827-482F-848C-054321BDFD4D}"/>
+                <a16:creationId xmlns:a16="http://schemas.microsoft.com/office/drawing/2014/main" xmlns="" id="{77026798-0827-482F-848C-054321BDFD4D}"/>
               </a:ext>
             </a:extLst>
           </p:cNvPr>
@@ -10238,7 +9212,7 @@
           <p:cNvPr id="4" name="Rectangle 3">
             <a:extLst>
               <a:ext uri="{FF2B5EF4-FFF2-40B4-BE49-F238E27FC236}">
-                <a16:creationId xmlns:a16="http://schemas.microsoft.com/office/drawing/2014/main" id="{7677CD6D-A5E2-4543-81E0-D97745649CEB}"/>
+                <a16:creationId xmlns:a16="http://schemas.microsoft.com/office/drawing/2014/main" xmlns="" id="{7677CD6D-A5E2-4543-81E0-D97745649CEB}"/>
               </a:ext>
             </a:extLst>
           </p:cNvPr>
@@ -10387,7 +9361,7 @@
           <p:cNvPr id="4" name="Rectangle 3">
             <a:extLst>
               <a:ext uri="{FF2B5EF4-FFF2-40B4-BE49-F238E27FC236}">
-                <a16:creationId xmlns:a16="http://schemas.microsoft.com/office/drawing/2014/main" id="{66D4BD1A-4145-49C3-8D7D-1F956B760305}"/>
+                <a16:creationId xmlns:a16="http://schemas.microsoft.com/office/drawing/2014/main" xmlns="" id="{66D4BD1A-4145-49C3-8D7D-1F956B760305}"/>
               </a:ext>
             </a:extLst>
           </p:cNvPr>
@@ -10592,7 +9566,7 @@
           <p:cNvPr id="5" name="Rectangle 3">
             <a:extLst>
               <a:ext uri="{FF2B5EF4-FFF2-40B4-BE49-F238E27FC236}">
-                <a16:creationId xmlns:a16="http://schemas.microsoft.com/office/drawing/2014/main" id="{D7C2D5D2-FFA8-4B97-9D6C-DF120847B519}"/>
+                <a16:creationId xmlns:a16="http://schemas.microsoft.com/office/drawing/2014/main" xmlns="" id="{D7C2D5D2-FFA8-4B97-9D6C-DF120847B519}"/>
               </a:ext>
             </a:extLst>
           </p:cNvPr>
@@ -10658,7 +9632,7 @@
           <p:cNvPr id="5" name="Text Box 7">
             <a:extLst>
               <a:ext uri="{FF2B5EF4-FFF2-40B4-BE49-F238E27FC236}">
-                <a16:creationId xmlns:a16="http://schemas.microsoft.com/office/drawing/2014/main" id="{6E2D77BB-A1E3-4E40-9A08-249BCF8B8523}"/>
+                <a16:creationId xmlns:a16="http://schemas.microsoft.com/office/drawing/2014/main" xmlns="" id="{6E2D77BB-A1E3-4E40-9A08-249BCF8B8523}"/>
               </a:ext>
             </a:extLst>
           </p:cNvPr>
@@ -10926,7 +9900,7 @@
           <p:cNvPr id="8" name="Rectangle 5">
             <a:extLst>
               <a:ext uri="{FF2B5EF4-FFF2-40B4-BE49-F238E27FC236}">
-                <a16:creationId xmlns:a16="http://schemas.microsoft.com/office/drawing/2014/main" id="{D2D242F4-2B18-4F93-AF83-C0B3D393143B}"/>
+                <a16:creationId xmlns:a16="http://schemas.microsoft.com/office/drawing/2014/main" xmlns="" id="{D2D242F4-2B18-4F93-AF83-C0B3D393143B}"/>
               </a:ext>
             </a:extLst>
           </p:cNvPr>
@@ -11162,7 +10136,7 @@
           <p:cNvPr id="4" name="Rectangle 3">
             <a:extLst>
               <a:ext uri="{FF2B5EF4-FFF2-40B4-BE49-F238E27FC236}">
-                <a16:creationId xmlns:a16="http://schemas.microsoft.com/office/drawing/2014/main" id="{E42D457B-4574-44A7-82F5-364A95AA2566}"/>
+                <a16:creationId xmlns:a16="http://schemas.microsoft.com/office/drawing/2014/main" xmlns="" id="{E42D457B-4574-44A7-82F5-364A95AA2566}"/>
               </a:ext>
             </a:extLst>
           </p:cNvPr>
@@ -11329,7 +10303,7 @@
           <p:cNvPr id="4" name="Rectangle 3">
             <a:extLst>
               <a:ext uri="{FF2B5EF4-FFF2-40B4-BE49-F238E27FC236}">
-                <a16:creationId xmlns:a16="http://schemas.microsoft.com/office/drawing/2014/main" id="{9833A2CD-6A4B-4240-88F1-B4D7FEB50A79}"/>
+                <a16:creationId xmlns:a16="http://schemas.microsoft.com/office/drawing/2014/main" xmlns="" id="{9833A2CD-6A4B-4240-88F1-B4D7FEB50A79}"/>
               </a:ext>
             </a:extLst>
           </p:cNvPr>
@@ -11417,7 +10391,7 @@
           <p:cNvPr id="5" name="Rectangle 3">
             <a:extLst>
               <a:ext uri="{FF2B5EF4-FFF2-40B4-BE49-F238E27FC236}">
-                <a16:creationId xmlns:a16="http://schemas.microsoft.com/office/drawing/2014/main" id="{BC4FAFEB-DA24-40E3-81A3-2C7117781D6B}"/>
+                <a16:creationId xmlns:a16="http://schemas.microsoft.com/office/drawing/2014/main" xmlns="" id="{BC4FAFEB-DA24-40E3-81A3-2C7117781D6B}"/>
               </a:ext>
             </a:extLst>
           </p:cNvPr>
@@ -11453,7 +10427,7 @@
           <p:cNvPr id="6" name="Content Placeholder 2">
             <a:extLst>
               <a:ext uri="{FF2B5EF4-FFF2-40B4-BE49-F238E27FC236}">
-                <a16:creationId xmlns:a16="http://schemas.microsoft.com/office/drawing/2014/main" id="{EE86E211-15D2-459B-B331-A82FFB150BE0}"/>
+                <a16:creationId xmlns:a16="http://schemas.microsoft.com/office/drawing/2014/main" xmlns="" id="{EE86E211-15D2-459B-B331-A82FFB150BE0}"/>
               </a:ext>
             </a:extLst>
           </p:cNvPr>
@@ -11905,7 +10879,7 @@
           <p:cNvPr id="7" name="Rectangle 3">
             <a:extLst>
               <a:ext uri="{FF2B5EF4-FFF2-40B4-BE49-F238E27FC236}">
-                <a16:creationId xmlns:a16="http://schemas.microsoft.com/office/drawing/2014/main" id="{42096E68-496F-4499-93E9-D10C62B93D1A}"/>
+                <a16:creationId xmlns:a16="http://schemas.microsoft.com/office/drawing/2014/main" xmlns="" id="{42096E68-496F-4499-93E9-D10C62B93D1A}"/>
               </a:ext>
             </a:extLst>
           </p:cNvPr>
@@ -11993,7 +10967,7 @@
           <p:cNvPr id="3" name="Rectangle 3">
             <a:extLst>
               <a:ext uri="{FF2B5EF4-FFF2-40B4-BE49-F238E27FC236}">
-                <a16:creationId xmlns:a16="http://schemas.microsoft.com/office/drawing/2014/main" id="{F8A17BCC-393D-48FB-8CCD-31D1E0C6FA40}"/>
+                <a16:creationId xmlns:a16="http://schemas.microsoft.com/office/drawing/2014/main" xmlns="" id="{F8A17BCC-393D-48FB-8CCD-31D1E0C6FA40}"/>
               </a:ext>
             </a:extLst>
           </p:cNvPr>
@@ -12059,7 +11033,7 @@
           <p:cNvPr id="2" name="Rectangle 3">
             <a:extLst>
               <a:ext uri="{FF2B5EF4-FFF2-40B4-BE49-F238E27FC236}">
-                <a16:creationId xmlns:a16="http://schemas.microsoft.com/office/drawing/2014/main" id="{A54EDB4F-7D4C-4F34-9AD3-169F9858A5EE}"/>
+                <a16:creationId xmlns:a16="http://schemas.microsoft.com/office/drawing/2014/main" xmlns="" id="{A54EDB4F-7D4C-4F34-9AD3-169F9858A5EE}"/>
               </a:ext>
             </a:extLst>
           </p:cNvPr>
@@ -12305,7 +11279,7 @@
           <p:cNvPr id="5" name="Rectangle 3">
             <a:extLst>
               <a:ext uri="{FF2B5EF4-FFF2-40B4-BE49-F238E27FC236}">
-                <a16:creationId xmlns:a16="http://schemas.microsoft.com/office/drawing/2014/main" id="{AA8DFBA5-2441-4C97-8340-430BD863557C}"/>
+                <a16:creationId xmlns:a16="http://schemas.microsoft.com/office/drawing/2014/main" xmlns="" id="{AA8DFBA5-2441-4C97-8340-430BD863557C}"/>
               </a:ext>
             </a:extLst>
           </p:cNvPr>
@@ -12532,7 +11506,7 @@
           <p:cNvPr id="5" name="Rectangle 3">
             <a:extLst>
               <a:ext uri="{FF2B5EF4-FFF2-40B4-BE49-F238E27FC236}">
-                <a16:creationId xmlns:a16="http://schemas.microsoft.com/office/drawing/2014/main" id="{D8B4ACE8-FA36-4C9A-B2D0-93D5FB40D304}"/>
+                <a16:creationId xmlns:a16="http://schemas.microsoft.com/office/drawing/2014/main" xmlns="" id="{D8B4ACE8-FA36-4C9A-B2D0-93D5FB40D304}"/>
               </a:ext>
             </a:extLst>
           </p:cNvPr>
@@ -12606,7 +11580,7 @@
           <p:cNvPr id="1026" name="Rectangle 2">
             <a:extLst>
               <a:ext uri="{FF2B5EF4-FFF2-40B4-BE49-F238E27FC236}">
-                <a16:creationId xmlns:a16="http://schemas.microsoft.com/office/drawing/2014/main" id="{40B05D94-0FBF-40E0-A0E2-9EC3FEAB3CBA}"/>
+                <a16:creationId xmlns:a16="http://schemas.microsoft.com/office/drawing/2014/main" xmlns="" id="{40B05D94-0FBF-40E0-A0E2-9EC3FEAB3CBA}"/>
               </a:ext>
             </a:extLst>
           </p:cNvPr>
@@ -12699,7 +11673,7 @@
           <p:cNvPr id="486403" name="Rectangle 3">
             <a:extLst>
               <a:ext uri="{FF2B5EF4-FFF2-40B4-BE49-F238E27FC236}">
-                <a16:creationId xmlns:a16="http://schemas.microsoft.com/office/drawing/2014/main" id="{A6119F77-21C9-4FBD-95D1-4884EA2BEF6F}"/>
+                <a16:creationId xmlns:a16="http://schemas.microsoft.com/office/drawing/2014/main" xmlns="" id="{A6119F77-21C9-4FBD-95D1-4884EA2BEF6F}"/>
               </a:ext>
             </a:extLst>
           </p:cNvPr>
@@ -12760,7 +11734,7 @@
           <p:cNvPr id="1028" name="Text Box 4">
             <a:extLst>
               <a:ext uri="{FF2B5EF4-FFF2-40B4-BE49-F238E27FC236}">
-                <a16:creationId xmlns:a16="http://schemas.microsoft.com/office/drawing/2014/main" id="{DB0C920A-6775-4600-AD1D-310553D67F86}"/>
+                <a16:creationId xmlns:a16="http://schemas.microsoft.com/office/drawing/2014/main" xmlns="" id="{DB0C920A-6775-4600-AD1D-310553D67F86}"/>
               </a:ext>
             </a:extLst>
           </p:cNvPr>
@@ -12920,7 +11894,7 @@
           <p:cNvPr id="486405" name="Text Box 5">
             <a:extLst>
               <a:ext uri="{FF2B5EF4-FFF2-40B4-BE49-F238E27FC236}">
-                <a16:creationId xmlns:a16="http://schemas.microsoft.com/office/drawing/2014/main" id="{7FED4366-B3D8-4635-90AF-59F6E59B903B}"/>
+                <a16:creationId xmlns:a16="http://schemas.microsoft.com/office/drawing/2014/main" xmlns="" id="{7FED4366-B3D8-4635-90AF-59F6E59B903B}"/>
               </a:ext>
             </a:extLst>
           </p:cNvPr>
@@ -13099,7 +12073,7 @@
           <p:cNvPr id="486406" name="Rectangle 6">
             <a:extLst>
               <a:ext uri="{FF2B5EF4-FFF2-40B4-BE49-F238E27FC236}">
-                <a16:creationId xmlns:a16="http://schemas.microsoft.com/office/drawing/2014/main" id="{0CE0643F-4358-4AEC-B259-E86C95F0ED4B}"/>
+                <a16:creationId xmlns:a16="http://schemas.microsoft.com/office/drawing/2014/main" xmlns="" id="{0CE0643F-4358-4AEC-B259-E86C95F0ED4B}"/>
               </a:ext>
             </a:extLst>
           </p:cNvPr>
@@ -13147,7 +12121,7 @@
           <p:cNvPr id="1031" name="Text Box 7">
             <a:extLst>
               <a:ext uri="{FF2B5EF4-FFF2-40B4-BE49-F238E27FC236}">
-                <a16:creationId xmlns:a16="http://schemas.microsoft.com/office/drawing/2014/main" id="{00361987-037F-4498-968A-B3CB9D3A9E08}"/>
+                <a16:creationId xmlns:a16="http://schemas.microsoft.com/office/drawing/2014/main" xmlns="" id="{00361987-037F-4498-968A-B3CB9D3A9E08}"/>
               </a:ext>
             </a:extLst>
           </p:cNvPr>
@@ -13332,7 +12306,7 @@
           <p:cNvPr id="1032" name="Freeform 8">
             <a:extLst>
               <a:ext uri="{FF2B5EF4-FFF2-40B4-BE49-F238E27FC236}">
-                <a16:creationId xmlns:a16="http://schemas.microsoft.com/office/drawing/2014/main" id="{0669EEB5-E1E1-4615-B40A-87AE23727066}"/>
+                <a16:creationId xmlns:a16="http://schemas.microsoft.com/office/drawing/2014/main" xmlns="" id="{0669EEB5-E1E1-4615-B40A-87AE23727066}"/>
               </a:ext>
             </a:extLst>
           </p:cNvPr>
@@ -13920,7 +12894,7 @@
           <p:cNvPr id="11" name="Picture 10" descr="Cover-6Ed">
             <a:extLst>
               <a:ext uri="{FF2B5EF4-FFF2-40B4-BE49-F238E27FC236}">
-                <a16:creationId xmlns:a16="http://schemas.microsoft.com/office/drawing/2014/main" id="{8415B884-A6BF-4E61-8F45-53870045B346}"/>
+                <a16:creationId xmlns:a16="http://schemas.microsoft.com/office/drawing/2014/main" xmlns="" id="{8415B884-A6BF-4E61-8F45-53870045B346}"/>
               </a:ext>
             </a:extLst>
           </p:cNvPr>
@@ -13980,7 +12954,7 @@
           <p:cNvPr id="10" name="Picture 9" descr="Cover-6Ed">
             <a:extLst>
               <a:ext uri="{FF2B5EF4-FFF2-40B4-BE49-F238E27FC236}">
-                <a16:creationId xmlns:a16="http://schemas.microsoft.com/office/drawing/2014/main" id="{A69B54C0-8EB7-4834-9342-A9C86C117E2A}"/>
+                <a16:creationId xmlns:a16="http://schemas.microsoft.com/office/drawing/2014/main" xmlns="" id="{A69B54C0-8EB7-4834-9342-A9C86C117E2A}"/>
               </a:ext>
             </a:extLst>
           </p:cNvPr>
@@ -18956,764 +17930,6 @@
       </p:grpSpPr>
       <p:sp>
         <p:nvSpPr>
-          <p:cNvPr id="458754" name="Rectangle 2"/>
-          <p:cNvSpPr>
-            <a:spLocks noGrp="1" noChangeArrowheads="1"/>
-          </p:cNvSpPr>
-          <p:nvPr>
-            <p:ph type="title"/>
-          </p:nvPr>
-        </p:nvSpPr>
-        <p:spPr/>
-        <p:txBody>
-          <a:bodyPr/>
-          <a:lstStyle/>
-          <a:p>
-            <a:pPr>
-              <a:defRPr/>
-            </a:pPr>
-            <a:r>
-              <a:rPr lang="en-US" dirty="0" smtClean="0">
-                <a:effectLst>
-                  <a:outerShdw blurRad="38100" dist="38100" dir="2700000" algn="tl">
-                    <a:srgbClr val="C0C0C0"/>
-                  </a:outerShdw>
-                </a:effectLst>
-              </a:rPr>
-              <a:t>Testing for Serializability </a:t>
-            </a:r>
-            <a:endParaRPr lang="en-US" dirty="0">
-              <a:effectLst>
-                <a:outerShdw blurRad="38100" dist="38100" dir="2700000" algn="tl">
-                  <a:srgbClr val="C0C0C0"/>
-                </a:outerShdw>
-              </a:effectLst>
-            </a:endParaRPr>
-          </a:p>
-        </p:txBody>
-      </p:sp>
-      <p:sp>
-        <p:nvSpPr>
-          <p:cNvPr id="28675" name="Rectangle 3"/>
-          <p:cNvSpPr>
-            <a:spLocks noGrp="1" noChangeArrowheads="1"/>
-          </p:cNvSpPr>
-          <p:nvPr>
-            <p:ph idx="1"/>
-          </p:nvPr>
-        </p:nvSpPr>
-        <p:spPr>
-          <a:xfrm>
-            <a:off x="692458" y="1102497"/>
-            <a:ext cx="7522855" cy="5367972"/>
-          </a:xfrm>
-        </p:spPr>
-        <p:txBody>
-          <a:bodyPr/>
-          <a:lstStyle/>
-          <a:p>
-            <a:r>
-              <a:rPr lang="en-US" altLang="en-US" dirty="0"/>
-              <a:t>Consider some schedule of a set of transactions </a:t>
-            </a:r>
-            <a:r>
-              <a:rPr lang="en-US" altLang="en-US" i="1" dirty="0"/>
-              <a:t>T</a:t>
-            </a:r>
-            <a:r>
-              <a:rPr lang="en-US" altLang="en-US" baseline="-25000" dirty="0"/>
-              <a:t>1</a:t>
-            </a:r>
-            <a:r>
-              <a:rPr lang="en-US" altLang="en-US" dirty="0"/>
-              <a:t>, </a:t>
-            </a:r>
-            <a:r>
-              <a:rPr lang="en-US" altLang="en-US" i="1" dirty="0"/>
-              <a:t>T</a:t>
-            </a:r>
-            <a:r>
-              <a:rPr lang="en-US" altLang="en-US" baseline="-25000" dirty="0"/>
-              <a:t>2</a:t>
-            </a:r>
-            <a:r>
-              <a:rPr lang="en-US" altLang="en-US" dirty="0"/>
-              <a:t>, ..., </a:t>
-            </a:r>
-            <a:r>
-              <a:rPr lang="en-US" altLang="en-US" i="1" dirty="0"/>
-              <a:t>T</a:t>
-            </a:r>
-            <a:r>
-              <a:rPr lang="en-US" altLang="en-US" i="1" baseline="-25000" dirty="0"/>
-              <a:t>n</a:t>
-            </a:r>
-            <a:endParaRPr lang="en-US" altLang="en-US" dirty="0"/>
-          </a:p>
-          <a:p>
-            <a:r>
-              <a:rPr lang="en-US" altLang="en-US" b="1" dirty="0">
-                <a:solidFill>
-                  <a:srgbClr val="000099"/>
-                </a:solidFill>
-              </a:rPr>
-              <a:t>Precedence graph</a:t>
-            </a:r>
-            <a:r>
-              <a:rPr lang="en-US" altLang="en-US" i="1" dirty="0"/>
-              <a:t> </a:t>
-            </a:r>
-            <a:r>
-              <a:rPr lang="en-US" altLang="en-US" dirty="0"/>
-              <a:t>— a direct graph where the vertices are the transactions (names).</a:t>
-            </a:r>
-          </a:p>
-          <a:p>
-            <a:r>
-              <a:rPr lang="en-US" altLang="en-US" dirty="0"/>
-              <a:t>We draw an arc from </a:t>
-            </a:r>
-            <a:r>
-              <a:rPr lang="en-US" altLang="en-US" i="1" dirty="0"/>
-              <a:t>T</a:t>
-            </a:r>
-            <a:r>
-              <a:rPr lang="en-US" altLang="en-US" i="1" baseline="-25000" dirty="0"/>
-              <a:t>i</a:t>
-            </a:r>
-            <a:r>
-              <a:rPr lang="en-US" altLang="en-US" i="1" dirty="0"/>
-              <a:t> </a:t>
-            </a:r>
-            <a:r>
-              <a:rPr lang="en-US" altLang="en-US" dirty="0"/>
-              <a:t>to </a:t>
-            </a:r>
-            <a:r>
-              <a:rPr lang="en-US" altLang="en-US" i="1" dirty="0"/>
-              <a:t>T</a:t>
-            </a:r>
-            <a:r>
-              <a:rPr lang="en-US" altLang="en-US" i="1" baseline="-25000" dirty="0"/>
-              <a:t>j</a:t>
-            </a:r>
-            <a:r>
-              <a:rPr lang="en-US" altLang="en-US" i="1" dirty="0"/>
-              <a:t> </a:t>
-            </a:r>
-            <a:r>
-              <a:rPr lang="en-US" altLang="en-US" dirty="0"/>
-              <a:t>if the two transaction conflict, and </a:t>
-            </a:r>
-            <a:r>
-              <a:rPr lang="en-US" altLang="en-US" i="1" dirty="0"/>
-              <a:t>T</a:t>
-            </a:r>
-            <a:r>
-              <a:rPr lang="en-US" altLang="en-US" i="1" baseline="-25000" dirty="0"/>
-              <a:t>i</a:t>
-            </a:r>
-            <a:r>
-              <a:rPr lang="en-US" altLang="en-US" i="1" dirty="0"/>
-              <a:t> </a:t>
-            </a:r>
-            <a:r>
-              <a:rPr lang="en-US" altLang="en-US" dirty="0"/>
-              <a:t>accessed the data item on which the conflict arose earlier.</a:t>
-            </a:r>
-          </a:p>
-          <a:p>
-            <a:r>
-              <a:rPr lang="en-US" altLang="en-US" dirty="0"/>
-              <a:t>We may label the arc by the item that was accessed.</a:t>
-            </a:r>
-          </a:p>
-          <a:p>
-            <a:r>
-              <a:rPr lang="en-US" altLang="en-US" dirty="0"/>
-              <a:t>Example</a:t>
-            </a:r>
-            <a:r>
-              <a:rPr lang="en-US" altLang="en-US" b="1" dirty="0"/>
-              <a:t> </a:t>
-            </a:r>
-            <a:r>
-              <a:rPr lang="en-US" altLang="en-US" dirty="0" smtClean="0"/>
-              <a:t>of a precedence graph</a:t>
-            </a:r>
-            <a:endParaRPr lang="en-US" altLang="en-US" dirty="0"/>
-          </a:p>
-        </p:txBody>
-      </p:sp>
-      <p:pic>
-        <p:nvPicPr>
-          <p:cNvPr id="28676" name="Picture 11"/>
-          <p:cNvPicPr>
-            <a:picLocks noChangeAspect="1" noChangeArrowheads="1"/>
-          </p:cNvPicPr>
-          <p:nvPr/>
-        </p:nvPicPr>
-        <p:blipFill>
-          <a:blip r:embed="rId3">
-            <a:extLst>
-              <a:ext uri="{28A0092B-C50C-407E-A947-70E740481C1C}">
-                <a14:useLocalDpi xmlns:a14="http://schemas.microsoft.com/office/drawing/2010/main" val="0"/>
-              </a:ext>
-            </a:extLst>
-          </a:blip>
-          <a:srcRect/>
-          <a:stretch>
-            <a:fillRect/>
-          </a:stretch>
-        </p:blipFill>
-        <p:spPr bwMode="auto">
-          <a:xfrm>
-            <a:off x="3256379" y="3471867"/>
-            <a:ext cx="2174782" cy="1365250"/>
-          </a:xfrm>
-          <a:prstGeom prst="rect">
-            <a:avLst/>
-          </a:prstGeom>
-          <a:noFill/>
-          <a:ln>
-            <a:noFill/>
-          </a:ln>
-          <a:extLst>
-            <a:ext uri="{909E8E84-426E-40DD-AFC4-6F175D3DCCD1}">
-              <a14:hiddenFill xmlns:a14="http://schemas.microsoft.com/office/drawing/2010/main">
-                <a:solidFill>
-                  <a:srgbClr val="FFFFFF"/>
-                </a:solidFill>
-              </a14:hiddenFill>
-            </a:ext>
-            <a:ext uri="{91240B29-F687-4F45-9708-019B960494DF}">
-              <a14:hiddenLine xmlns:a14="http://schemas.microsoft.com/office/drawing/2010/main" w="9525">
-                <a:solidFill>
-                  <a:srgbClr val="000000"/>
-                </a:solidFill>
-                <a:miter lim="800000"/>
-                <a:headEnd/>
-                <a:tailEnd/>
-              </a14:hiddenLine>
-            </a:ext>
-          </a:extLst>
-        </p:spPr>
-      </p:pic>
-    </p:spTree>
-  </p:cSld>
-  <p:clrMapOvr>
-    <a:masterClrMapping/>
-  </p:clrMapOvr>
-</p:sld>
-</file>
-
-<file path=ppt/slides/slide26.xml><?xml version="1.0" encoding="utf-8"?>
-<p:sld xmlns:a="http://schemas.openxmlformats.org/drawingml/2006/main" xmlns:r="http://schemas.openxmlformats.org/officeDocument/2006/relationships" xmlns:p="http://schemas.openxmlformats.org/presentationml/2006/main">
-  <p:cSld>
-    <p:spTree>
-      <p:nvGrpSpPr>
-        <p:cNvPr id="1" name=""/>
-        <p:cNvGrpSpPr/>
-        <p:nvPr/>
-      </p:nvGrpSpPr>
-      <p:grpSpPr>
-        <a:xfrm>
-          <a:off x="0" y="0"/>
-          <a:ext cx="0" cy="0"/>
-          <a:chOff x="0" y="0"/>
-          <a:chExt cx="0" cy="0"/>
-        </a:xfrm>
-      </p:grpSpPr>
-      <p:sp>
-        <p:nvSpPr>
-          <p:cNvPr id="461826" name="Rectangle 2"/>
-          <p:cNvSpPr>
-            <a:spLocks noGrp="1" noChangeArrowheads="1"/>
-          </p:cNvSpPr>
-          <p:nvPr>
-            <p:ph type="title"/>
-          </p:nvPr>
-        </p:nvSpPr>
-        <p:spPr/>
-        <p:txBody>
-          <a:bodyPr/>
-          <a:lstStyle/>
-          <a:p>
-            <a:pPr>
-              <a:defRPr/>
-            </a:pPr>
-            <a:r>
-              <a:rPr lang="en-US" dirty="0">
-                <a:effectLst>
-                  <a:outerShdw blurRad="38100" dist="38100" dir="2700000" algn="tl">
-                    <a:srgbClr val="C0C0C0"/>
-                  </a:outerShdw>
-                </a:effectLst>
-              </a:rPr>
-              <a:t>Test for Conflict Serializability</a:t>
-            </a:r>
-          </a:p>
-        </p:txBody>
-      </p:sp>
-      <p:sp>
-        <p:nvSpPr>
-          <p:cNvPr id="29699" name="Rectangle 3"/>
-          <p:cNvSpPr>
-            <a:spLocks noGrp="1" noChangeArrowheads="1"/>
-          </p:cNvSpPr>
-          <p:nvPr>
-            <p:ph idx="1"/>
-          </p:nvPr>
-        </p:nvSpPr>
-        <p:spPr>
-          <a:xfrm>
-            <a:off x="665825" y="1102497"/>
-            <a:ext cx="4919966" cy="5367972"/>
-          </a:xfrm>
-        </p:spPr>
-        <p:txBody>
-          <a:bodyPr/>
-          <a:lstStyle/>
-          <a:p>
-            <a:r>
-              <a:rPr lang="en-US" altLang="en-US" dirty="0"/>
-              <a:t>A schedule is conflict serializable if and only if its precedence graph is acyclic.</a:t>
-            </a:r>
-          </a:p>
-          <a:p>
-            <a:r>
-              <a:rPr lang="en-US" altLang="en-US" dirty="0"/>
-              <a:t>Cycle-detection algorithms exist which take order </a:t>
-            </a:r>
-            <a:r>
-              <a:rPr lang="en-US" altLang="en-US" i="1" dirty="0"/>
-              <a:t>n</a:t>
-            </a:r>
-            <a:r>
-              <a:rPr lang="en-US" altLang="en-US" baseline="30000" dirty="0"/>
-              <a:t>2</a:t>
-            </a:r>
-            <a:r>
-              <a:rPr lang="en-US" altLang="en-US" dirty="0"/>
-              <a:t> time, where </a:t>
-            </a:r>
-            <a:r>
-              <a:rPr lang="en-US" altLang="en-US" i="1" dirty="0"/>
-              <a:t>n </a:t>
-            </a:r>
-            <a:r>
-              <a:rPr lang="en-US" altLang="en-US" dirty="0"/>
-              <a:t>is the number of vertices in the graph.  </a:t>
-            </a:r>
-          </a:p>
-          <a:p>
-            <a:pPr lvl="1"/>
-            <a:r>
-              <a:rPr lang="en-US" altLang="en-US" dirty="0"/>
-              <a:t>(Better algorithms take order </a:t>
-            </a:r>
-            <a:r>
-              <a:rPr lang="en-US" altLang="en-US" i="1" dirty="0"/>
-              <a:t>n</a:t>
-            </a:r>
-            <a:r>
-              <a:rPr lang="en-US" altLang="en-US" dirty="0"/>
-              <a:t> + </a:t>
-            </a:r>
-            <a:r>
-              <a:rPr lang="en-US" altLang="en-US" i="1" dirty="0"/>
-              <a:t>e</a:t>
-            </a:r>
-            <a:r>
-              <a:rPr lang="en-US" altLang="en-US" dirty="0"/>
-              <a:t> where </a:t>
-            </a:r>
-            <a:r>
-              <a:rPr lang="en-US" altLang="en-US" i="1" dirty="0"/>
-              <a:t>e</a:t>
-            </a:r>
-            <a:r>
-              <a:rPr lang="en-US" altLang="en-US" dirty="0"/>
-              <a:t> is the number of edges.)</a:t>
-            </a:r>
-          </a:p>
-          <a:p>
-            <a:r>
-              <a:rPr lang="en-US" altLang="en-US" dirty="0"/>
-              <a:t>If precedence graph is acyclic, the serializability order can be obtained by a </a:t>
-            </a:r>
-            <a:r>
-              <a:rPr lang="en-US" altLang="en-US" i="1" dirty="0">
-                <a:solidFill>
-                  <a:srgbClr val="000099"/>
-                </a:solidFill>
-              </a:rPr>
-              <a:t>topological sorting</a:t>
-            </a:r>
-            <a:r>
-              <a:rPr lang="en-US" altLang="en-US" dirty="0"/>
-              <a:t> of the graph. </a:t>
-            </a:r>
-          </a:p>
-          <a:p>
-            <a:pPr lvl="1"/>
-            <a:r>
-              <a:rPr lang="en-US" altLang="en-US" dirty="0"/>
-              <a:t> This is a linear order consistent with the partial order of the graph.</a:t>
-            </a:r>
-          </a:p>
-          <a:p>
-            <a:pPr lvl="1"/>
-            <a:r>
-              <a:rPr lang="en-US" altLang="en-US" dirty="0"/>
-              <a:t>For example, a serializability order for Schedule A would be</a:t>
-            </a:r>
-            <a:br>
-              <a:rPr lang="en-US" altLang="en-US" dirty="0"/>
-            </a:br>
-            <a:r>
-              <a:rPr lang="en-US" altLang="en-US" i="1" dirty="0"/>
-              <a:t>T</a:t>
-            </a:r>
-            <a:r>
-              <a:rPr lang="en-US" altLang="en-US" baseline="-25000" dirty="0"/>
-              <a:t>5</a:t>
-            </a:r>
-            <a:r>
-              <a:rPr lang="en-US" altLang="en-US" dirty="0"/>
-              <a:t> </a:t>
-            </a:r>
-            <a:r>
-              <a:rPr lang="en-US" altLang="en-US" dirty="0">
-                <a:sym typeface="Symbol" panose="05050102010706020507" pitchFamily="18" charset="2"/>
-              </a:rPr>
-              <a:t></a:t>
-            </a:r>
-            <a:r>
-              <a:rPr lang="en-US" altLang="en-US" dirty="0">
-                <a:sym typeface="Monotype Sorts" charset="2"/>
-              </a:rPr>
-              <a:t> </a:t>
-            </a:r>
-            <a:r>
-              <a:rPr lang="en-US" altLang="en-US" i="1" dirty="0"/>
-              <a:t>T</a:t>
-            </a:r>
-            <a:r>
-              <a:rPr lang="en-US" altLang="en-US" baseline="-25000" dirty="0"/>
-              <a:t>1</a:t>
-            </a:r>
-            <a:r>
-              <a:rPr lang="en-US" altLang="en-US" dirty="0"/>
-              <a:t> </a:t>
-            </a:r>
-            <a:r>
-              <a:rPr lang="en-US" altLang="en-US" dirty="0">
-                <a:sym typeface="Symbol" panose="05050102010706020507" pitchFamily="18" charset="2"/>
-              </a:rPr>
-              <a:t></a:t>
-            </a:r>
-            <a:r>
-              <a:rPr lang="en-US" altLang="en-US" dirty="0">
-                <a:sym typeface="Monotype Sorts" charset="2"/>
-              </a:rPr>
-              <a:t> </a:t>
-            </a:r>
-            <a:r>
-              <a:rPr lang="en-US" altLang="en-US" i="1" dirty="0"/>
-              <a:t>T</a:t>
-            </a:r>
-            <a:r>
-              <a:rPr lang="en-US" altLang="en-US" baseline="-25000" dirty="0"/>
-              <a:t>3</a:t>
-            </a:r>
-            <a:r>
-              <a:rPr lang="en-US" altLang="en-US" dirty="0"/>
-              <a:t> </a:t>
-            </a:r>
-            <a:r>
-              <a:rPr lang="en-US" altLang="en-US" dirty="0">
-                <a:sym typeface="Symbol" panose="05050102010706020507" pitchFamily="18" charset="2"/>
-              </a:rPr>
-              <a:t></a:t>
-            </a:r>
-            <a:r>
-              <a:rPr lang="en-US" altLang="en-US" dirty="0">
-                <a:sym typeface="Monotype Sorts" charset="2"/>
-              </a:rPr>
-              <a:t> </a:t>
-            </a:r>
-            <a:r>
-              <a:rPr lang="en-US" altLang="en-US" i="1" dirty="0"/>
-              <a:t>T</a:t>
-            </a:r>
-            <a:r>
-              <a:rPr lang="en-US" altLang="en-US" baseline="-25000" dirty="0"/>
-              <a:t>2</a:t>
-            </a:r>
-            <a:r>
-              <a:rPr lang="en-US" altLang="en-US" dirty="0"/>
-              <a:t> </a:t>
-            </a:r>
-            <a:r>
-              <a:rPr lang="en-US" altLang="en-US" dirty="0">
-                <a:sym typeface="Symbol" panose="05050102010706020507" pitchFamily="18" charset="2"/>
-              </a:rPr>
-              <a:t></a:t>
-            </a:r>
-            <a:r>
-              <a:rPr lang="en-US" altLang="en-US" dirty="0">
-                <a:sym typeface="Monotype Sorts" charset="2"/>
-              </a:rPr>
-              <a:t> </a:t>
-            </a:r>
-            <a:r>
-              <a:rPr lang="en-US" altLang="en-US" i="1" dirty="0"/>
-              <a:t>T</a:t>
-            </a:r>
-            <a:r>
-              <a:rPr lang="en-US" altLang="en-US" baseline="-25000" dirty="0"/>
-              <a:t>4</a:t>
-            </a:r>
-            <a:endParaRPr lang="en-US" altLang="en-US" dirty="0"/>
-          </a:p>
-          <a:p>
-            <a:pPr lvl="2"/>
-            <a:r>
-              <a:rPr lang="en-US" altLang="en-US" dirty="0">
-                <a:sym typeface="Monotype Sorts" charset="2"/>
-              </a:rPr>
-              <a:t>Are there others?</a:t>
-            </a:r>
-          </a:p>
-        </p:txBody>
-      </p:sp>
-      <p:pic>
-        <p:nvPicPr>
-          <p:cNvPr id="29700" name="Picture 7"/>
-          <p:cNvPicPr>
-            <a:picLocks noChangeAspect="1" noChangeArrowheads="1"/>
-          </p:cNvPicPr>
-          <p:nvPr/>
-        </p:nvPicPr>
-        <p:blipFill>
-          <a:blip r:embed="rId3">
-            <a:extLst>
-              <a:ext uri="{28A0092B-C50C-407E-A947-70E740481C1C}">
-                <a14:useLocalDpi xmlns:a14="http://schemas.microsoft.com/office/drawing/2010/main" val="0"/>
-              </a:ext>
-            </a:extLst>
-          </a:blip>
-          <a:srcRect/>
-          <a:stretch>
-            <a:fillRect/>
-          </a:stretch>
-        </p:blipFill>
-        <p:spPr bwMode="auto">
-          <a:xfrm>
-            <a:off x="5789613" y="1055688"/>
-            <a:ext cx="2954337" cy="5340350"/>
-          </a:xfrm>
-          <a:prstGeom prst="rect">
-            <a:avLst/>
-          </a:prstGeom>
-          <a:noFill/>
-          <a:ln>
-            <a:noFill/>
-          </a:ln>
-          <a:extLst>
-            <a:ext uri="{909E8E84-426E-40DD-AFC4-6F175D3DCCD1}">
-              <a14:hiddenFill xmlns:a14="http://schemas.microsoft.com/office/drawing/2010/main">
-                <a:solidFill>
-                  <a:srgbClr val="FFFFFF"/>
-                </a:solidFill>
-              </a14:hiddenFill>
-            </a:ext>
-            <a:ext uri="{91240B29-F687-4F45-9708-019B960494DF}">
-              <a14:hiddenLine xmlns:a14="http://schemas.microsoft.com/office/drawing/2010/main" w="9525">
-                <a:solidFill>
-                  <a:srgbClr val="000000"/>
-                </a:solidFill>
-                <a:miter lim="800000"/>
-                <a:headEnd/>
-                <a:tailEnd/>
-              </a14:hiddenLine>
-            </a:ext>
-          </a:extLst>
-        </p:spPr>
-      </p:pic>
-    </p:spTree>
-  </p:cSld>
-  <p:clrMapOvr>
-    <a:masterClrMapping/>
-  </p:clrMapOvr>
-</p:sld>
-</file>
-
-<file path=ppt/slides/slide27.xml><?xml version="1.0" encoding="utf-8"?>
-<p:sld xmlns:a="http://schemas.openxmlformats.org/drawingml/2006/main" xmlns:r="http://schemas.openxmlformats.org/officeDocument/2006/relationships" xmlns:p="http://schemas.openxmlformats.org/presentationml/2006/main">
-  <p:cSld>
-    <p:spTree>
-      <p:nvGrpSpPr>
-        <p:cNvPr id="1" name=""/>
-        <p:cNvGrpSpPr/>
-        <p:nvPr/>
-      </p:nvGrpSpPr>
-      <p:grpSpPr>
-        <a:xfrm>
-          <a:off x="0" y="0"/>
-          <a:ext cx="0" cy="0"/>
-          <a:chOff x="0" y="0"/>
-          <a:chExt cx="0" cy="0"/>
-        </a:xfrm>
-      </p:grpSpPr>
-      <p:sp>
-        <p:nvSpPr>
-          <p:cNvPr id="462850" name="Rectangle 2"/>
-          <p:cNvSpPr>
-            <a:spLocks noGrp="1" noChangeArrowheads="1"/>
-          </p:cNvSpPr>
-          <p:nvPr>
-            <p:ph type="title"/>
-          </p:nvPr>
-        </p:nvSpPr>
-        <p:spPr/>
-        <p:txBody>
-          <a:bodyPr/>
-          <a:lstStyle/>
-          <a:p>
-            <a:pPr>
-              <a:defRPr/>
-            </a:pPr>
-            <a:r>
-              <a:rPr lang="en-US" dirty="0">
-                <a:effectLst>
-                  <a:outerShdw blurRad="38100" dist="38100" dir="2700000" algn="tl">
-                    <a:srgbClr val="C0C0C0"/>
-                  </a:outerShdw>
-                </a:effectLst>
-              </a:rPr>
-              <a:t>Test for View Serializability</a:t>
-            </a:r>
-          </a:p>
-        </p:txBody>
-      </p:sp>
-      <p:sp>
-        <p:nvSpPr>
-          <p:cNvPr id="30723" name="Rectangle 3"/>
-          <p:cNvSpPr>
-            <a:spLocks noGrp="1" noChangeArrowheads="1"/>
-          </p:cNvSpPr>
-          <p:nvPr>
-            <p:ph idx="1"/>
-          </p:nvPr>
-        </p:nvSpPr>
-        <p:spPr>
-          <a:xfrm>
-            <a:off x="701336" y="1102497"/>
-            <a:ext cx="7581530" cy="5367972"/>
-          </a:xfrm>
-        </p:spPr>
-        <p:txBody>
-          <a:bodyPr/>
-          <a:lstStyle/>
-          <a:p>
-            <a:r>
-              <a:rPr lang="en-US" altLang="en-US" dirty="0"/>
-              <a:t>The precedence graph test for conflict serializability cannot be used directly to test for view serializability.</a:t>
-            </a:r>
-          </a:p>
-          <a:p>
-            <a:pPr lvl="1"/>
-            <a:r>
-              <a:rPr lang="en-US" altLang="en-US" dirty="0"/>
-              <a:t>Extension to test for view serializability has cost exponential in the size of the precedence graph.</a:t>
-            </a:r>
-          </a:p>
-          <a:p>
-            <a:r>
-              <a:rPr lang="en-US" altLang="en-US" dirty="0"/>
-              <a:t>The problem of checking if a schedule is view serializable falls in the class of </a:t>
-            </a:r>
-            <a:r>
-              <a:rPr lang="en-US" altLang="en-US" i="1" dirty="0"/>
-              <a:t>NP</a:t>
-            </a:r>
-            <a:r>
-              <a:rPr lang="en-US" altLang="en-US" dirty="0"/>
-              <a:t>-complete problems. </a:t>
-            </a:r>
-          </a:p>
-          <a:p>
-            <a:pPr lvl="1"/>
-            <a:r>
-              <a:rPr lang="en-US" altLang="en-US" dirty="0" smtClean="0"/>
-              <a:t>Thus, </a:t>
-            </a:r>
-            <a:r>
-              <a:rPr lang="en-US" altLang="en-US" dirty="0"/>
-              <a:t>existence of an efficient algorithm is </a:t>
-            </a:r>
-            <a:r>
-              <a:rPr lang="en-US" altLang="en-US" i="1" dirty="0"/>
-              <a:t>extremely</a:t>
-            </a:r>
-            <a:r>
-              <a:rPr lang="en-US" altLang="en-US" dirty="0"/>
-              <a:t> unlikely.</a:t>
-            </a:r>
-          </a:p>
-          <a:p>
-            <a:r>
-              <a:rPr lang="en-US" altLang="en-US" dirty="0"/>
-              <a:t>However practical algorithms that just check some </a:t>
-            </a:r>
-            <a:r>
-              <a:rPr lang="en-US" altLang="en-US" b="1" dirty="0"/>
-              <a:t>sufficient</a:t>
-            </a:r>
-            <a:r>
-              <a:rPr lang="en-US" altLang="en-US" i="1" dirty="0"/>
-              <a:t> </a:t>
-            </a:r>
-            <a:r>
-              <a:rPr lang="en-US" altLang="en-US" b="1" dirty="0"/>
-              <a:t>conditions</a:t>
-            </a:r>
-            <a:r>
-              <a:rPr lang="en-US" altLang="en-US" dirty="0"/>
-              <a:t> for view serializability can still be used.</a:t>
-            </a:r>
-          </a:p>
-        </p:txBody>
-      </p:sp>
-    </p:spTree>
-  </p:cSld>
-  <p:clrMapOvr>
-    <a:masterClrMapping/>
-  </p:clrMapOvr>
-</p:sld>
-</file>
-
-<file path=ppt/slides/slide28.xml><?xml version="1.0" encoding="utf-8"?>
-<p:sld xmlns:a="http://schemas.openxmlformats.org/drawingml/2006/main" xmlns:r="http://schemas.openxmlformats.org/officeDocument/2006/relationships" xmlns:p="http://schemas.openxmlformats.org/presentationml/2006/main">
-  <p:cSld>
-    <p:spTree>
-      <p:nvGrpSpPr>
-        <p:cNvPr id="1" name=""/>
-        <p:cNvGrpSpPr/>
-        <p:nvPr/>
-      </p:nvGrpSpPr>
-      <p:grpSpPr>
-        <a:xfrm>
-          <a:off x="0" y="0"/>
-          <a:ext cx="0" cy="0"/>
-          <a:chOff x="0" y="0"/>
-          <a:chExt cx="0" cy="0"/>
-        </a:xfrm>
-      </p:grpSpPr>
-      <p:sp>
-        <p:nvSpPr>
           <p:cNvPr id="401410" name="Rectangle 2"/>
           <p:cNvSpPr>
             <a:spLocks noGrp="1" noChangeArrowheads="1"/>
@@ -20195,7 +18411,7 @@
 </p:sld>
 </file>
 
-<file path=ppt/slides/slide29.xml><?xml version="1.0" encoding="utf-8"?>
+<file path=ppt/slides/slide26.xml><?xml version="1.0" encoding="utf-8"?>
 <p:sld xmlns:a="http://schemas.openxmlformats.org/drawingml/2006/main" xmlns:r="http://schemas.openxmlformats.org/officeDocument/2006/relationships" xmlns:p="http://schemas.openxmlformats.org/presentationml/2006/main">
   <p:cSld>
     <p:spTree>
@@ -20464,6 +18680,467 @@
           </a:extLst>
         </p:spPr>
       </p:pic>
+    </p:spTree>
+  </p:cSld>
+  <p:clrMapOvr>
+    <a:masterClrMapping/>
+  </p:clrMapOvr>
+</p:sld>
+</file>
+
+<file path=ppt/slides/slide27.xml><?xml version="1.0" encoding="utf-8"?>
+<p:sld xmlns:a="http://schemas.openxmlformats.org/drawingml/2006/main" xmlns:r="http://schemas.openxmlformats.org/officeDocument/2006/relationships" xmlns:p="http://schemas.openxmlformats.org/presentationml/2006/main">
+  <p:cSld>
+    <p:spTree>
+      <p:nvGrpSpPr>
+        <p:cNvPr id="1" name=""/>
+        <p:cNvGrpSpPr/>
+        <p:nvPr/>
+      </p:nvGrpSpPr>
+      <p:grpSpPr>
+        <a:xfrm>
+          <a:off x="0" y="0"/>
+          <a:ext cx="0" cy="0"/>
+          <a:chOff x="0" y="0"/>
+          <a:chExt cx="0" cy="0"/>
+        </a:xfrm>
+      </p:grpSpPr>
+      <p:sp>
+        <p:nvSpPr>
+          <p:cNvPr id="403458" name="Rectangle 2"/>
+          <p:cNvSpPr>
+            <a:spLocks noGrp="1" noChangeArrowheads="1"/>
+          </p:cNvSpPr>
+          <p:nvPr>
+            <p:ph type="title"/>
+          </p:nvPr>
+        </p:nvSpPr>
+        <p:spPr/>
+        <p:txBody>
+          <a:bodyPr/>
+          <a:lstStyle/>
+          <a:p>
+            <a:pPr>
+              <a:defRPr/>
+            </a:pPr>
+            <a:r>
+              <a:rPr lang="en-US" dirty="0">
+                <a:effectLst>
+                  <a:outerShdw blurRad="38100" dist="38100" dir="2700000" algn="tl">
+                    <a:srgbClr val="C0C0C0"/>
+                  </a:outerShdw>
+                </a:effectLst>
+              </a:rPr>
+              <a:t>Cascadeless Schedules</a:t>
+            </a:r>
+          </a:p>
+        </p:txBody>
+      </p:sp>
+      <p:sp>
+        <p:nvSpPr>
+          <p:cNvPr id="33795" name="Rectangle 3"/>
+          <p:cNvSpPr>
+            <a:spLocks noGrp="1" noChangeArrowheads="1"/>
+          </p:cNvSpPr>
+          <p:nvPr>
+            <p:ph idx="1"/>
+          </p:nvPr>
+        </p:nvSpPr>
+        <p:spPr>
+          <a:xfrm>
+            <a:off x="692458" y="1102497"/>
+            <a:ext cx="7776839" cy="5367972"/>
+          </a:xfrm>
+        </p:spPr>
+        <p:txBody>
+          <a:bodyPr/>
+          <a:lstStyle/>
+          <a:p>
+            <a:r>
+              <a:rPr lang="en-US" altLang="en-US" b="1" dirty="0">
+                <a:solidFill>
+                  <a:srgbClr val="000099"/>
+                </a:solidFill>
+              </a:rPr>
+              <a:t>Cascadeless</a:t>
+            </a:r>
+            <a:r>
+              <a:rPr lang="en-US" altLang="en-US" b="1" i="1" dirty="0">
+                <a:solidFill>
+                  <a:srgbClr val="000099"/>
+                </a:solidFill>
+              </a:rPr>
+              <a:t> </a:t>
+            </a:r>
+            <a:r>
+              <a:rPr lang="en-US" altLang="en-US" b="1" dirty="0">
+                <a:solidFill>
+                  <a:srgbClr val="000099"/>
+                </a:solidFill>
+              </a:rPr>
+              <a:t>schedules</a:t>
+            </a:r>
+            <a:r>
+              <a:rPr lang="en-US" altLang="en-US" dirty="0"/>
+              <a:t> — cascading rollbacks cannot occur;</a:t>
+            </a:r>
+          </a:p>
+          <a:p>
+            <a:pPr lvl="1"/>
+            <a:r>
+              <a:rPr lang="en-US" altLang="en-US" dirty="0"/>
+              <a:t>For each pair of transactions </a:t>
+            </a:r>
+            <a:r>
+              <a:rPr lang="en-US" altLang="en-US" i="1" dirty="0"/>
+              <a:t>T</a:t>
+            </a:r>
+            <a:r>
+              <a:rPr lang="en-US" altLang="en-US" i="1" baseline="-25000" dirty="0"/>
+              <a:t>i</a:t>
+            </a:r>
+            <a:r>
+              <a:rPr lang="en-US" altLang="en-US" i="1" dirty="0"/>
+              <a:t> </a:t>
+            </a:r>
+            <a:r>
+              <a:rPr lang="en-US" altLang="en-US" dirty="0"/>
+              <a:t>and </a:t>
+            </a:r>
+            <a:r>
+              <a:rPr lang="en-US" altLang="en-US" i="1" dirty="0"/>
+              <a:t>T</a:t>
+            </a:r>
+            <a:r>
+              <a:rPr lang="en-US" altLang="en-US" i="1" baseline="-25000" dirty="0"/>
+              <a:t>j</a:t>
+            </a:r>
+            <a:r>
+              <a:rPr lang="en-US" altLang="en-US" dirty="0"/>
+              <a:t> such that </a:t>
+            </a:r>
+            <a:r>
+              <a:rPr lang="en-US" altLang="en-US" i="1" dirty="0"/>
+              <a:t>T</a:t>
+            </a:r>
+            <a:r>
+              <a:rPr lang="en-US" altLang="en-US" i="1" baseline="-25000" dirty="0"/>
+              <a:t>j</a:t>
+            </a:r>
+            <a:r>
+              <a:rPr lang="en-US" altLang="en-US" dirty="0"/>
+              <a:t>  reads a data item previously written by </a:t>
+            </a:r>
+            <a:r>
+              <a:rPr lang="en-US" altLang="en-US" i="1" dirty="0"/>
+              <a:t>T</a:t>
+            </a:r>
+            <a:r>
+              <a:rPr lang="en-US" altLang="en-US" i="1" baseline="-25000" dirty="0"/>
+              <a:t>i</a:t>
+            </a:r>
+            <a:r>
+              <a:rPr lang="en-US" altLang="en-US" dirty="0"/>
+              <a:t>, the commit operation of </a:t>
+            </a:r>
+            <a:r>
+              <a:rPr lang="en-US" altLang="en-US" i="1" dirty="0"/>
+              <a:t>T</a:t>
+            </a:r>
+            <a:r>
+              <a:rPr lang="en-US" altLang="en-US" i="1" baseline="-25000" dirty="0"/>
+              <a:t>i</a:t>
+            </a:r>
+            <a:r>
+              <a:rPr lang="en-US" altLang="en-US" i="1" dirty="0"/>
+              <a:t> </a:t>
+            </a:r>
+            <a:r>
+              <a:rPr lang="en-US" altLang="en-US" dirty="0"/>
+              <a:t> appears before the read operation of </a:t>
+            </a:r>
+            <a:r>
+              <a:rPr lang="en-US" altLang="en-US" i="1" dirty="0"/>
+              <a:t>T</a:t>
+            </a:r>
+            <a:r>
+              <a:rPr lang="en-US" altLang="en-US" i="1" baseline="-25000" dirty="0"/>
+              <a:t>j</a:t>
+            </a:r>
+            <a:r>
+              <a:rPr lang="en-US" altLang="en-US" dirty="0"/>
+              <a:t>.</a:t>
+            </a:r>
+          </a:p>
+          <a:p>
+            <a:r>
+              <a:rPr lang="en-US" altLang="en-US" dirty="0"/>
+              <a:t>Every </a:t>
+            </a:r>
+            <a:r>
+              <a:rPr lang="en-US" altLang="en-US" dirty="0" smtClean="0"/>
+              <a:t>Cascadeless </a:t>
+            </a:r>
+            <a:r>
+              <a:rPr lang="en-US" altLang="en-US" dirty="0"/>
+              <a:t>schedule is also recoverable</a:t>
+            </a:r>
+          </a:p>
+          <a:p>
+            <a:r>
+              <a:rPr lang="en-US" altLang="en-US" dirty="0"/>
+              <a:t>It is desirable to restrict the schedules to those that are cascadeless</a:t>
+            </a:r>
+          </a:p>
+        </p:txBody>
+      </p:sp>
+    </p:spTree>
+  </p:cSld>
+  <p:clrMapOvr>
+    <a:masterClrMapping/>
+  </p:clrMapOvr>
+</p:sld>
+</file>
+
+<file path=ppt/slides/slide28.xml><?xml version="1.0" encoding="utf-8"?>
+<p:sld xmlns:a="http://schemas.openxmlformats.org/drawingml/2006/main" xmlns:r="http://schemas.openxmlformats.org/officeDocument/2006/relationships" xmlns:p="http://schemas.openxmlformats.org/presentationml/2006/main">
+  <p:cSld>
+    <p:spTree>
+      <p:nvGrpSpPr>
+        <p:cNvPr id="1" name=""/>
+        <p:cNvGrpSpPr/>
+        <p:nvPr/>
+      </p:nvGrpSpPr>
+      <p:grpSpPr>
+        <a:xfrm>
+          <a:off x="0" y="0"/>
+          <a:ext cx="0" cy="0"/>
+          <a:chOff x="0" y="0"/>
+          <a:chExt cx="0" cy="0"/>
+        </a:xfrm>
+      </p:grpSpPr>
+      <p:sp>
+        <p:nvSpPr>
+          <p:cNvPr id="465922" name="Rectangle 2"/>
+          <p:cNvSpPr>
+            <a:spLocks noGrp="1" noChangeArrowheads="1"/>
+          </p:cNvSpPr>
+          <p:nvPr>
+            <p:ph type="title"/>
+          </p:nvPr>
+        </p:nvSpPr>
+        <p:spPr/>
+        <p:txBody>
+          <a:bodyPr/>
+          <a:lstStyle/>
+          <a:p>
+            <a:pPr>
+              <a:defRPr/>
+            </a:pPr>
+            <a:r>
+              <a:rPr lang="en-US">
+                <a:effectLst>
+                  <a:outerShdw blurRad="38100" dist="38100" dir="2700000" algn="tl">
+                    <a:srgbClr val="C0C0C0"/>
+                  </a:outerShdw>
+                </a:effectLst>
+              </a:rPr>
+              <a:t>Concurrency Control</a:t>
+            </a:r>
+          </a:p>
+        </p:txBody>
+      </p:sp>
+      <p:sp>
+        <p:nvSpPr>
+          <p:cNvPr id="34819" name="Rectangle 3"/>
+          <p:cNvSpPr>
+            <a:spLocks noGrp="1" noChangeArrowheads="1"/>
+          </p:cNvSpPr>
+          <p:nvPr>
+            <p:ph idx="1"/>
+          </p:nvPr>
+        </p:nvSpPr>
+        <p:spPr>
+          <a:xfrm>
+            <a:off x="656948" y="1102497"/>
+            <a:ext cx="7812349" cy="5367972"/>
+          </a:xfrm>
+        </p:spPr>
+        <p:txBody>
+          <a:bodyPr/>
+          <a:lstStyle/>
+          <a:p>
+            <a:r>
+              <a:rPr lang="en-US" altLang="en-US" dirty="0"/>
+              <a:t>A database must provide a mechanism that will ensure that all possible schedules are </a:t>
+            </a:r>
+          </a:p>
+          <a:p>
+            <a:pPr lvl="1"/>
+            <a:r>
+              <a:rPr lang="en-US" altLang="en-US" dirty="0"/>
+              <a:t>either conflict or view serializable, and </a:t>
+            </a:r>
+          </a:p>
+          <a:p>
+            <a:pPr lvl="1"/>
+            <a:r>
+              <a:rPr lang="en-US" altLang="en-US" dirty="0"/>
+              <a:t>are recoverable and preferably cascadeless</a:t>
+            </a:r>
+          </a:p>
+          <a:p>
+            <a:r>
+              <a:rPr lang="en-US" altLang="en-US" dirty="0"/>
+              <a:t>A policy in which only one transaction can execute at a time generates serial schedules, but provides a poor degree of concurrency</a:t>
+            </a:r>
+          </a:p>
+          <a:p>
+            <a:pPr lvl="1"/>
+            <a:r>
+              <a:rPr lang="en-US" altLang="en-US" dirty="0"/>
+              <a:t>Are serial schedules recoverable/</a:t>
+            </a:r>
+            <a:r>
+              <a:rPr lang="en-US" altLang="en-US" dirty="0" err="1"/>
+              <a:t>cascadeless</a:t>
+            </a:r>
+            <a:r>
+              <a:rPr lang="en-US" altLang="en-US" dirty="0"/>
+              <a:t>?</a:t>
+            </a:r>
+          </a:p>
+          <a:p>
+            <a:r>
+              <a:rPr lang="en-US" altLang="en-US" dirty="0"/>
+              <a:t>Testing a schedule for serializability </a:t>
+            </a:r>
+            <a:r>
+              <a:rPr lang="en-US" altLang="en-US" i="1" dirty="0"/>
+              <a:t>after</a:t>
+            </a:r>
+            <a:r>
+              <a:rPr lang="en-US" altLang="en-US" dirty="0"/>
+              <a:t> it has executed is a little too late!</a:t>
+            </a:r>
+          </a:p>
+          <a:p>
+            <a:r>
+              <a:rPr lang="en-US" altLang="en-US" b="1" dirty="0">
+                <a:solidFill>
+                  <a:srgbClr val="000099"/>
+                </a:solidFill>
+              </a:rPr>
+              <a:t>Goal</a:t>
+            </a:r>
+            <a:r>
+              <a:rPr lang="en-US" altLang="en-US" dirty="0"/>
+              <a:t> – to develop concurrency control protocols that will assure serializability.</a:t>
+            </a:r>
+          </a:p>
+        </p:txBody>
+      </p:sp>
+    </p:spTree>
+  </p:cSld>
+  <p:clrMapOvr>
+    <a:masterClrMapping/>
+  </p:clrMapOvr>
+</p:sld>
+</file>
+
+<file path=ppt/slides/slide29.xml><?xml version="1.0" encoding="utf-8"?>
+<p:sld xmlns:a="http://schemas.openxmlformats.org/drawingml/2006/main" xmlns:r="http://schemas.openxmlformats.org/officeDocument/2006/relationships" xmlns:p="http://schemas.openxmlformats.org/presentationml/2006/main">
+  <p:cSld>
+    <p:spTree>
+      <p:nvGrpSpPr>
+        <p:cNvPr id="1" name=""/>
+        <p:cNvGrpSpPr/>
+        <p:nvPr/>
+      </p:nvGrpSpPr>
+      <p:grpSpPr>
+        <a:xfrm>
+          <a:off x="0" y="0"/>
+          <a:ext cx="0" cy="0"/>
+          <a:chOff x="0" y="0"/>
+          <a:chExt cx="0" cy="0"/>
+        </a:xfrm>
+      </p:grpSpPr>
+      <p:sp>
+        <p:nvSpPr>
+          <p:cNvPr id="603138" name="Rectangle 2"/>
+          <p:cNvSpPr>
+            <a:spLocks noGrp="1" noChangeArrowheads="1"/>
+          </p:cNvSpPr>
+          <p:nvPr>
+            <p:ph type="title"/>
+          </p:nvPr>
+        </p:nvSpPr>
+        <p:spPr/>
+        <p:txBody>
+          <a:bodyPr/>
+          <a:lstStyle/>
+          <a:p>
+            <a:pPr>
+              <a:defRPr/>
+            </a:pPr>
+            <a:r>
+              <a:rPr lang="en-US">
+                <a:effectLst>
+                  <a:outerShdw blurRad="38100" dist="38100" dir="2700000" algn="tl">
+                    <a:srgbClr val="C0C0C0"/>
+                  </a:outerShdw>
+                </a:effectLst>
+              </a:rPr>
+              <a:t>Concurrency Control (Cont.)</a:t>
+            </a:r>
+          </a:p>
+        </p:txBody>
+      </p:sp>
+      <p:sp>
+        <p:nvSpPr>
+          <p:cNvPr id="35843" name="Rectangle 3"/>
+          <p:cNvSpPr>
+            <a:spLocks noGrp="1" noChangeArrowheads="1"/>
+          </p:cNvSpPr>
+          <p:nvPr>
+            <p:ph idx="1"/>
+          </p:nvPr>
+        </p:nvSpPr>
+        <p:spPr>
+          <a:xfrm>
+            <a:off x="656948" y="1102497"/>
+            <a:ext cx="7803471" cy="5367972"/>
+          </a:xfrm>
+        </p:spPr>
+        <p:txBody>
+          <a:bodyPr/>
+          <a:lstStyle/>
+          <a:p>
+            <a:r>
+              <a:rPr lang="en-US" altLang="en-US" dirty="0"/>
+              <a:t>Schedules must be conflict or view serializable, and recoverable, for the sake of database consistency, and preferably cascadeless.</a:t>
+            </a:r>
+          </a:p>
+          <a:p>
+            <a:r>
+              <a:rPr lang="en-US" altLang="en-US" dirty="0"/>
+              <a:t>A policy in which only one transaction can execute at a time generates serial schedules, but provides a poor degree of concurrency.</a:t>
+            </a:r>
+          </a:p>
+          <a:p>
+            <a:r>
+              <a:rPr lang="en-US" altLang="en-US" dirty="0"/>
+              <a:t>Concurrency-control schemes tradeoff between the amount of concurrency they allow and the amount of overhead that they incur.</a:t>
+            </a:r>
+          </a:p>
+          <a:p>
+            <a:r>
+              <a:rPr lang="en-US" altLang="en-US" dirty="0"/>
+              <a:t>Some schemes allow only conflict-serializable schedules to be generated, while others allow  view-serializable schedules that are not conflict-serializable.</a:t>
+            </a:r>
+          </a:p>
+        </p:txBody>
+      </p:sp>
     </p:spTree>
   </p:cSld>
   <p:clrMapOvr>
@@ -20785,585 +19462,6 @@
       </p:grpSpPr>
       <p:sp>
         <p:nvSpPr>
-          <p:cNvPr id="403458" name="Rectangle 2"/>
-          <p:cNvSpPr>
-            <a:spLocks noGrp="1" noChangeArrowheads="1"/>
-          </p:cNvSpPr>
-          <p:nvPr>
-            <p:ph type="title"/>
-          </p:nvPr>
-        </p:nvSpPr>
-        <p:spPr/>
-        <p:txBody>
-          <a:bodyPr/>
-          <a:lstStyle/>
-          <a:p>
-            <a:pPr>
-              <a:defRPr/>
-            </a:pPr>
-            <a:r>
-              <a:rPr lang="en-US" dirty="0">
-                <a:effectLst>
-                  <a:outerShdw blurRad="38100" dist="38100" dir="2700000" algn="tl">
-                    <a:srgbClr val="C0C0C0"/>
-                  </a:outerShdw>
-                </a:effectLst>
-              </a:rPr>
-              <a:t>Cascadeless Schedules</a:t>
-            </a:r>
-          </a:p>
-        </p:txBody>
-      </p:sp>
-      <p:sp>
-        <p:nvSpPr>
-          <p:cNvPr id="33795" name="Rectangle 3"/>
-          <p:cNvSpPr>
-            <a:spLocks noGrp="1" noChangeArrowheads="1"/>
-          </p:cNvSpPr>
-          <p:nvPr>
-            <p:ph idx="1"/>
-          </p:nvPr>
-        </p:nvSpPr>
-        <p:spPr>
-          <a:xfrm>
-            <a:off x="692458" y="1102497"/>
-            <a:ext cx="7776839" cy="5367972"/>
-          </a:xfrm>
-        </p:spPr>
-        <p:txBody>
-          <a:bodyPr/>
-          <a:lstStyle/>
-          <a:p>
-            <a:r>
-              <a:rPr lang="en-US" altLang="en-US" b="1" dirty="0">
-                <a:solidFill>
-                  <a:srgbClr val="000099"/>
-                </a:solidFill>
-              </a:rPr>
-              <a:t>Cascadeless</a:t>
-            </a:r>
-            <a:r>
-              <a:rPr lang="en-US" altLang="en-US" b="1" i="1" dirty="0">
-                <a:solidFill>
-                  <a:srgbClr val="000099"/>
-                </a:solidFill>
-              </a:rPr>
-              <a:t> </a:t>
-            </a:r>
-            <a:r>
-              <a:rPr lang="en-US" altLang="en-US" b="1" dirty="0">
-                <a:solidFill>
-                  <a:srgbClr val="000099"/>
-                </a:solidFill>
-              </a:rPr>
-              <a:t>schedules</a:t>
-            </a:r>
-            <a:r>
-              <a:rPr lang="en-US" altLang="en-US" dirty="0"/>
-              <a:t> — cascading rollbacks cannot occur;</a:t>
-            </a:r>
-          </a:p>
-          <a:p>
-            <a:pPr lvl="1"/>
-            <a:r>
-              <a:rPr lang="en-US" altLang="en-US" dirty="0"/>
-              <a:t>For each pair of transactions </a:t>
-            </a:r>
-            <a:r>
-              <a:rPr lang="en-US" altLang="en-US" i="1" dirty="0"/>
-              <a:t>T</a:t>
-            </a:r>
-            <a:r>
-              <a:rPr lang="en-US" altLang="en-US" i="1" baseline="-25000" dirty="0"/>
-              <a:t>i</a:t>
-            </a:r>
-            <a:r>
-              <a:rPr lang="en-US" altLang="en-US" i="1" dirty="0"/>
-              <a:t> </a:t>
-            </a:r>
-            <a:r>
-              <a:rPr lang="en-US" altLang="en-US" dirty="0"/>
-              <a:t>and </a:t>
-            </a:r>
-            <a:r>
-              <a:rPr lang="en-US" altLang="en-US" i="1" dirty="0"/>
-              <a:t>T</a:t>
-            </a:r>
-            <a:r>
-              <a:rPr lang="en-US" altLang="en-US" i="1" baseline="-25000" dirty="0"/>
-              <a:t>j</a:t>
-            </a:r>
-            <a:r>
-              <a:rPr lang="en-US" altLang="en-US" dirty="0"/>
-              <a:t> such that </a:t>
-            </a:r>
-            <a:r>
-              <a:rPr lang="en-US" altLang="en-US" i="1" dirty="0"/>
-              <a:t>T</a:t>
-            </a:r>
-            <a:r>
-              <a:rPr lang="en-US" altLang="en-US" i="1" baseline="-25000" dirty="0"/>
-              <a:t>j</a:t>
-            </a:r>
-            <a:r>
-              <a:rPr lang="en-US" altLang="en-US" dirty="0"/>
-              <a:t>  reads a data item previously written by </a:t>
-            </a:r>
-            <a:r>
-              <a:rPr lang="en-US" altLang="en-US" i="1" dirty="0"/>
-              <a:t>T</a:t>
-            </a:r>
-            <a:r>
-              <a:rPr lang="en-US" altLang="en-US" i="1" baseline="-25000" dirty="0"/>
-              <a:t>i</a:t>
-            </a:r>
-            <a:r>
-              <a:rPr lang="en-US" altLang="en-US" dirty="0"/>
-              <a:t>, the commit operation of </a:t>
-            </a:r>
-            <a:r>
-              <a:rPr lang="en-US" altLang="en-US" i="1" dirty="0"/>
-              <a:t>T</a:t>
-            </a:r>
-            <a:r>
-              <a:rPr lang="en-US" altLang="en-US" i="1" baseline="-25000" dirty="0"/>
-              <a:t>i</a:t>
-            </a:r>
-            <a:r>
-              <a:rPr lang="en-US" altLang="en-US" i="1" dirty="0"/>
-              <a:t> </a:t>
-            </a:r>
-            <a:r>
-              <a:rPr lang="en-US" altLang="en-US" dirty="0"/>
-              <a:t> appears before the read operation of </a:t>
-            </a:r>
-            <a:r>
-              <a:rPr lang="en-US" altLang="en-US" i="1" dirty="0"/>
-              <a:t>T</a:t>
-            </a:r>
-            <a:r>
-              <a:rPr lang="en-US" altLang="en-US" i="1" baseline="-25000" dirty="0"/>
-              <a:t>j</a:t>
-            </a:r>
-            <a:r>
-              <a:rPr lang="en-US" altLang="en-US" dirty="0"/>
-              <a:t>.</a:t>
-            </a:r>
-          </a:p>
-          <a:p>
-            <a:r>
-              <a:rPr lang="en-US" altLang="en-US" dirty="0"/>
-              <a:t>Every </a:t>
-            </a:r>
-            <a:r>
-              <a:rPr lang="en-US" altLang="en-US" dirty="0" smtClean="0"/>
-              <a:t>Cascadeless </a:t>
-            </a:r>
-            <a:r>
-              <a:rPr lang="en-US" altLang="en-US" dirty="0"/>
-              <a:t>schedule is also recoverable</a:t>
-            </a:r>
-          </a:p>
-          <a:p>
-            <a:r>
-              <a:rPr lang="en-US" altLang="en-US" dirty="0"/>
-              <a:t>It is desirable to restrict the schedules to those that are cascadeless</a:t>
-            </a:r>
-          </a:p>
-        </p:txBody>
-      </p:sp>
-    </p:spTree>
-  </p:cSld>
-  <p:clrMapOvr>
-    <a:masterClrMapping/>
-  </p:clrMapOvr>
-</p:sld>
-</file>
-
-<file path=ppt/slides/slide31.xml><?xml version="1.0" encoding="utf-8"?>
-<p:sld xmlns:a="http://schemas.openxmlformats.org/drawingml/2006/main" xmlns:r="http://schemas.openxmlformats.org/officeDocument/2006/relationships" xmlns:p="http://schemas.openxmlformats.org/presentationml/2006/main">
-  <p:cSld>
-    <p:spTree>
-      <p:nvGrpSpPr>
-        <p:cNvPr id="1" name=""/>
-        <p:cNvGrpSpPr/>
-        <p:nvPr/>
-      </p:nvGrpSpPr>
-      <p:grpSpPr>
-        <a:xfrm>
-          <a:off x="0" y="0"/>
-          <a:ext cx="0" cy="0"/>
-          <a:chOff x="0" y="0"/>
-          <a:chExt cx="0" cy="0"/>
-        </a:xfrm>
-      </p:grpSpPr>
-      <p:sp>
-        <p:nvSpPr>
-          <p:cNvPr id="465922" name="Rectangle 2"/>
-          <p:cNvSpPr>
-            <a:spLocks noGrp="1" noChangeArrowheads="1"/>
-          </p:cNvSpPr>
-          <p:nvPr>
-            <p:ph type="title"/>
-          </p:nvPr>
-        </p:nvSpPr>
-        <p:spPr/>
-        <p:txBody>
-          <a:bodyPr/>
-          <a:lstStyle/>
-          <a:p>
-            <a:pPr>
-              <a:defRPr/>
-            </a:pPr>
-            <a:r>
-              <a:rPr lang="en-US">
-                <a:effectLst>
-                  <a:outerShdw blurRad="38100" dist="38100" dir="2700000" algn="tl">
-                    <a:srgbClr val="C0C0C0"/>
-                  </a:outerShdw>
-                </a:effectLst>
-              </a:rPr>
-              <a:t>Concurrency Control</a:t>
-            </a:r>
-          </a:p>
-        </p:txBody>
-      </p:sp>
-      <p:sp>
-        <p:nvSpPr>
-          <p:cNvPr id="34819" name="Rectangle 3"/>
-          <p:cNvSpPr>
-            <a:spLocks noGrp="1" noChangeArrowheads="1"/>
-          </p:cNvSpPr>
-          <p:nvPr>
-            <p:ph idx="1"/>
-          </p:nvPr>
-        </p:nvSpPr>
-        <p:spPr>
-          <a:xfrm>
-            <a:off x="656948" y="1102497"/>
-            <a:ext cx="7812349" cy="5367972"/>
-          </a:xfrm>
-        </p:spPr>
-        <p:txBody>
-          <a:bodyPr/>
-          <a:lstStyle/>
-          <a:p>
-            <a:r>
-              <a:rPr lang="en-US" altLang="en-US" dirty="0"/>
-              <a:t>A database must provide a mechanism that will ensure that all possible schedules are </a:t>
-            </a:r>
-          </a:p>
-          <a:p>
-            <a:pPr lvl="1"/>
-            <a:r>
-              <a:rPr lang="en-US" altLang="en-US" dirty="0"/>
-              <a:t>either conflict or view serializable, and </a:t>
-            </a:r>
-          </a:p>
-          <a:p>
-            <a:pPr lvl="1"/>
-            <a:r>
-              <a:rPr lang="en-US" altLang="en-US" dirty="0"/>
-              <a:t>are recoverable and preferably cascadeless</a:t>
-            </a:r>
-          </a:p>
-          <a:p>
-            <a:r>
-              <a:rPr lang="en-US" altLang="en-US" dirty="0"/>
-              <a:t>A policy in which only one transaction can execute at a time generates serial schedules, but provides a poor degree of concurrency</a:t>
-            </a:r>
-          </a:p>
-          <a:p>
-            <a:pPr lvl="1"/>
-            <a:r>
-              <a:rPr lang="en-US" altLang="en-US" dirty="0"/>
-              <a:t>Are serial schedules recoverable/</a:t>
-            </a:r>
-            <a:r>
-              <a:rPr lang="en-US" altLang="en-US" dirty="0" err="1"/>
-              <a:t>cascadeless</a:t>
-            </a:r>
-            <a:r>
-              <a:rPr lang="en-US" altLang="en-US" dirty="0"/>
-              <a:t>?</a:t>
-            </a:r>
-          </a:p>
-          <a:p>
-            <a:r>
-              <a:rPr lang="en-US" altLang="en-US" dirty="0"/>
-              <a:t>Testing a schedule for serializability </a:t>
-            </a:r>
-            <a:r>
-              <a:rPr lang="en-US" altLang="en-US" i="1" dirty="0"/>
-              <a:t>after</a:t>
-            </a:r>
-            <a:r>
-              <a:rPr lang="en-US" altLang="en-US" dirty="0"/>
-              <a:t> it has executed is a little too late!</a:t>
-            </a:r>
-          </a:p>
-          <a:p>
-            <a:r>
-              <a:rPr lang="en-US" altLang="en-US" b="1" dirty="0">
-                <a:solidFill>
-                  <a:srgbClr val="000099"/>
-                </a:solidFill>
-              </a:rPr>
-              <a:t>Goal</a:t>
-            </a:r>
-            <a:r>
-              <a:rPr lang="en-US" altLang="en-US" dirty="0"/>
-              <a:t> – to develop concurrency control protocols that will assure serializability.</a:t>
-            </a:r>
-          </a:p>
-        </p:txBody>
-      </p:sp>
-    </p:spTree>
-  </p:cSld>
-  <p:clrMapOvr>
-    <a:masterClrMapping/>
-  </p:clrMapOvr>
-</p:sld>
-</file>
-
-<file path=ppt/slides/slide32.xml><?xml version="1.0" encoding="utf-8"?>
-<p:sld xmlns:a="http://schemas.openxmlformats.org/drawingml/2006/main" xmlns:r="http://schemas.openxmlformats.org/officeDocument/2006/relationships" xmlns:p="http://schemas.openxmlformats.org/presentationml/2006/main">
-  <p:cSld>
-    <p:spTree>
-      <p:nvGrpSpPr>
-        <p:cNvPr id="1" name=""/>
-        <p:cNvGrpSpPr/>
-        <p:nvPr/>
-      </p:nvGrpSpPr>
-      <p:grpSpPr>
-        <a:xfrm>
-          <a:off x="0" y="0"/>
-          <a:ext cx="0" cy="0"/>
-          <a:chOff x="0" y="0"/>
-          <a:chExt cx="0" cy="0"/>
-        </a:xfrm>
-      </p:grpSpPr>
-      <p:sp>
-        <p:nvSpPr>
-          <p:cNvPr id="603138" name="Rectangle 2"/>
-          <p:cNvSpPr>
-            <a:spLocks noGrp="1" noChangeArrowheads="1"/>
-          </p:cNvSpPr>
-          <p:nvPr>
-            <p:ph type="title"/>
-          </p:nvPr>
-        </p:nvSpPr>
-        <p:spPr/>
-        <p:txBody>
-          <a:bodyPr/>
-          <a:lstStyle/>
-          <a:p>
-            <a:pPr>
-              <a:defRPr/>
-            </a:pPr>
-            <a:r>
-              <a:rPr lang="en-US">
-                <a:effectLst>
-                  <a:outerShdw blurRad="38100" dist="38100" dir="2700000" algn="tl">
-                    <a:srgbClr val="C0C0C0"/>
-                  </a:outerShdw>
-                </a:effectLst>
-              </a:rPr>
-              <a:t>Concurrency Control (Cont.)</a:t>
-            </a:r>
-          </a:p>
-        </p:txBody>
-      </p:sp>
-      <p:sp>
-        <p:nvSpPr>
-          <p:cNvPr id="35843" name="Rectangle 3"/>
-          <p:cNvSpPr>
-            <a:spLocks noGrp="1" noChangeArrowheads="1"/>
-          </p:cNvSpPr>
-          <p:nvPr>
-            <p:ph idx="1"/>
-          </p:nvPr>
-        </p:nvSpPr>
-        <p:spPr>
-          <a:xfrm>
-            <a:off x="656948" y="1102497"/>
-            <a:ext cx="7803471" cy="5367972"/>
-          </a:xfrm>
-        </p:spPr>
-        <p:txBody>
-          <a:bodyPr/>
-          <a:lstStyle/>
-          <a:p>
-            <a:r>
-              <a:rPr lang="en-US" altLang="en-US" dirty="0"/>
-              <a:t>Schedules must be conflict or view serializable, and recoverable, for the sake of database consistency, and preferably cascadeless.</a:t>
-            </a:r>
-          </a:p>
-          <a:p>
-            <a:r>
-              <a:rPr lang="en-US" altLang="en-US" dirty="0"/>
-              <a:t>A policy in which only one transaction can execute at a time generates serial schedules, but provides a poor degree of concurrency.</a:t>
-            </a:r>
-          </a:p>
-          <a:p>
-            <a:r>
-              <a:rPr lang="en-US" altLang="en-US" dirty="0"/>
-              <a:t>Concurrency-control schemes tradeoff between the amount of concurrency they allow and the amount of overhead that they incur.</a:t>
-            </a:r>
-          </a:p>
-          <a:p>
-            <a:r>
-              <a:rPr lang="en-US" altLang="en-US" dirty="0"/>
-              <a:t>Some schemes allow only conflict-serializable schedules to be generated, while others allow  view-serializable schedules that are not conflict-serializable.</a:t>
-            </a:r>
-          </a:p>
-        </p:txBody>
-      </p:sp>
-    </p:spTree>
-  </p:cSld>
-  <p:clrMapOvr>
-    <a:masterClrMapping/>
-  </p:clrMapOvr>
-</p:sld>
-</file>
-
-<file path=ppt/slides/slide33.xml><?xml version="1.0" encoding="utf-8"?>
-<p:sld xmlns:a="http://schemas.openxmlformats.org/drawingml/2006/main" xmlns:r="http://schemas.openxmlformats.org/officeDocument/2006/relationships" xmlns:p="http://schemas.openxmlformats.org/presentationml/2006/main">
-  <p:cSld>
-    <p:spTree>
-      <p:nvGrpSpPr>
-        <p:cNvPr id="1" name=""/>
-        <p:cNvGrpSpPr/>
-        <p:nvPr/>
-      </p:nvGrpSpPr>
-      <p:grpSpPr>
-        <a:xfrm>
-          <a:off x="0" y="0"/>
-          <a:ext cx="0" cy="0"/>
-          <a:chOff x="0" y="0"/>
-          <a:chExt cx="0" cy="0"/>
-        </a:xfrm>
-      </p:grpSpPr>
-      <p:sp>
-        <p:nvSpPr>
-          <p:cNvPr id="467970" name="Rectangle 2"/>
-          <p:cNvSpPr>
-            <a:spLocks noGrp="1" noChangeArrowheads="1"/>
-          </p:cNvSpPr>
-          <p:nvPr>
-            <p:ph type="title"/>
-          </p:nvPr>
-        </p:nvSpPr>
-        <p:spPr/>
-        <p:txBody>
-          <a:bodyPr/>
-          <a:lstStyle/>
-          <a:p>
-            <a:pPr>
-              <a:defRPr/>
-            </a:pPr>
-            <a:r>
-              <a:rPr lang="en-US" sz="2800" dirty="0">
-                <a:effectLst>
-                  <a:outerShdw blurRad="38100" dist="38100" dir="2700000" algn="tl">
-                    <a:srgbClr val="C0C0C0"/>
-                  </a:outerShdw>
-                </a:effectLst>
-              </a:rPr>
-              <a:t>Concurrency Control vs. Serializability Tests</a:t>
-            </a:r>
-          </a:p>
-        </p:txBody>
-      </p:sp>
-      <p:sp>
-        <p:nvSpPr>
-          <p:cNvPr id="36867" name="Rectangle 3"/>
-          <p:cNvSpPr>
-            <a:spLocks noGrp="1" noChangeArrowheads="1"/>
-          </p:cNvSpPr>
-          <p:nvPr>
-            <p:ph idx="1"/>
-          </p:nvPr>
-        </p:nvSpPr>
-        <p:spPr>
-          <a:xfrm>
-            <a:off x="674702" y="1102497"/>
-            <a:ext cx="7794595" cy="5367972"/>
-          </a:xfrm>
-        </p:spPr>
-        <p:txBody>
-          <a:bodyPr/>
-          <a:lstStyle/>
-          <a:p>
-            <a:r>
-              <a:rPr lang="en-US" altLang="en-US" dirty="0"/>
-              <a:t>Concurrency-control protocols allow concurrent schedules, but ensure that the schedules are conflict/view serializable, and are recoverable and cascadeless .</a:t>
-            </a:r>
-          </a:p>
-          <a:p>
-            <a:r>
-              <a:rPr lang="en-US" altLang="en-US" dirty="0"/>
-              <a:t>Concurrency control protocols (generally) do not examine the precedence graph as it is being created</a:t>
-            </a:r>
-          </a:p>
-          <a:p>
-            <a:pPr lvl="1"/>
-            <a:r>
-              <a:rPr lang="en-US" altLang="en-US" dirty="0"/>
-              <a:t>Instead a protocol imposes a discipline that avoids non-serializable schedules.</a:t>
-            </a:r>
-          </a:p>
-          <a:p>
-            <a:pPr lvl="1"/>
-            <a:r>
-              <a:rPr lang="en-US" altLang="en-US" dirty="0"/>
-              <a:t>We study such protocols in Chapter 16.</a:t>
-            </a:r>
-          </a:p>
-          <a:p>
-            <a:r>
-              <a:rPr lang="en-US" altLang="en-US" dirty="0"/>
-              <a:t>Different concurrency control protocols provide different tradeoffs between the amount of concurrency they allow and the amount of overhead that they incur.</a:t>
-            </a:r>
-          </a:p>
-          <a:p>
-            <a:r>
-              <a:rPr lang="en-US" altLang="en-US" dirty="0"/>
-              <a:t>Tests for serializability help us understand why a concurrency control protocol is correct.   </a:t>
-            </a:r>
-          </a:p>
-          <a:p>
-            <a:endParaRPr lang="en-US" altLang="en-US" dirty="0"/>
-          </a:p>
-        </p:txBody>
-      </p:sp>
-    </p:spTree>
-  </p:cSld>
-  <p:clrMapOvr>
-    <a:masterClrMapping/>
-  </p:clrMapOvr>
-</p:sld>
-</file>
-
-<file path=ppt/slides/slide34.xml><?xml version="1.0" encoding="utf-8"?>
-<p:sld xmlns:a="http://schemas.openxmlformats.org/drawingml/2006/main" xmlns:r="http://schemas.openxmlformats.org/officeDocument/2006/relationships" xmlns:p="http://schemas.openxmlformats.org/presentationml/2006/main">
-  <p:cSld>
-    <p:spTree>
-      <p:nvGrpSpPr>
-        <p:cNvPr id="1" name=""/>
-        <p:cNvGrpSpPr/>
-        <p:nvPr/>
-      </p:nvGrpSpPr>
-      <p:grpSpPr>
-        <a:xfrm>
-          <a:off x="0" y="0"/>
-          <a:ext cx="0" cy="0"/>
-          <a:chOff x="0" y="0"/>
-          <a:chExt cx="0" cy="0"/>
-        </a:xfrm>
-      </p:grpSpPr>
-      <p:sp>
-        <p:nvSpPr>
           <p:cNvPr id="477186" name="Rectangle 2"/>
           <p:cNvSpPr>
             <a:spLocks noGrp="1" noChangeArrowheads="1"/>
@@ -21381,7 +19479,7 @@
               <a:defRPr/>
             </a:pPr>
             <a:r>
-              <a:rPr lang="en-US">
+              <a:rPr lang="en-US" dirty="0">
                 <a:effectLst>
                   <a:outerShdw blurRad="38100" dist="38100" dir="2700000" algn="tl">
                     <a:srgbClr val="C0C0C0"/>
@@ -21455,7 +19553,7 @@
 </p:sld>
 </file>
 
-<file path=ppt/slides/slide35.xml><?xml version="1.0" encoding="utf-8"?>
+<file path=ppt/slides/slide31.xml><?xml version="1.0" encoding="utf-8"?>
 <p:sld xmlns:a="http://schemas.openxmlformats.org/drawingml/2006/main" xmlns:r="http://schemas.openxmlformats.org/officeDocument/2006/relationships" xmlns:p="http://schemas.openxmlformats.org/presentationml/2006/main">
   <p:cSld>
     <p:spTree>
@@ -21491,362 +19589,6 @@
               <a:defRPr/>
             </a:pPr>
             <a:r>
-              <a:rPr lang="en-US">
-                <a:effectLst>
-                  <a:outerShdw blurRad="38100" dist="38100" dir="2700000" algn="tl">
-                    <a:srgbClr val="C0C0C0"/>
-                  </a:outerShdw>
-                </a:effectLst>
-              </a:rPr>
-              <a:t>Levels of Consistency in SQL-92</a:t>
-            </a:r>
-          </a:p>
-        </p:txBody>
-      </p:sp>
-      <p:sp>
-        <p:nvSpPr>
-          <p:cNvPr id="38915" name="Rectangle 3"/>
-          <p:cNvSpPr>
-            <a:spLocks noGrp="1" noChangeArrowheads="1"/>
-          </p:cNvSpPr>
-          <p:nvPr>
-            <p:ph idx="1"/>
-          </p:nvPr>
-        </p:nvSpPr>
-        <p:spPr>
-          <a:xfrm>
-            <a:off x="665824" y="1102497"/>
-            <a:ext cx="7705819" cy="5367972"/>
-          </a:xfrm>
-        </p:spPr>
-        <p:txBody>
-          <a:bodyPr/>
-          <a:lstStyle/>
-          <a:p>
-            <a:r>
-              <a:rPr lang="en-US" altLang="en-US" b="1" dirty="0">
-                <a:solidFill>
-                  <a:srgbClr val="000099"/>
-                </a:solidFill>
-              </a:rPr>
-              <a:t>Serializable</a:t>
-            </a:r>
-            <a:r>
-              <a:rPr lang="en-US" altLang="en-US" b="1" dirty="0"/>
-              <a:t> </a:t>
-            </a:r>
-            <a:r>
-              <a:rPr lang="en-US" altLang="en-US" dirty="0"/>
-              <a:t>— default</a:t>
-            </a:r>
-          </a:p>
-          <a:p>
-            <a:r>
-              <a:rPr lang="en-US" altLang="en-US" b="1" dirty="0">
-                <a:solidFill>
-                  <a:srgbClr val="000099"/>
-                </a:solidFill>
-              </a:rPr>
-              <a:t>Repeatable read</a:t>
-            </a:r>
-            <a:r>
-              <a:rPr lang="en-US" altLang="en-US" b="1" dirty="0"/>
-              <a:t> </a:t>
-            </a:r>
-            <a:r>
-              <a:rPr lang="en-US" altLang="en-US" dirty="0"/>
-              <a:t>—</a:t>
-            </a:r>
-            <a:r>
-              <a:rPr lang="en-US" altLang="en-US" b="1" dirty="0"/>
-              <a:t> </a:t>
-            </a:r>
-            <a:r>
-              <a:rPr lang="en-US" altLang="en-US" dirty="0"/>
-              <a:t>only committed records to be read. </a:t>
-            </a:r>
-          </a:p>
-          <a:p>
-            <a:pPr lvl="1"/>
-            <a:r>
-              <a:rPr lang="en-US" altLang="en-US" dirty="0"/>
-              <a:t>Repeated reads of same record must return same value.</a:t>
-            </a:r>
-          </a:p>
-          <a:p>
-            <a:pPr lvl="1"/>
-            <a:r>
-              <a:rPr lang="en-US" altLang="en-US" dirty="0"/>
-              <a:t>However, a transaction may not be serializable – it may find some records inserted by a transaction but not find others.</a:t>
-            </a:r>
-          </a:p>
-          <a:p>
-            <a:r>
-              <a:rPr lang="en-US" altLang="en-US" b="1" dirty="0">
-                <a:solidFill>
-                  <a:srgbClr val="000099"/>
-                </a:solidFill>
-              </a:rPr>
-              <a:t>Read committed</a:t>
-            </a:r>
-            <a:r>
-              <a:rPr lang="en-US" altLang="en-US" b="1" dirty="0"/>
-              <a:t> </a:t>
-            </a:r>
-            <a:r>
-              <a:rPr lang="en-US" altLang="en-US" dirty="0"/>
-              <a:t>—</a:t>
-            </a:r>
-            <a:r>
-              <a:rPr lang="en-US" altLang="en-US" b="1" dirty="0"/>
-              <a:t> </a:t>
-            </a:r>
-            <a:r>
-              <a:rPr lang="en-US" altLang="en-US" dirty="0"/>
-              <a:t>only committed records can be read.</a:t>
-            </a:r>
-          </a:p>
-          <a:p>
-            <a:pPr lvl="1"/>
-            <a:r>
-              <a:rPr lang="en-US" altLang="en-US" dirty="0"/>
-              <a:t>Successive reads of record may return different (but committed) values.</a:t>
-            </a:r>
-          </a:p>
-          <a:p>
-            <a:r>
-              <a:rPr lang="en-US" altLang="en-US" b="1" dirty="0">
-                <a:solidFill>
-                  <a:srgbClr val="000099"/>
-                </a:solidFill>
-              </a:rPr>
-              <a:t>Read uncommitted</a:t>
-            </a:r>
-            <a:r>
-              <a:rPr lang="en-US" altLang="en-US" dirty="0"/>
-              <a:t> —</a:t>
-            </a:r>
-            <a:r>
-              <a:rPr lang="en-US" altLang="en-US" b="1" dirty="0"/>
-              <a:t> </a:t>
-            </a:r>
-            <a:r>
-              <a:rPr lang="en-US" altLang="en-US" dirty="0"/>
-              <a:t>even uncommitted records may be read. </a:t>
-            </a:r>
-            <a:endParaRPr lang="en-US" altLang="en-US" b="1" dirty="0"/>
-          </a:p>
-        </p:txBody>
-      </p:sp>
-      <p:sp>
-        <p:nvSpPr>
-          <p:cNvPr id="38916" name="Rectangle 5"/>
-          <p:cNvSpPr>
-            <a:spLocks noChangeArrowheads="1"/>
-          </p:cNvSpPr>
-          <p:nvPr/>
-        </p:nvSpPr>
-        <p:spPr bwMode="auto">
-          <a:xfrm>
-            <a:off x="538163" y="4135438"/>
-            <a:ext cx="7527925" cy="1476375"/>
-          </a:xfrm>
-          <a:prstGeom prst="rect">
-            <a:avLst/>
-          </a:prstGeom>
-          <a:noFill/>
-          <a:ln>
-            <a:noFill/>
-          </a:ln>
-          <a:extLst>
-            <a:ext uri="{909E8E84-426E-40DD-AFC4-6F175D3DCCD1}">
-              <a14:hiddenFill xmlns:a14="http://schemas.microsoft.com/office/drawing/2010/main">
-                <a:solidFill>
-                  <a:srgbClr val="FFFFFF"/>
-                </a:solidFill>
-              </a14:hiddenFill>
-            </a:ext>
-            <a:ext uri="{91240B29-F687-4F45-9708-019B960494DF}">
-              <a14:hiddenLine xmlns:a14="http://schemas.microsoft.com/office/drawing/2010/main" w="9525">
-                <a:solidFill>
-                  <a:srgbClr val="000000"/>
-                </a:solidFill>
-                <a:miter lim="800000"/>
-                <a:headEnd/>
-                <a:tailEnd/>
-              </a14:hiddenLine>
-            </a:ext>
-          </a:extLst>
-        </p:spPr>
-        <p:txBody>
-          <a:bodyPr/>
-          <a:lstStyle>
-            <a:lvl1pPr marL="342900" indent="-342900">
-              <a:defRPr sz="1600">
-                <a:solidFill>
-                  <a:schemeClr val="tx1"/>
-                </a:solidFill>
-                <a:latin typeface="Helvetica" panose="020B0604020202020204" pitchFamily="34" charset="0"/>
-                <a:ea typeface="MS PGothic" panose="020B0600070205080204" pitchFamily="34" charset="-128"/>
-              </a:defRPr>
-            </a:lvl1pPr>
-            <a:lvl2pPr marL="742950" indent="-285750">
-              <a:defRPr sz="1600">
-                <a:solidFill>
-                  <a:schemeClr val="tx1"/>
-                </a:solidFill>
-                <a:latin typeface="Helvetica" panose="020B0604020202020204" pitchFamily="34" charset="0"/>
-                <a:ea typeface="MS PGothic" panose="020B0600070205080204" pitchFamily="34" charset="-128"/>
-              </a:defRPr>
-            </a:lvl2pPr>
-            <a:lvl3pPr marL="1143000" indent="-228600">
-              <a:defRPr sz="1600">
-                <a:solidFill>
-                  <a:schemeClr val="tx1"/>
-                </a:solidFill>
-                <a:latin typeface="Helvetica" panose="020B0604020202020204" pitchFamily="34" charset="0"/>
-                <a:ea typeface="MS PGothic" panose="020B0600070205080204" pitchFamily="34" charset="-128"/>
-              </a:defRPr>
-            </a:lvl3pPr>
-            <a:lvl4pPr marL="1600200" indent="-228600">
-              <a:defRPr sz="1600">
-                <a:solidFill>
-                  <a:schemeClr val="tx1"/>
-                </a:solidFill>
-                <a:latin typeface="Helvetica" panose="020B0604020202020204" pitchFamily="34" charset="0"/>
-                <a:ea typeface="MS PGothic" panose="020B0600070205080204" pitchFamily="34" charset="-128"/>
-              </a:defRPr>
-            </a:lvl4pPr>
-            <a:lvl5pPr marL="2057400" indent="-228600">
-              <a:defRPr sz="1600">
-                <a:solidFill>
-                  <a:schemeClr val="tx1"/>
-                </a:solidFill>
-                <a:latin typeface="Helvetica" panose="020B0604020202020204" pitchFamily="34" charset="0"/>
-                <a:ea typeface="MS PGothic" panose="020B0600070205080204" pitchFamily="34" charset="-128"/>
-              </a:defRPr>
-            </a:lvl5pPr>
-            <a:lvl6pPr marL="2514600" indent="-228600" eaLnBrk="0" fontAlgn="base" hangingPunct="0">
-              <a:spcBef>
-                <a:spcPct val="0"/>
-              </a:spcBef>
-              <a:spcAft>
-                <a:spcPct val="0"/>
-              </a:spcAft>
-              <a:defRPr sz="1600">
-                <a:solidFill>
-                  <a:schemeClr val="tx1"/>
-                </a:solidFill>
-                <a:latin typeface="Helvetica" panose="020B0604020202020204" pitchFamily="34" charset="0"/>
-                <a:ea typeface="MS PGothic" panose="020B0600070205080204" pitchFamily="34" charset="-128"/>
-              </a:defRPr>
-            </a:lvl6pPr>
-            <a:lvl7pPr marL="2971800" indent="-228600" eaLnBrk="0" fontAlgn="base" hangingPunct="0">
-              <a:spcBef>
-                <a:spcPct val="0"/>
-              </a:spcBef>
-              <a:spcAft>
-                <a:spcPct val="0"/>
-              </a:spcAft>
-              <a:defRPr sz="1600">
-                <a:solidFill>
-                  <a:schemeClr val="tx1"/>
-                </a:solidFill>
-                <a:latin typeface="Helvetica" panose="020B0604020202020204" pitchFamily="34" charset="0"/>
-                <a:ea typeface="MS PGothic" panose="020B0600070205080204" pitchFamily="34" charset="-128"/>
-              </a:defRPr>
-            </a:lvl7pPr>
-            <a:lvl8pPr marL="3429000" indent="-228600" eaLnBrk="0" fontAlgn="base" hangingPunct="0">
-              <a:spcBef>
-                <a:spcPct val="0"/>
-              </a:spcBef>
-              <a:spcAft>
-                <a:spcPct val="0"/>
-              </a:spcAft>
-              <a:defRPr sz="1600">
-                <a:solidFill>
-                  <a:schemeClr val="tx1"/>
-                </a:solidFill>
-                <a:latin typeface="Helvetica" panose="020B0604020202020204" pitchFamily="34" charset="0"/>
-                <a:ea typeface="MS PGothic" panose="020B0600070205080204" pitchFamily="34" charset="-128"/>
-              </a:defRPr>
-            </a:lvl8pPr>
-            <a:lvl9pPr marL="3886200" indent="-228600" eaLnBrk="0" fontAlgn="base" hangingPunct="0">
-              <a:spcBef>
-                <a:spcPct val="0"/>
-              </a:spcBef>
-              <a:spcAft>
-                <a:spcPct val="0"/>
-              </a:spcAft>
-              <a:defRPr sz="1600">
-                <a:solidFill>
-                  <a:schemeClr val="tx1"/>
-                </a:solidFill>
-                <a:latin typeface="Helvetica" panose="020B0604020202020204" pitchFamily="34" charset="0"/>
-                <a:ea typeface="MS PGothic" panose="020B0600070205080204" pitchFamily="34" charset="-128"/>
-              </a:defRPr>
-            </a:lvl9pPr>
-          </a:lstStyle>
-          <a:p>
-            <a:pPr>
-              <a:spcBef>
-                <a:spcPct val="35000"/>
-              </a:spcBef>
-              <a:buClr>
-                <a:schemeClr val="tx2"/>
-              </a:buClr>
-              <a:buSzPct val="90000"/>
-              <a:buFont typeface="Monotype Sorts" charset="2"/>
-              <a:buChar char="n"/>
-            </a:pPr>
-            <a:endParaRPr lang="en-US" altLang="en-US" sz="1800"/>
-          </a:p>
-        </p:txBody>
-      </p:sp>
-    </p:spTree>
-  </p:cSld>
-  <p:clrMapOvr>
-    <a:masterClrMapping/>
-  </p:clrMapOvr>
-</p:sld>
-</file>
-
-<file path=ppt/slides/slide36.xml><?xml version="1.0" encoding="utf-8"?>
-<p:sld xmlns:a="http://schemas.openxmlformats.org/drawingml/2006/main" xmlns:r="http://schemas.openxmlformats.org/officeDocument/2006/relationships" xmlns:p="http://schemas.openxmlformats.org/presentationml/2006/main">
-  <p:cSld>
-    <p:spTree>
-      <p:nvGrpSpPr>
-        <p:cNvPr id="1" name=""/>
-        <p:cNvGrpSpPr/>
-        <p:nvPr/>
-      </p:nvGrpSpPr>
-      <p:grpSpPr>
-        <a:xfrm>
-          <a:off x="0" y="0"/>
-          <a:ext cx="0" cy="0"/>
-          <a:chOff x="0" y="0"/>
-          <a:chExt cx="0" cy="0"/>
-        </a:xfrm>
-      </p:grpSpPr>
-      <p:sp>
-        <p:nvSpPr>
-          <p:cNvPr id="406530" name="Rectangle 2"/>
-          <p:cNvSpPr>
-            <a:spLocks noGrp="1" noChangeArrowheads="1"/>
-          </p:cNvSpPr>
-          <p:nvPr>
-            <p:ph type="title"/>
-          </p:nvPr>
-        </p:nvSpPr>
-        <p:spPr/>
-        <p:txBody>
-          <a:bodyPr/>
-          <a:lstStyle/>
-          <a:p>
-            <a:pPr>
-              <a:defRPr/>
-            </a:pPr>
-            <a:r>
               <a:rPr lang="en-US" dirty="0">
                 <a:effectLst>
                   <a:outerShdw blurRad="38100" dist="38100" dir="2700000" algn="tl">
@@ -21864,7 +19606,7 @@
           <p:cNvPr id="2" name="Content Placeholder 1">
             <a:extLst>
               <a:ext uri="{FF2B5EF4-FFF2-40B4-BE49-F238E27FC236}">
-                <a16:creationId xmlns:a16="http://schemas.microsoft.com/office/drawing/2014/main" id="{E247170A-C2C0-4F36-8AA4-43A13105431D}"/>
+                <a16:creationId xmlns:a16="http://schemas.microsoft.com/office/drawing/2014/main" xmlns="" id="{E247170A-C2C0-4F36-8AA4-43A13105431D}"/>
               </a:ext>
             </a:extLst>
           </p:cNvPr>
@@ -22087,7 +19829,7 @@
 </p:sld>
 </file>
 
-<file path=ppt/slides/slide37.xml><?xml version="1.0" encoding="utf-8"?>
+<file path=ppt/slides/slide32.xml><?xml version="1.0" encoding="utf-8"?>
 <p:sld xmlns:a="http://schemas.openxmlformats.org/drawingml/2006/main" xmlns:r="http://schemas.openxmlformats.org/officeDocument/2006/relationships" xmlns:p="http://schemas.openxmlformats.org/presentationml/2006/main">
   <p:cSld>
     <p:spTree>
@@ -22279,7 +20021,7 @@
 </p:sld>
 </file>
 
-<file path=ppt/slides/slide38.xml><?xml version="1.0" encoding="utf-8"?>
+<file path=ppt/slides/slide33.xml><?xml version="1.0" encoding="utf-8"?>
 <p:sld xmlns:a="http://schemas.openxmlformats.org/drawingml/2006/main" xmlns:r="http://schemas.openxmlformats.org/officeDocument/2006/relationships" xmlns:p="http://schemas.openxmlformats.org/presentationml/2006/main">
   <p:cSld>
     <p:spTree>
@@ -22301,7 +20043,7 @@
           <p:cNvPr id="2" name="Title 1">
             <a:extLst>
               <a:ext uri="{FF2B5EF4-FFF2-40B4-BE49-F238E27FC236}">
-                <a16:creationId xmlns:a16="http://schemas.microsoft.com/office/drawing/2014/main" id="{6BE1ACAF-F04B-44BB-A5C2-EAE4A5FBD7DE}"/>
+                <a16:creationId xmlns:a16="http://schemas.microsoft.com/office/drawing/2014/main" xmlns="" id="{6BE1ACAF-F04B-44BB-A5C2-EAE4A5FBD7DE}"/>
               </a:ext>
             </a:extLst>
           </p:cNvPr>
@@ -22329,7 +20071,7 @@
           <p:cNvPr id="3" name="Content Placeholder 2">
             <a:extLst>
               <a:ext uri="{FF2B5EF4-FFF2-40B4-BE49-F238E27FC236}">
-                <a16:creationId xmlns:a16="http://schemas.microsoft.com/office/drawing/2014/main" id="{96E06DFC-E228-4A51-A4C2-91BB66D41B27}"/>
+                <a16:creationId xmlns:a16="http://schemas.microsoft.com/office/drawing/2014/main" xmlns="" id="{96E06DFC-E228-4A51-A4C2-91BB66D41B27}"/>
               </a:ext>
             </a:extLst>
           </p:cNvPr>
@@ -22446,7 +20188,7 @@
 </p:sld>
 </file>
 
-<file path=ppt/slides/slide39.xml><?xml version="1.0" encoding="utf-8"?>
+<file path=ppt/slides/slide34.xml><?xml version="1.0" encoding="utf-8"?>
 <p:sld xmlns:a="http://schemas.openxmlformats.org/drawingml/2006/main" xmlns:r="http://schemas.openxmlformats.org/officeDocument/2006/relationships" xmlns:p="http://schemas.openxmlformats.org/presentationml/2006/main">
   <p:cSld>
     <p:spTree>
@@ -22468,7 +20210,7 @@
           <p:cNvPr id="2" name="Title 1">
             <a:extLst>
               <a:ext uri="{FF2B5EF4-FFF2-40B4-BE49-F238E27FC236}">
-                <a16:creationId xmlns:a16="http://schemas.microsoft.com/office/drawing/2014/main" id="{37236548-0516-4E04-B705-F7A54C9E8ABE}"/>
+                <a16:creationId xmlns:a16="http://schemas.microsoft.com/office/drawing/2014/main" xmlns="" id="{37236548-0516-4E04-B705-F7A54C9E8ABE}"/>
               </a:ext>
             </a:extLst>
           </p:cNvPr>
@@ -22496,7 +20238,7 @@
           <p:cNvPr id="3" name="Content Placeholder 2">
             <a:extLst>
               <a:ext uri="{FF2B5EF4-FFF2-40B4-BE49-F238E27FC236}">
-                <a16:creationId xmlns:a16="http://schemas.microsoft.com/office/drawing/2014/main" id="{F275E497-18AF-475A-B6A4-049AF234E8D0}"/>
+                <a16:creationId xmlns:a16="http://schemas.microsoft.com/office/drawing/2014/main" xmlns="" id="{F275E497-18AF-475A-B6A4-049AF234E8D0}"/>
               </a:ext>
             </a:extLst>
           </p:cNvPr>
@@ -23082,93 +20824,6 @@
         </p:txBody>
       </p:sp>
     </p:spTree>
-  </p:cSld>
-  <p:clrMapOvr>
-    <a:masterClrMapping/>
-  </p:clrMapOvr>
-</p:sld>
-</file>
-
-<file path=ppt/slides/slide40.xml><?xml version="1.0" encoding="utf-8"?>
-<p:sld xmlns:a="http://schemas.openxmlformats.org/drawingml/2006/main" xmlns:r="http://schemas.openxmlformats.org/officeDocument/2006/relationships" xmlns:p="http://schemas.openxmlformats.org/presentationml/2006/main">
-  <p:cSld>
-    <p:spTree>
-      <p:nvGrpSpPr>
-        <p:cNvPr id="1" name=""/>
-        <p:cNvGrpSpPr/>
-        <p:nvPr/>
-      </p:nvGrpSpPr>
-      <p:grpSpPr>
-        <a:xfrm>
-          <a:off x="0" y="0"/>
-          <a:ext cx="0" cy="0"/>
-          <a:chOff x="0" y="0"/>
-          <a:chExt cx="0" cy="0"/>
-        </a:xfrm>
-      </p:grpSpPr>
-      <p:sp>
-        <p:nvSpPr>
-          <p:cNvPr id="3" name="Content Placeholder 2">
-            <a:extLst>
-              <a:ext uri="{FF2B5EF4-FFF2-40B4-BE49-F238E27FC236}">
-                <a16:creationId xmlns:a16="http://schemas.microsoft.com/office/drawing/2014/main" id="{A5C369F0-E989-4F4E-9740-0E12922F33DE}"/>
-              </a:ext>
-            </a:extLst>
-          </p:cNvPr>
-          <p:cNvSpPr>
-            <a:spLocks noGrp="1"/>
-          </p:cNvSpPr>
-          <p:nvPr>
-            <p:ph idx="1"/>
-          </p:nvPr>
-        </p:nvSpPr>
-        <p:spPr>
-          <a:xfrm>
-            <a:off x="2643947" y="2796646"/>
-            <a:ext cx="5168964" cy="815505"/>
-          </a:xfrm>
-        </p:spPr>
-        <p:txBody>
-          <a:bodyPr/>
-          <a:lstStyle/>
-          <a:p>
-            <a:pPr marL="0" indent="0">
-              <a:buNone/>
-            </a:pPr>
-            <a:r>
-              <a:rPr lang="en-IN" sz="3200" b="1" dirty="0" smtClean="0">
-                <a:solidFill>
-                  <a:srgbClr val="002060"/>
-                </a:solidFill>
-                <a:effectLst>
-                  <a:outerShdw blurRad="38100" dist="38100" dir="2700000" algn="tl">
-                    <a:srgbClr val="DDDDDD"/>
-                  </a:outerShdw>
-                </a:effectLst>
-                <a:latin typeface="+mj-lt"/>
-              </a:rPr>
-              <a:t>End of Chapter 17</a:t>
-            </a:r>
-            <a:endParaRPr lang="en-IN" sz="3200" b="1" dirty="0">
-              <a:solidFill>
-                <a:srgbClr val="002060"/>
-              </a:solidFill>
-              <a:effectLst>
-                <a:outerShdw blurRad="38100" dist="38100" dir="2700000" algn="tl">
-                  <a:srgbClr val="DDDDDD"/>
-                </a:outerShdw>
-              </a:effectLst>
-              <a:latin typeface="+mj-lt"/>
-            </a:endParaRPr>
-          </a:p>
-        </p:txBody>
-      </p:sp>
-    </p:spTree>
-    <p:extLst>
-      <p:ext uri="{BB962C8B-B14F-4D97-AF65-F5344CB8AC3E}">
-        <p14:creationId xmlns:p14="http://schemas.microsoft.com/office/powerpoint/2010/main" val="2223778985"/>
-      </p:ext>
-    </p:extLst>
   </p:cSld>
   <p:clrMapOvr>
     <a:masterClrMapping/>
